--- a/Spidey-Sense Transit Presentation.pptx
+++ b/Spidey-Sense Transit Presentation.pptx
@@ -1,133 +1,147 @@
 
 <file path=ppt/presentation.xml><?xml version="1.0" encoding="utf-8"?>
-<ns0:presentation xmlns:ns0="http://schemas.openxmlformats.org/presentationml/2006/main" xmlns:ns1="http://schemas.openxmlformats.org/officeDocument/2006/relationships" xmlns:ns2="http://schemas.openxmlformats.org/drawingml/2006/main" saveSubsetFonts="1" autoCompressPictures="0" embedTrueTypeFonts="1">
-  <ns0:sldMasterIdLst>
-    <ns0:sldMasterId id="2147483648" ns1:id="rId1"/>
-  </ns0:sldMasterIdLst>
-  <ns0:sldIdLst>
-    <ns0:sldId id="256" ns1:id="rId7"/>
-    <ns0:sldId id="257" ns1:id="rId8"/>
-    <ns0:sldId id="258" ns1:id="rId9"/>
-    <ns0:sldId id="259" ns1:id="rId10"/>
-    <ns0:sldId id="260" ns1:id="rId11"/>
-    <ns0:sldId id="261" ns1:id="rId12"/>
-    <ns0:sldId id="262" ns1:id="rId13"/>
-    <ns0:sldId id="263" ns1:id="rId14"/>
-    <ns0:sldId id="264" ns1:id="rId15"/>
-    <ns0:sldId id="265" ns1:id="rId16"/>
-    <ns0:sldId id="266" ns1:id="rId17"/>
-    <ns0:sldId id="267" ns1:id="rId18"/>
-    <ns0:sldId id="268" ns1:id="rId19"/>
-  </ns0:sldIdLst>
-  <ns0:sldSz cx="12192000" cy="6858000" type="screen4x3"/>
-  <ns0:notesSz cx="6858000" cy="9144000"/>
-  <ns0:embeddedFontLst>
-    <ns0:embeddedFont>
-      <ns0:font typeface="Inter"/>
-      <ns0:bold ns1:id="rIdFont20"/>
-      <ns0:regular ns1:id="rIdFont21"/>
-    </ns0:embeddedFont>
-    <ns0:embeddedFont>
-      <ns0:font typeface="Outfit"/>
-      <ns0:bold ns1:id="rIdFont22"/>
-    </ns0:embeddedFont>
-  </ns0:embeddedFontLst>
-  <ns0:defaultTextStyle>
-    <ns2:defPPr>
-      <ns2:defRPr lang="en-US"/>
-    </ns2:defPPr>
-    <ns2:lvl1pPr marL="0" algn="l" defTabSz="457200" rtl="0" eaLnBrk="1" latinLnBrk="0" hangingPunct="1">
-      <ns2:defRPr sz="1800" kern="1200">
-        <ns2:solidFill>
-          <ns2:schemeClr val="tx1"/>
-        </ns2:solidFill>
-        <ns2:latin typeface="+mn-lt"/>
-        <ns2:ea typeface="+mn-ea"/>
-        <ns2:cs typeface="+mn-cs"/>
-      </ns2:defRPr>
-    </ns2:lvl1pPr>
-    <ns2:lvl2pPr marL="457200" algn="l" defTabSz="457200" rtl="0" eaLnBrk="1" latinLnBrk="0" hangingPunct="1">
-      <ns2:defRPr sz="1800" kern="1200">
-        <ns2:solidFill>
-          <ns2:schemeClr val="tx1"/>
-        </ns2:solidFill>
-        <ns2:latin typeface="+mn-lt"/>
-        <ns2:ea typeface="+mn-ea"/>
-        <ns2:cs typeface="+mn-cs"/>
-      </ns2:defRPr>
-    </ns2:lvl2pPr>
-    <ns2:lvl3pPr marL="914400" algn="l" defTabSz="457200" rtl="0" eaLnBrk="1" latinLnBrk="0" hangingPunct="1">
-      <ns2:defRPr sz="1800" kern="1200">
-        <ns2:solidFill>
-          <ns2:schemeClr val="tx1"/>
-        </ns2:solidFill>
-        <ns2:latin typeface="+mn-lt"/>
-        <ns2:ea typeface="+mn-ea"/>
-        <ns2:cs typeface="+mn-cs"/>
-      </ns2:defRPr>
-    </ns2:lvl3pPr>
-    <ns2:lvl4pPr marL="1371600" algn="l" defTabSz="457200" rtl="0" eaLnBrk="1" latinLnBrk="0" hangingPunct="1">
-      <ns2:defRPr sz="1800" kern="1200">
-        <ns2:solidFill>
-          <ns2:schemeClr val="tx1"/>
-        </ns2:solidFill>
-        <ns2:latin typeface="+mn-lt"/>
-        <ns2:ea typeface="+mn-ea"/>
-        <ns2:cs typeface="+mn-cs"/>
-      </ns2:defRPr>
-    </ns2:lvl4pPr>
-    <ns2:lvl5pPr marL="1828800" algn="l" defTabSz="457200" rtl="0" eaLnBrk="1" latinLnBrk="0" hangingPunct="1">
-      <ns2:defRPr sz="1800" kern="1200">
-        <ns2:solidFill>
-          <ns2:schemeClr val="tx1"/>
-        </ns2:solidFill>
-        <ns2:latin typeface="+mn-lt"/>
-        <ns2:ea typeface="+mn-ea"/>
-        <ns2:cs typeface="+mn-cs"/>
-      </ns2:defRPr>
-    </ns2:lvl5pPr>
-    <ns2:lvl6pPr marL="2286000" algn="l" defTabSz="457200" rtl="0" eaLnBrk="1" latinLnBrk="0" hangingPunct="1">
-      <ns2:defRPr sz="1800" kern="1200">
-        <ns2:solidFill>
-          <ns2:schemeClr val="tx1"/>
-        </ns2:solidFill>
-        <ns2:latin typeface="+mn-lt"/>
-        <ns2:ea typeface="+mn-ea"/>
-        <ns2:cs typeface="+mn-cs"/>
-      </ns2:defRPr>
-    </ns2:lvl6pPr>
-    <ns2:lvl7pPr marL="2743200" algn="l" defTabSz="457200" rtl="0" eaLnBrk="1" latinLnBrk="0" hangingPunct="1">
-      <ns2:defRPr sz="1800" kern="1200">
-        <ns2:solidFill>
-          <ns2:schemeClr val="tx1"/>
-        </ns2:solidFill>
-        <ns2:latin typeface="+mn-lt"/>
-        <ns2:ea typeface="+mn-ea"/>
-        <ns2:cs typeface="+mn-cs"/>
-      </ns2:defRPr>
-    </ns2:lvl7pPr>
-    <ns2:lvl8pPr marL="3200400" algn="l" defTabSz="457200" rtl="0" eaLnBrk="1" latinLnBrk="0" hangingPunct="1">
-      <ns2:defRPr sz="1800" kern="1200">
-        <ns2:solidFill>
-          <ns2:schemeClr val="tx1"/>
-        </ns2:solidFill>
-        <ns2:latin typeface="+mn-lt"/>
-        <ns2:ea typeface="+mn-ea"/>
-        <ns2:cs typeface="+mn-cs"/>
-      </ns2:defRPr>
-    </ns2:lvl8pPr>
-    <ns2:lvl9pPr marL="3657600" algn="l" defTabSz="457200" rtl="0" eaLnBrk="1" latinLnBrk="0" hangingPunct="1">
-      <ns2:defRPr sz="1800" kern="1200">
-        <ns2:solidFill>
-          <ns2:schemeClr val="tx1"/>
-        </ns2:solidFill>
-        <ns2:latin typeface="+mn-lt"/>
-        <ns2:ea typeface="+mn-ea"/>
-        <ns2:cs typeface="+mn-cs"/>
-      </ns2:defRPr>
-    </ns2:lvl9pPr>
-  </ns0:defaultTextStyle>
-</ns0:presentation>
+<p:presentation xmlns:a="http://schemas.openxmlformats.org/drawingml/2006/main" xmlns:r="http://schemas.openxmlformats.org/officeDocument/2006/relationships" xmlns:p="http://schemas.openxmlformats.org/presentationml/2006/main" embedTrueTypeFonts="1" saveSubsetFonts="1" autoCompressPictures="0">
+  <p:sldMasterIdLst>
+    <p:sldMasterId id="2147483648" r:id="rId1"/>
+  </p:sldMasterIdLst>
+  <p:sldIdLst>
+    <p:sldId id="256" r:id="rId2"/>
+    <p:sldId id="257" r:id="rId3"/>
+    <p:sldId id="258" r:id="rId4"/>
+    <p:sldId id="259" r:id="rId5"/>
+    <p:sldId id="260" r:id="rId6"/>
+    <p:sldId id="261" r:id="rId7"/>
+    <p:sldId id="262" r:id="rId8"/>
+    <p:sldId id="263" r:id="rId9"/>
+    <p:sldId id="264" r:id="rId10"/>
+    <p:sldId id="265" r:id="rId11"/>
+    <p:sldId id="266" r:id="rId12"/>
+    <p:sldId id="267" r:id="rId13"/>
+  </p:sldIdLst>
+  <p:sldSz cx="12192000" cy="6858000"/>
+  <p:notesSz cx="6858000" cy="9144000"/>
+  <p:embeddedFontLst>
+    <p:embeddedFont>
+      <p:font typeface="Inter"/>
+      <p:bold r:id="rId14"/>
+    </p:embeddedFont>
+    <p:embeddedFont>
+      <p:font typeface="Outfit"/>
+      <p:bold r:id="rId15"/>
+    </p:embeddedFont>
+  </p:embeddedFontLst>
+  <p:defaultTextStyle>
+    <a:defPPr>
+      <a:defRPr lang="en-US"/>
+    </a:defPPr>
+    <a:lvl1pPr marL="0" algn="l" defTabSz="457200" rtl="0" eaLnBrk="1" latinLnBrk="0" hangingPunct="1">
+      <a:defRPr sz="1800" kern="1200">
+        <a:solidFill>
+          <a:schemeClr val="tx1"/>
+        </a:solidFill>
+        <a:latin typeface="+mn-lt"/>
+        <a:ea typeface="+mn-ea"/>
+        <a:cs typeface="+mn-cs"/>
+      </a:defRPr>
+    </a:lvl1pPr>
+    <a:lvl2pPr marL="457200" algn="l" defTabSz="457200" rtl="0" eaLnBrk="1" latinLnBrk="0" hangingPunct="1">
+      <a:defRPr sz="1800" kern="1200">
+        <a:solidFill>
+          <a:schemeClr val="tx1"/>
+        </a:solidFill>
+        <a:latin typeface="+mn-lt"/>
+        <a:ea typeface="+mn-ea"/>
+        <a:cs typeface="+mn-cs"/>
+      </a:defRPr>
+    </a:lvl2pPr>
+    <a:lvl3pPr marL="914400" algn="l" defTabSz="457200" rtl="0" eaLnBrk="1" latinLnBrk="0" hangingPunct="1">
+      <a:defRPr sz="1800" kern="1200">
+        <a:solidFill>
+          <a:schemeClr val="tx1"/>
+        </a:solidFill>
+        <a:latin typeface="+mn-lt"/>
+        <a:ea typeface="+mn-ea"/>
+        <a:cs typeface="+mn-cs"/>
+      </a:defRPr>
+    </a:lvl3pPr>
+    <a:lvl4pPr marL="1371600" algn="l" defTabSz="457200" rtl="0" eaLnBrk="1" latinLnBrk="0" hangingPunct="1">
+      <a:defRPr sz="1800" kern="1200">
+        <a:solidFill>
+          <a:schemeClr val="tx1"/>
+        </a:solidFill>
+        <a:latin typeface="+mn-lt"/>
+        <a:ea typeface="+mn-ea"/>
+        <a:cs typeface="+mn-cs"/>
+      </a:defRPr>
+    </a:lvl4pPr>
+    <a:lvl5pPr marL="1828800" algn="l" defTabSz="457200" rtl="0" eaLnBrk="1" latinLnBrk="0" hangingPunct="1">
+      <a:defRPr sz="1800" kern="1200">
+        <a:solidFill>
+          <a:schemeClr val="tx1"/>
+        </a:solidFill>
+        <a:latin typeface="+mn-lt"/>
+        <a:ea typeface="+mn-ea"/>
+        <a:cs typeface="+mn-cs"/>
+      </a:defRPr>
+    </a:lvl5pPr>
+    <a:lvl6pPr marL="2286000" algn="l" defTabSz="457200" rtl="0" eaLnBrk="1" latinLnBrk="0" hangingPunct="1">
+      <a:defRPr sz="1800" kern="1200">
+        <a:solidFill>
+          <a:schemeClr val="tx1"/>
+        </a:solidFill>
+        <a:latin typeface="+mn-lt"/>
+        <a:ea typeface="+mn-ea"/>
+        <a:cs typeface="+mn-cs"/>
+      </a:defRPr>
+    </a:lvl6pPr>
+    <a:lvl7pPr marL="2743200" algn="l" defTabSz="457200" rtl="0" eaLnBrk="1" latinLnBrk="0" hangingPunct="1">
+      <a:defRPr sz="1800" kern="1200">
+        <a:solidFill>
+          <a:schemeClr val="tx1"/>
+        </a:solidFill>
+        <a:latin typeface="+mn-lt"/>
+        <a:ea typeface="+mn-ea"/>
+        <a:cs typeface="+mn-cs"/>
+      </a:defRPr>
+    </a:lvl7pPr>
+    <a:lvl8pPr marL="3200400" algn="l" defTabSz="457200" rtl="0" eaLnBrk="1" latinLnBrk="0" hangingPunct="1">
+      <a:defRPr sz="1800" kern="1200">
+        <a:solidFill>
+          <a:schemeClr val="tx1"/>
+        </a:solidFill>
+        <a:latin typeface="+mn-lt"/>
+        <a:ea typeface="+mn-ea"/>
+        <a:cs typeface="+mn-cs"/>
+      </a:defRPr>
+    </a:lvl8pPr>
+    <a:lvl9pPr marL="3657600" algn="l" defTabSz="457200" rtl="0" eaLnBrk="1" latinLnBrk="0" hangingPunct="1">
+      <a:defRPr sz="1800" kern="1200">
+        <a:solidFill>
+          <a:schemeClr val="tx1"/>
+        </a:solidFill>
+        <a:latin typeface="+mn-lt"/>
+        <a:ea typeface="+mn-ea"/>
+        <a:cs typeface="+mn-cs"/>
+      </a:defRPr>
+    </a:lvl9pPr>
+  </p:defaultTextStyle>
+  <p:extLst>
+    <p:ext uri="{EFAFB233-063F-42B5-8137-9DF3F51BA10A}">
+      <p15:sldGuideLst xmlns:p15="http://schemas.microsoft.com/office/powerpoint/2012/main">
+        <p15:guide id="1" orient="horz" pos="2160">
+          <p15:clr>
+            <a:srgbClr val="A4A3A4"/>
+          </p15:clr>
+        </p15:guide>
+        <p15:guide id="2" pos="2880">
+          <p15:clr>
+            <a:srgbClr val="A4A3A4"/>
+          </p15:clr>
+        </p15:guide>
+      </p15:sldGuideLst>
+    </p:ext>
+  </p:extLst>
+</p:presentation>
 </file>
 
 <file path=ppt/slideLayouts/slideLayout1.xml><?xml version="1.0" encoding="utf-8"?>
@@ -168,10 +182,9 @@
           <a:lstStyle/>
           <a:p>
             <a:r>
-              <a:rPr lang="en-US" smtClean="0"/>
+              <a:rPr lang="en-US"/>
               <a:t>Click to edit Master title style</a:t>
             </a:r>
-            <a:endParaRPr lang="en-US"/>
           </a:p>
         </p:txBody>
       </p:sp>
@@ -287,10 +300,9 @@
           </a:lstStyle>
           <a:p>
             <a:r>
-              <a:rPr lang="en-US" smtClean="0"/>
+              <a:rPr lang="en-US"/>
               <a:t>Click to edit Master subtitle style</a:t>
             </a:r>
-            <a:endParaRPr lang="en-US"/>
           </a:p>
         </p:txBody>
       </p:sp>
@@ -311,7 +323,7 @@
           <a:p>
             <a:fld id="{5BCAD085-E8A6-8845-BD4E-CB4CCA059FC4}" type="datetimeFigureOut">
               <a:rPr lang="en-US" smtClean="0"/>
-              <a:t>1/27/13</a:t>
+              <a:t>9/20/2026</a:t>
             </a:fld>
             <a:endParaRPr lang="en-US"/>
           </a:p>
@@ -405,10 +417,9 @@
           <a:lstStyle/>
           <a:p>
             <a:r>
-              <a:rPr lang="en-US" smtClean="0"/>
+              <a:rPr lang="en-US"/>
               <a:t>Click to edit Master title style</a:t>
             </a:r>
-            <a:endParaRPr lang="en-US"/>
           </a:p>
         </p:txBody>
       </p:sp>
@@ -429,38 +440,37 @@
           <a:p>
             <a:pPr lvl="0"/>
             <a:r>
-              <a:rPr lang="en-US" smtClean="0"/>
+              <a:rPr lang="en-US"/>
               <a:t>Click to edit Master text styles</a:t>
             </a:r>
           </a:p>
           <a:p>
             <a:pPr lvl="1"/>
             <a:r>
-              <a:rPr lang="en-US" smtClean="0"/>
+              <a:rPr lang="en-US"/>
               <a:t>Second level</a:t>
             </a:r>
           </a:p>
           <a:p>
             <a:pPr lvl="2"/>
             <a:r>
-              <a:rPr lang="en-US" smtClean="0"/>
+              <a:rPr lang="en-US"/>
               <a:t>Third level</a:t>
             </a:r>
           </a:p>
           <a:p>
             <a:pPr lvl="3"/>
             <a:r>
-              <a:rPr lang="en-US" smtClean="0"/>
+              <a:rPr lang="en-US"/>
               <a:t>Fourth level</a:t>
             </a:r>
           </a:p>
           <a:p>
             <a:pPr lvl="4"/>
             <a:r>
-              <a:rPr lang="en-US" smtClean="0"/>
+              <a:rPr lang="en-US"/>
               <a:t>Fifth level</a:t>
             </a:r>
-            <a:endParaRPr lang="en-US"/>
           </a:p>
         </p:txBody>
       </p:sp>
@@ -481,7 +491,7 @@
           <a:p>
             <a:fld id="{5BCAD085-E8A6-8845-BD4E-CB4CCA059FC4}" type="datetimeFigureOut">
               <a:rPr lang="en-US" smtClean="0"/>
-              <a:t>1/27/13</a:t>
+              <a:t>9/20/2026</a:t>
             </a:fld>
             <a:endParaRPr lang="en-US"/>
           </a:p>
@@ -580,10 +590,9 @@
           <a:lstStyle/>
           <a:p>
             <a:r>
-              <a:rPr lang="en-US" smtClean="0"/>
+              <a:rPr lang="en-US"/>
               <a:t>Click to edit Master title style</a:t>
             </a:r>
-            <a:endParaRPr lang="en-US"/>
           </a:p>
         </p:txBody>
       </p:sp>
@@ -609,38 +618,37 @@
           <a:p>
             <a:pPr lvl="0"/>
             <a:r>
-              <a:rPr lang="en-US" smtClean="0"/>
+              <a:rPr lang="en-US"/>
               <a:t>Click to edit Master text styles</a:t>
             </a:r>
           </a:p>
           <a:p>
             <a:pPr lvl="1"/>
             <a:r>
-              <a:rPr lang="en-US" smtClean="0"/>
+              <a:rPr lang="en-US"/>
               <a:t>Second level</a:t>
             </a:r>
           </a:p>
           <a:p>
             <a:pPr lvl="2"/>
             <a:r>
-              <a:rPr lang="en-US" smtClean="0"/>
+              <a:rPr lang="en-US"/>
               <a:t>Third level</a:t>
             </a:r>
           </a:p>
           <a:p>
             <a:pPr lvl="3"/>
             <a:r>
-              <a:rPr lang="en-US" smtClean="0"/>
+              <a:rPr lang="en-US"/>
               <a:t>Fourth level</a:t>
             </a:r>
           </a:p>
           <a:p>
             <a:pPr lvl="4"/>
             <a:r>
-              <a:rPr lang="en-US" smtClean="0"/>
+              <a:rPr lang="en-US"/>
               <a:t>Fifth level</a:t>
             </a:r>
-            <a:endParaRPr lang="en-US"/>
           </a:p>
         </p:txBody>
       </p:sp>
@@ -661,7 +669,7 @@
           <a:p>
             <a:fld id="{5BCAD085-E8A6-8845-BD4E-CB4CCA059FC4}" type="datetimeFigureOut">
               <a:rPr lang="en-US" smtClean="0"/>
-              <a:t>1/27/13</a:t>
+              <a:t>9/20/2026</a:t>
             </a:fld>
             <a:endParaRPr lang="en-US"/>
           </a:p>
@@ -755,10 +763,9 @@
           <a:lstStyle/>
           <a:p>
             <a:r>
-              <a:rPr lang="en-US" smtClean="0"/>
+              <a:rPr lang="en-US"/>
               <a:t>Click to edit Master title style</a:t>
             </a:r>
-            <a:endParaRPr lang="en-US"/>
           </a:p>
         </p:txBody>
       </p:sp>
@@ -779,38 +786,37 @@
           <a:p>
             <a:pPr lvl="0"/>
             <a:r>
-              <a:rPr lang="en-US" smtClean="0"/>
+              <a:rPr lang="en-US"/>
               <a:t>Click to edit Master text styles</a:t>
             </a:r>
           </a:p>
           <a:p>
             <a:pPr lvl="1"/>
             <a:r>
-              <a:rPr lang="en-US" smtClean="0"/>
+              <a:rPr lang="en-US"/>
               <a:t>Second level</a:t>
             </a:r>
           </a:p>
           <a:p>
             <a:pPr lvl="2"/>
             <a:r>
-              <a:rPr lang="en-US" smtClean="0"/>
+              <a:rPr lang="en-US"/>
               <a:t>Third level</a:t>
             </a:r>
           </a:p>
           <a:p>
             <a:pPr lvl="3"/>
             <a:r>
-              <a:rPr lang="en-US" smtClean="0"/>
+              <a:rPr lang="en-US"/>
               <a:t>Fourth level</a:t>
             </a:r>
           </a:p>
           <a:p>
             <a:pPr lvl="4"/>
             <a:r>
-              <a:rPr lang="en-US" smtClean="0"/>
+              <a:rPr lang="en-US"/>
               <a:t>Fifth level</a:t>
             </a:r>
-            <a:endParaRPr lang="en-US"/>
           </a:p>
         </p:txBody>
       </p:sp>
@@ -831,7 +837,7 @@
           <a:p>
             <a:fld id="{5BCAD085-E8A6-8845-BD4E-CB4CCA059FC4}" type="datetimeFigureOut">
               <a:rPr lang="en-US" smtClean="0"/>
-              <a:t>1/27/13</a:t>
+              <a:t>9/20/2026</a:t>
             </a:fld>
             <a:endParaRPr lang="en-US"/>
           </a:p>
@@ -934,10 +940,9 @@
           </a:lstStyle>
           <a:p>
             <a:r>
-              <a:rPr lang="en-US" smtClean="0"/>
+              <a:rPr lang="en-US"/>
               <a:t>Click to edit Master title style</a:t>
             </a:r>
-            <a:endParaRPr lang="en-US"/>
           </a:p>
         </p:txBody>
       </p:sp>
@@ -1054,7 +1059,7 @@
           <a:p>
             <a:pPr lvl="0"/>
             <a:r>
-              <a:rPr lang="en-US" smtClean="0"/>
+              <a:rPr lang="en-US"/>
               <a:t>Click to edit Master text styles</a:t>
             </a:r>
           </a:p>
@@ -1077,7 +1082,7 @@
           <a:p>
             <a:fld id="{5BCAD085-E8A6-8845-BD4E-CB4CCA059FC4}" type="datetimeFigureOut">
               <a:rPr lang="en-US" smtClean="0"/>
-              <a:t>1/27/13</a:t>
+              <a:t>9/20/2026</a:t>
             </a:fld>
             <a:endParaRPr lang="en-US"/>
           </a:p>
@@ -1171,10 +1176,9 @@
           <a:lstStyle/>
           <a:p>
             <a:r>
-              <a:rPr lang="en-US" smtClean="0"/>
+              <a:rPr lang="en-US"/>
               <a:t>Click to edit Master title style</a:t>
             </a:r>
-            <a:endParaRPr lang="en-US"/>
           </a:p>
         </p:txBody>
       </p:sp>
@@ -1228,38 +1232,37 @@
           <a:p>
             <a:pPr lvl="0"/>
             <a:r>
-              <a:rPr lang="en-US" smtClean="0"/>
+              <a:rPr lang="en-US"/>
               <a:t>Click to edit Master text styles</a:t>
             </a:r>
           </a:p>
           <a:p>
             <a:pPr lvl="1"/>
             <a:r>
-              <a:rPr lang="en-US" smtClean="0"/>
+              <a:rPr lang="en-US"/>
               <a:t>Second level</a:t>
             </a:r>
           </a:p>
           <a:p>
             <a:pPr lvl="2"/>
             <a:r>
-              <a:rPr lang="en-US" smtClean="0"/>
+              <a:rPr lang="en-US"/>
               <a:t>Third level</a:t>
             </a:r>
           </a:p>
           <a:p>
             <a:pPr lvl="3"/>
             <a:r>
-              <a:rPr lang="en-US" smtClean="0"/>
+              <a:rPr lang="en-US"/>
               <a:t>Fourth level</a:t>
             </a:r>
           </a:p>
           <a:p>
             <a:pPr lvl="4"/>
             <a:r>
-              <a:rPr lang="en-US" smtClean="0"/>
+              <a:rPr lang="en-US"/>
               <a:t>Fifth level</a:t>
             </a:r>
-            <a:endParaRPr lang="en-US"/>
           </a:p>
         </p:txBody>
       </p:sp>
@@ -1313,38 +1316,37 @@
           <a:p>
             <a:pPr lvl="0"/>
             <a:r>
-              <a:rPr lang="en-US" smtClean="0"/>
+              <a:rPr lang="en-US"/>
               <a:t>Click to edit Master text styles</a:t>
             </a:r>
           </a:p>
           <a:p>
             <a:pPr lvl="1"/>
             <a:r>
-              <a:rPr lang="en-US" smtClean="0"/>
+              <a:rPr lang="en-US"/>
               <a:t>Second level</a:t>
             </a:r>
           </a:p>
           <a:p>
             <a:pPr lvl="2"/>
             <a:r>
-              <a:rPr lang="en-US" smtClean="0"/>
+              <a:rPr lang="en-US"/>
               <a:t>Third level</a:t>
             </a:r>
           </a:p>
           <a:p>
             <a:pPr lvl="3"/>
             <a:r>
-              <a:rPr lang="en-US" smtClean="0"/>
+              <a:rPr lang="en-US"/>
               <a:t>Fourth level</a:t>
             </a:r>
           </a:p>
           <a:p>
             <a:pPr lvl="4"/>
             <a:r>
-              <a:rPr lang="en-US" smtClean="0"/>
+              <a:rPr lang="en-US"/>
               <a:t>Fifth level</a:t>
             </a:r>
-            <a:endParaRPr lang="en-US"/>
           </a:p>
         </p:txBody>
       </p:sp>
@@ -1365,7 +1367,7 @@
           <a:p>
             <a:fld id="{5BCAD085-E8A6-8845-BD4E-CB4CCA059FC4}" type="datetimeFigureOut">
               <a:rPr lang="en-US" smtClean="0"/>
-              <a:t>1/27/13</a:t>
+              <a:t>9/20/2026</a:t>
             </a:fld>
             <a:endParaRPr lang="en-US"/>
           </a:p>
@@ -1463,10 +1465,9 @@
           </a:lstStyle>
           <a:p>
             <a:r>
-              <a:rPr lang="en-US" smtClean="0"/>
+              <a:rPr lang="en-US"/>
               <a:t>Click to edit Master title style</a:t>
             </a:r>
-            <a:endParaRPr lang="en-US"/>
           </a:p>
         </p:txBody>
       </p:sp>
@@ -1529,7 +1530,7 @@
           <a:p>
             <a:pPr lvl="0"/>
             <a:r>
-              <a:rPr lang="en-US" smtClean="0"/>
+              <a:rPr lang="en-US"/>
               <a:t>Click to edit Master text styles</a:t>
             </a:r>
           </a:p>
@@ -1585,38 +1586,37 @@
           <a:p>
             <a:pPr lvl="0"/>
             <a:r>
-              <a:rPr lang="en-US" smtClean="0"/>
+              <a:rPr lang="en-US"/>
               <a:t>Click to edit Master text styles</a:t>
             </a:r>
           </a:p>
           <a:p>
             <a:pPr lvl="1"/>
             <a:r>
-              <a:rPr lang="en-US" smtClean="0"/>
+              <a:rPr lang="en-US"/>
               <a:t>Second level</a:t>
             </a:r>
           </a:p>
           <a:p>
             <a:pPr lvl="2"/>
             <a:r>
-              <a:rPr lang="en-US" smtClean="0"/>
+              <a:rPr lang="en-US"/>
               <a:t>Third level</a:t>
             </a:r>
           </a:p>
           <a:p>
             <a:pPr lvl="3"/>
             <a:r>
-              <a:rPr lang="en-US" smtClean="0"/>
+              <a:rPr lang="en-US"/>
               <a:t>Fourth level</a:t>
             </a:r>
           </a:p>
           <a:p>
             <a:pPr lvl="4"/>
             <a:r>
-              <a:rPr lang="en-US" smtClean="0"/>
+              <a:rPr lang="en-US"/>
               <a:t>Fifth level</a:t>
             </a:r>
-            <a:endParaRPr lang="en-US"/>
           </a:p>
         </p:txBody>
       </p:sp>
@@ -1679,7 +1679,7 @@
           <a:p>
             <a:pPr lvl="0"/>
             <a:r>
-              <a:rPr lang="en-US" smtClean="0"/>
+              <a:rPr lang="en-US"/>
               <a:t>Click to edit Master text styles</a:t>
             </a:r>
           </a:p>
@@ -1735,38 +1735,37 @@
           <a:p>
             <a:pPr lvl="0"/>
             <a:r>
-              <a:rPr lang="en-US" smtClean="0"/>
+              <a:rPr lang="en-US"/>
               <a:t>Click to edit Master text styles</a:t>
             </a:r>
           </a:p>
           <a:p>
             <a:pPr lvl="1"/>
             <a:r>
-              <a:rPr lang="en-US" smtClean="0"/>
+              <a:rPr lang="en-US"/>
               <a:t>Second level</a:t>
             </a:r>
           </a:p>
           <a:p>
             <a:pPr lvl="2"/>
             <a:r>
-              <a:rPr lang="en-US" smtClean="0"/>
+              <a:rPr lang="en-US"/>
               <a:t>Third level</a:t>
             </a:r>
           </a:p>
           <a:p>
             <a:pPr lvl="3"/>
             <a:r>
-              <a:rPr lang="en-US" smtClean="0"/>
+              <a:rPr lang="en-US"/>
               <a:t>Fourth level</a:t>
             </a:r>
           </a:p>
           <a:p>
             <a:pPr lvl="4"/>
             <a:r>
-              <a:rPr lang="en-US" smtClean="0"/>
+              <a:rPr lang="en-US"/>
               <a:t>Fifth level</a:t>
             </a:r>
-            <a:endParaRPr lang="en-US"/>
           </a:p>
         </p:txBody>
       </p:sp>
@@ -1787,7 +1786,7 @@
           <a:p>
             <a:fld id="{5BCAD085-E8A6-8845-BD4E-CB4CCA059FC4}" type="datetimeFigureOut">
               <a:rPr lang="en-US" smtClean="0"/>
-              <a:t>1/27/13</a:t>
+              <a:t>9/20/2026</a:t>
             </a:fld>
             <a:endParaRPr lang="en-US"/>
           </a:p>
@@ -1881,10 +1880,9 @@
           <a:lstStyle/>
           <a:p>
             <a:r>
-              <a:rPr lang="en-US" smtClean="0"/>
+              <a:rPr lang="en-US"/>
               <a:t>Click to edit Master title style</a:t>
             </a:r>
-            <a:endParaRPr lang="en-US"/>
           </a:p>
         </p:txBody>
       </p:sp>
@@ -1905,7 +1903,7 @@
           <a:p>
             <a:fld id="{5BCAD085-E8A6-8845-BD4E-CB4CCA059FC4}" type="datetimeFigureOut">
               <a:rPr lang="en-US" smtClean="0"/>
-              <a:t>1/27/13</a:t>
+              <a:t>9/20/2026</a:t>
             </a:fld>
             <a:endParaRPr lang="en-US"/>
           </a:p>
@@ -2000,7 +1998,7 @@
           <a:p>
             <a:fld id="{5BCAD085-E8A6-8845-BD4E-CB4CCA059FC4}" type="datetimeFigureOut">
               <a:rPr lang="en-US" smtClean="0"/>
-              <a:t>1/27/13</a:t>
+              <a:t>9/20/2026</a:t>
             </a:fld>
             <a:endParaRPr lang="en-US"/>
           </a:p>
@@ -2103,10 +2101,9 @@
           </a:lstStyle>
           <a:p>
             <a:r>
-              <a:rPr lang="en-US" smtClean="0"/>
+              <a:rPr lang="en-US"/>
               <a:t>Click to edit Master title style</a:t>
             </a:r>
-            <a:endParaRPr lang="en-US"/>
           </a:p>
         </p:txBody>
       </p:sp>
@@ -2160,38 +2157,37 @@
           <a:p>
             <a:pPr lvl="0"/>
             <a:r>
-              <a:rPr lang="en-US" smtClean="0"/>
+              <a:rPr lang="en-US"/>
               <a:t>Click to edit Master text styles</a:t>
             </a:r>
           </a:p>
           <a:p>
             <a:pPr lvl="1"/>
             <a:r>
-              <a:rPr lang="en-US" smtClean="0"/>
+              <a:rPr lang="en-US"/>
               <a:t>Second level</a:t>
             </a:r>
           </a:p>
           <a:p>
             <a:pPr lvl="2"/>
             <a:r>
-              <a:rPr lang="en-US" smtClean="0"/>
+              <a:rPr lang="en-US"/>
               <a:t>Third level</a:t>
             </a:r>
           </a:p>
           <a:p>
             <a:pPr lvl="3"/>
             <a:r>
-              <a:rPr lang="en-US" smtClean="0"/>
+              <a:rPr lang="en-US"/>
               <a:t>Fourth level</a:t>
             </a:r>
           </a:p>
           <a:p>
             <a:pPr lvl="4"/>
             <a:r>
-              <a:rPr lang="en-US" smtClean="0"/>
+              <a:rPr lang="en-US"/>
               <a:t>Fifth level</a:t>
             </a:r>
-            <a:endParaRPr lang="en-US"/>
           </a:p>
         </p:txBody>
       </p:sp>
@@ -2254,7 +2250,7 @@
           <a:p>
             <a:pPr lvl="0"/>
             <a:r>
-              <a:rPr lang="en-US" smtClean="0"/>
+              <a:rPr lang="en-US"/>
               <a:t>Click to edit Master text styles</a:t>
             </a:r>
           </a:p>
@@ -2277,7 +2273,7 @@
           <a:p>
             <a:fld id="{5BCAD085-E8A6-8845-BD4E-CB4CCA059FC4}" type="datetimeFigureOut">
               <a:rPr lang="en-US" smtClean="0"/>
-              <a:t>1/27/13</a:t>
+              <a:t>9/20/2026</a:t>
             </a:fld>
             <a:endParaRPr lang="en-US"/>
           </a:p>
@@ -2380,10 +2376,9 @@
           </a:lstStyle>
           <a:p>
             <a:r>
-              <a:rPr lang="en-US" smtClean="0"/>
+              <a:rPr lang="en-US"/>
               <a:t>Click to edit Master title style</a:t>
             </a:r>
-            <a:endParaRPr lang="en-US"/>
           </a:p>
         </p:txBody>
       </p:sp>
@@ -2507,7 +2502,7 @@
           <a:p>
             <a:pPr lvl="0"/>
             <a:r>
-              <a:rPr lang="en-US" smtClean="0"/>
+              <a:rPr lang="en-US"/>
               <a:t>Click to edit Master text styles</a:t>
             </a:r>
           </a:p>
@@ -2530,7 +2525,7 @@
           <a:p>
             <a:fld id="{5BCAD085-E8A6-8845-BD4E-CB4CCA059FC4}" type="datetimeFigureOut">
               <a:rPr lang="en-US" smtClean="0"/>
-              <a:t>1/27/13</a:t>
+              <a:t>9/20/2026</a:t>
             </a:fld>
             <a:endParaRPr lang="en-US"/>
           </a:p>
@@ -2639,10 +2634,9 @@
           <a:lstStyle/>
           <a:p>
             <a:r>
-              <a:rPr lang="en-US" smtClean="0"/>
+              <a:rPr lang="en-US"/>
               <a:t>Click to edit Master title style</a:t>
             </a:r>
-            <a:endParaRPr lang="en-US"/>
           </a:p>
         </p:txBody>
       </p:sp>
@@ -2673,38 +2667,37 @@
           <a:p>
             <a:pPr lvl="0"/>
             <a:r>
-              <a:rPr lang="en-US" smtClean="0"/>
+              <a:rPr lang="en-US"/>
               <a:t>Click to edit Master text styles</a:t>
             </a:r>
           </a:p>
           <a:p>
             <a:pPr lvl="1"/>
             <a:r>
-              <a:rPr lang="en-US" smtClean="0"/>
+              <a:rPr lang="en-US"/>
               <a:t>Second level</a:t>
             </a:r>
           </a:p>
           <a:p>
             <a:pPr lvl="2"/>
             <a:r>
-              <a:rPr lang="en-US" smtClean="0"/>
+              <a:rPr lang="en-US"/>
               <a:t>Third level</a:t>
             </a:r>
           </a:p>
           <a:p>
             <a:pPr lvl="3"/>
             <a:r>
-              <a:rPr lang="en-US" smtClean="0"/>
+              <a:rPr lang="en-US"/>
               <a:t>Fourth level</a:t>
             </a:r>
           </a:p>
           <a:p>
             <a:pPr lvl="4"/>
             <a:r>
-              <a:rPr lang="en-US" smtClean="0"/>
+              <a:rPr lang="en-US"/>
               <a:t>Fifth level</a:t>
             </a:r>
-            <a:endParaRPr lang="en-US"/>
           </a:p>
         </p:txBody>
       </p:sp>
@@ -2743,7 +2736,7 @@
           <a:p>
             <a:fld id="{5BCAD085-E8A6-8845-BD4E-CB4CCA059FC4}" type="datetimeFigureOut">
               <a:rPr lang="en-US" smtClean="0"/>
-              <a:t>1/27/13</a:t>
+              <a:t>9/20/2026</a:t>
             </a:fld>
             <a:endParaRPr lang="en-US"/>
           </a:p>
@@ -3102,7 +3095,7 @@
 </file>
 
 <file path=ppt/slides/slide1.xml><?xml version="1.0" encoding="utf-8"?>
-<p:sld xmlns:a="http://schemas.openxmlformats.org/drawingml/2006/main" xmlns:p="http://schemas.openxmlformats.org/presentationml/2006/main" xmlns:r="http://schemas.openxmlformats.org/officeDocument/2006/relationships">
+<p:sld xmlns:a="http://schemas.openxmlformats.org/drawingml/2006/main" xmlns:r="http://schemas.openxmlformats.org/officeDocument/2006/relationships" xmlns:p="http://schemas.openxmlformats.org/presentationml/2006/main">
   <p:cSld>
     <p:bg>
       <p:bgPr>
@@ -3118,7 +3111,14 @@
         <p:cNvGrpSpPr/>
         <p:nvPr/>
       </p:nvGrpSpPr>
-      <p:grpSpPr/>
+      <p:grpSpPr>
+        <a:xfrm>
+          <a:off x="0" y="0"/>
+          <a:ext cx="0" cy="0"/>
+          <a:chOff x="0" y="0"/>
+          <a:chExt cx="0" cy="0"/>
+        </a:xfrm>
+      </p:grpSpPr>
       <p:sp>
         <p:nvSpPr>
           <p:cNvPr id="2" name="Rounded Rectangle 1"/>
@@ -3162,6 +3162,7 @@
           <a:lstStyle/>
           <a:p>
             <a:pPr algn="ctr"/>
+            <a:endParaRPr/>
           </a:p>
         </p:txBody>
       </p:sp>
@@ -3254,14 +3255,14 @@
           <a:noFill/>
         </p:spPr>
         <p:txBody>
-          <a:bodyPr wrap="none" lIns="0" rIns="0" tIns="0" bIns="0" anchor="t">
+          <a:bodyPr wrap="none" lIns="0" tIns="0" rIns="0" bIns="0" anchor="t">
             <a:spAutoFit/>
           </a:bodyPr>
           <a:lstStyle/>
           <a:p>
             <a:pPr algn="ctr"/>
             <a:r>
-              <a:rPr b="1" sz="5400" i="0" u="none">
+              <a:rPr sz="5400" b="1" i="0" u="none">
                 <a:solidFill>
                   <a:srgbClr val="F8FAFC"/>
                 </a:solidFill>
@@ -3289,14 +3290,14 @@
           <a:noFill/>
         </p:spPr>
         <p:txBody>
-          <a:bodyPr wrap="none" lIns="0" rIns="0" tIns="0" bIns="0" anchor="t">
+          <a:bodyPr wrap="none" lIns="0" tIns="0" rIns="0" bIns="0" anchor="t">
             <a:spAutoFit/>
           </a:bodyPr>
           <a:lstStyle/>
           <a:p>
             <a:pPr algn="ctr"/>
             <a:r>
-              <a:rPr b="0" sz="2400" i="0" u="none">
+              <a:rPr sz="2400" b="0" i="0" u="none">
                 <a:solidFill>
                   <a:srgbClr val="94A3B8"/>
                 </a:solidFill>
@@ -3324,14 +3325,14 @@
           <a:noFill/>
         </p:spPr>
         <p:txBody>
-          <a:bodyPr wrap="none" lIns="0" rIns="0" tIns="0" bIns="0" anchor="t">
+          <a:bodyPr wrap="none" lIns="0" tIns="0" rIns="0" bIns="0" anchor="t">
             <a:spAutoFit/>
           </a:bodyPr>
           <a:lstStyle/>
           <a:p>
             <a:pPr algn="ctr"/>
             <a:r>
-              <a:rPr b="1" sz="1200" i="0" u="none">
+              <a:rPr sz="1200" b="1" i="0" u="none">
                 <a:solidFill>
                   <a:srgbClr val="CBD5E1"/>
                 </a:solidFill>
@@ -3351,7 +3352,7 @@
 </file>
 
 <file path=ppt/slides/slide10.xml><?xml version="1.0" encoding="utf-8"?>
-<p:sld xmlns:a="http://schemas.openxmlformats.org/drawingml/2006/main" xmlns:p="http://schemas.openxmlformats.org/presentationml/2006/main" xmlns:r="http://schemas.openxmlformats.org/officeDocument/2006/relationships">
+<p:sld xmlns:a="http://schemas.openxmlformats.org/drawingml/2006/main" xmlns:r="http://schemas.openxmlformats.org/officeDocument/2006/relationships" xmlns:p="http://schemas.openxmlformats.org/presentationml/2006/main">
   <p:cSld>
     <p:bg>
       <p:bgPr>
@@ -3367,7 +3368,14 @@
         <p:cNvGrpSpPr/>
         <p:nvPr/>
       </p:nvGrpSpPr>
-      <p:grpSpPr/>
+      <p:grpSpPr>
+        <a:xfrm>
+          <a:off x="0" y="0"/>
+          <a:ext cx="0" cy="0"/>
+          <a:chOff x="0" y="0"/>
+          <a:chExt cx="0" cy="0"/>
+        </a:xfrm>
+      </p:grpSpPr>
       <p:sp>
         <p:nvSpPr>
           <p:cNvPr id="2" name="Rectangle 1"/>
@@ -3409,6 +3417,7 @@
           <a:lstStyle/>
           <a:p>
             <a:pPr algn="ctr"/>
+            <a:endParaRPr/>
           </a:p>
         </p:txBody>
       </p:sp>
@@ -3525,14 +3534,14 @@
           <a:noFill/>
         </p:spPr>
         <p:txBody>
-          <a:bodyPr wrap="none" lIns="0" rIns="0" tIns="0" bIns="0" anchor="t">
+          <a:bodyPr wrap="none" lIns="0" tIns="0" rIns="0" bIns="0" anchor="t">
             <a:spAutoFit/>
           </a:bodyPr>
           <a:lstStyle/>
           <a:p>
             <a:pPr algn="l"/>
             <a:r>
-              <a:rPr b="1" sz="1200" i="0" u="none">
+              <a:rPr sz="1200" b="1" i="0" u="none">
                 <a:solidFill>
                   <a:srgbClr val="3B82F6"/>
                 </a:solidFill>
@@ -3560,14 +3569,14 @@
           <a:noFill/>
         </p:spPr>
         <p:txBody>
-          <a:bodyPr wrap="none" lIns="0" rIns="0" tIns="0" bIns="0" anchor="t">
+          <a:bodyPr wrap="none" lIns="0" tIns="0" rIns="0" bIns="0" anchor="t">
             <a:spAutoFit/>
           </a:bodyPr>
           <a:lstStyle/>
           <a:p>
             <a:pPr algn="l"/>
             <a:r>
-              <a:rPr b="1" sz="3600" i="0" u="none">
+              <a:rPr sz="3600" b="1" i="0" u="none">
                 <a:solidFill>
                   <a:srgbClr val="0F172A"/>
                 </a:solidFill>
@@ -3595,14 +3604,14 @@
           <a:noFill/>
         </p:spPr>
         <p:txBody>
-          <a:bodyPr wrap="none" lIns="0" rIns="0" tIns="0" bIns="0" anchor="t">
+          <a:bodyPr wrap="none" lIns="0" tIns="0" rIns="0" bIns="0" anchor="t">
             <a:spAutoFit/>
           </a:bodyPr>
           <a:lstStyle/>
           <a:p>
             <a:pPr algn="l"/>
             <a:r>
-              <a:rPr b="1" sz="2100" i="0" u="none">
+              <a:rPr sz="2100" b="1" i="0" u="none">
                 <a:solidFill>
                   <a:srgbClr val="0F172A"/>
                 </a:solidFill>
@@ -3630,14 +3639,14 @@
           <a:noFill/>
         </p:spPr>
         <p:txBody>
-          <a:bodyPr wrap="square" lIns="0" rIns="0" tIns="0" bIns="0" anchor="t">
+          <a:bodyPr wrap="square" lIns="0" tIns="0" rIns="0" bIns="0" anchor="t">
             <a:spAutoFit/>
           </a:bodyPr>
           <a:lstStyle/>
           <a:p>
             <a:pPr algn="l"/>
             <a:r>
-              <a:rPr b="0" sz="1350" i="0" u="none">
+              <a:rPr sz="1350" b="0" i="0" u="none">
                 <a:solidFill>
                   <a:srgbClr val="64748B"/>
                 </a:solidFill>
@@ -3665,14 +3674,14 @@
           <a:noFill/>
         </p:spPr>
         <p:txBody>
-          <a:bodyPr wrap="none" lIns="0" rIns="0" tIns="0" bIns="0" anchor="t">
+          <a:bodyPr wrap="none" lIns="0" tIns="0" rIns="0" bIns="0" anchor="t">
             <a:spAutoFit/>
           </a:bodyPr>
           <a:lstStyle/>
           <a:p>
             <a:pPr algn="l"/>
             <a:r>
-              <a:rPr b="1" sz="2100" i="0" u="none">
+              <a:rPr sz="2100" b="1" i="0" u="none">
                 <a:solidFill>
                   <a:srgbClr val="0F172A"/>
                 </a:solidFill>
@@ -3700,14 +3709,14 @@
           <a:noFill/>
         </p:spPr>
         <p:txBody>
-          <a:bodyPr wrap="square" lIns="0" rIns="0" tIns="0" bIns="0" anchor="t">
+          <a:bodyPr wrap="square" lIns="0" tIns="0" rIns="0" bIns="0" anchor="t">
             <a:spAutoFit/>
           </a:bodyPr>
           <a:lstStyle/>
           <a:p>
             <a:pPr algn="l"/>
             <a:r>
-              <a:rPr b="0" sz="1350" i="0" u="none">
+              <a:rPr sz="1350" b="0" i="0" u="none">
                 <a:solidFill>
                   <a:srgbClr val="64748B"/>
                 </a:solidFill>
@@ -3727,7 +3736,7 @@
 </file>
 
 <file path=ppt/slides/slide11.xml><?xml version="1.0" encoding="utf-8"?>
-<p:sld xmlns:a="http://schemas.openxmlformats.org/drawingml/2006/main" xmlns:p="http://schemas.openxmlformats.org/presentationml/2006/main" xmlns:r="http://schemas.openxmlformats.org/officeDocument/2006/relationships">
+<p:sld xmlns:a="http://schemas.openxmlformats.org/drawingml/2006/main" xmlns:r="http://schemas.openxmlformats.org/officeDocument/2006/relationships" xmlns:p="http://schemas.openxmlformats.org/presentationml/2006/main">
   <p:cSld>
     <p:bg>
       <p:bgPr>
@@ -3743,7 +3752,14 @@
         <p:cNvGrpSpPr/>
         <p:nvPr/>
       </p:nvGrpSpPr>
-      <p:grpSpPr/>
+      <p:grpSpPr>
+        <a:xfrm>
+          <a:off x="0" y="0"/>
+          <a:ext cx="0" cy="0"/>
+          <a:chOff x="0" y="0"/>
+          <a:chExt cx="0" cy="0"/>
+        </a:xfrm>
+      </p:grpSpPr>
       <p:sp>
         <p:nvSpPr>
           <p:cNvPr id="2" name="Rounded Rectangle 1"/>
@@ -3787,6 +3803,7 @@
           <a:lstStyle/>
           <a:p>
             <a:pPr algn="ctr"/>
+            <a:endParaRPr/>
           </a:p>
         </p:txBody>
       </p:sp>
@@ -3833,6 +3850,7 @@
           <a:lstStyle/>
           <a:p>
             <a:pPr algn="ctr"/>
+            <a:endParaRPr/>
           </a:p>
         </p:txBody>
       </p:sp>
@@ -3879,6 +3897,7 @@
           <a:lstStyle/>
           <a:p>
             <a:pPr algn="ctr"/>
+            <a:endParaRPr/>
           </a:p>
         </p:txBody>
       </p:sp>
@@ -3971,14 +3990,14 @@
           <a:noFill/>
         </p:spPr>
         <p:txBody>
-          <a:bodyPr wrap="none" lIns="0" rIns="0" tIns="0" bIns="0" anchor="t">
+          <a:bodyPr wrap="none" lIns="0" tIns="0" rIns="0" bIns="0" anchor="t">
             <a:spAutoFit/>
           </a:bodyPr>
           <a:lstStyle/>
           <a:p>
             <a:pPr algn="l"/>
             <a:r>
-              <a:rPr b="1" sz="1200" i="0" u="none">
+              <a:rPr sz="1200" b="1" i="0" u="none">
                 <a:solidFill>
                   <a:srgbClr val="3B82F6"/>
                 </a:solidFill>
@@ -4006,14 +4025,14 @@
           <a:noFill/>
         </p:spPr>
         <p:txBody>
-          <a:bodyPr wrap="none" lIns="0" rIns="0" tIns="0" bIns="0" anchor="t">
+          <a:bodyPr wrap="none" lIns="0" tIns="0" rIns="0" bIns="0" anchor="t">
             <a:spAutoFit/>
           </a:bodyPr>
           <a:lstStyle/>
           <a:p>
             <a:pPr algn="l"/>
             <a:r>
-              <a:rPr b="1" sz="3600" i="0" u="none">
+              <a:rPr sz="3600" b="1" i="0" u="none">
                 <a:solidFill>
                   <a:srgbClr val="0F172A"/>
                 </a:solidFill>
@@ -4041,14 +4060,14 @@
           <a:noFill/>
         </p:spPr>
         <p:txBody>
-          <a:bodyPr wrap="none" lIns="0" rIns="0" tIns="0" bIns="0" anchor="t">
+          <a:bodyPr wrap="none" lIns="0" tIns="0" rIns="0" bIns="0" anchor="t">
             <a:spAutoFit/>
           </a:bodyPr>
           <a:lstStyle/>
           <a:p>
             <a:pPr algn="l"/>
             <a:r>
-              <a:rPr b="0" sz="1500" i="0" u="none">
+              <a:rPr sz="1500" b="0" i="0" u="none">
                 <a:solidFill>
                   <a:srgbClr val="0F172A"/>
                 </a:solidFill>
@@ -4076,14 +4095,14 @@
           <a:noFill/>
         </p:spPr>
         <p:txBody>
-          <a:bodyPr wrap="none" lIns="0" rIns="0" tIns="0" bIns="0" anchor="t">
+          <a:bodyPr wrap="none" lIns="0" tIns="0" rIns="0" bIns="0" anchor="t">
             <a:spAutoFit/>
           </a:bodyPr>
           <a:lstStyle/>
           <a:p>
             <a:pPr algn="l"/>
             <a:r>
-              <a:rPr b="0" sz="1500" i="0" u="none">
+              <a:rPr sz="1500" b="0" i="0" u="none">
                 <a:solidFill>
                   <a:srgbClr val="0F172A"/>
                 </a:solidFill>
@@ -4111,14 +4130,14 @@
           <a:noFill/>
         </p:spPr>
         <p:txBody>
-          <a:bodyPr wrap="none" lIns="0" rIns="0" tIns="0" bIns="0" anchor="t">
+          <a:bodyPr wrap="none" lIns="0" tIns="0" rIns="0" bIns="0" anchor="t">
             <a:spAutoFit/>
           </a:bodyPr>
           <a:lstStyle/>
           <a:p>
             <a:pPr algn="l"/>
             <a:r>
-              <a:rPr b="0" sz="1500" i="0" u="none">
+              <a:rPr sz="1500" b="0" i="0" u="none">
                 <a:solidFill>
                   <a:srgbClr val="0F172A"/>
                 </a:solidFill>
@@ -4138,7 +4157,7 @@
 </file>
 
 <file path=ppt/slides/slide12.xml><?xml version="1.0" encoding="utf-8"?>
-<p:sld xmlns:a="http://schemas.openxmlformats.org/drawingml/2006/main" xmlns:p="http://schemas.openxmlformats.org/presentationml/2006/main" xmlns:r="http://schemas.openxmlformats.org/officeDocument/2006/relationships">
+<p:sld xmlns:a="http://schemas.openxmlformats.org/drawingml/2006/main" xmlns:r="http://schemas.openxmlformats.org/officeDocument/2006/relationships" xmlns:p="http://schemas.openxmlformats.org/presentationml/2006/main">
   <p:cSld>
     <p:bg>
       <p:bgPr>
@@ -4154,7 +4173,14 @@
         <p:cNvGrpSpPr/>
         <p:nvPr/>
       </p:nvGrpSpPr>
-      <p:grpSpPr/>
+      <p:grpSpPr>
+        <a:xfrm>
+          <a:off x="0" y="0"/>
+          <a:ext cx="0" cy="0"/>
+          <a:chOff x="0" y="0"/>
+          <a:chExt cx="0" cy="0"/>
+        </a:xfrm>
+      </p:grpSpPr>
       <p:sp>
         <p:nvSpPr>
           <p:cNvPr id="2" name="Rectangle 1"/>
@@ -4196,6 +4222,7 @@
           <a:lstStyle/>
           <a:p>
             <a:pPr algn="ctr"/>
+            <a:endParaRPr/>
           </a:p>
         </p:txBody>
       </p:sp>
@@ -4216,14 +4243,14 @@
           <a:noFill/>
         </p:spPr>
         <p:txBody>
-          <a:bodyPr wrap="none" lIns="0" rIns="0" tIns="0" bIns="0" anchor="t">
+          <a:bodyPr wrap="none" lIns="0" tIns="0" rIns="0" bIns="0" anchor="t">
             <a:spAutoFit/>
           </a:bodyPr>
           <a:lstStyle/>
           <a:p>
             <a:pPr algn="ctr"/>
             <a:r>
-              <a:rPr b="1" sz="4800" i="0" u="none">
+              <a:rPr sz="4800" b="1" i="0" u="none">
                 <a:solidFill>
                   <a:srgbClr val="F8FAFC"/>
                 </a:solidFill>
@@ -4251,14 +4278,14 @@
           <a:noFill/>
         </p:spPr>
         <p:txBody>
-          <a:bodyPr wrap="none" lIns="0" rIns="0" tIns="0" bIns="0" anchor="t">
+          <a:bodyPr wrap="none" lIns="0" tIns="0" rIns="0" bIns="0" anchor="t">
             <a:spAutoFit/>
           </a:bodyPr>
           <a:lstStyle/>
           <a:p>
             <a:pPr algn="ctr"/>
             <a:r>
-              <a:rPr b="0" sz="1800" i="0" u="none">
+              <a:rPr sz="1800" b="0" i="0" u="none">
                 <a:solidFill>
                   <a:srgbClr val="94A3B8"/>
                 </a:solidFill>
@@ -4277,8 +4304,8 @@
 </p:sld>
 </file>
 
-<file path=ppt/slides/slide13.xml><?xml version="1.0" encoding="utf-8"?>
-<p:sld xmlns:a="http://schemas.openxmlformats.org/drawingml/2006/main" xmlns:p="http://schemas.openxmlformats.org/presentationml/2006/main" xmlns:r="http://schemas.openxmlformats.org/officeDocument/2006/relationships">
+<file path=ppt/slides/slide2.xml><?xml version="1.0" encoding="utf-8"?>
+<p:sld xmlns:a="http://schemas.openxmlformats.org/drawingml/2006/main" xmlns:r="http://schemas.openxmlformats.org/officeDocument/2006/relationships" xmlns:p="http://schemas.openxmlformats.org/presentationml/2006/main">
   <p:cSld>
     <p:bg>
       <p:bgPr>
@@ -4294,270 +4321,17 @@
         <p:cNvGrpSpPr/>
         <p:nvPr/>
       </p:nvGrpSpPr>
-      <p:grpSpPr/>
-      <p:sp>
-        <p:nvSpPr>
-          <p:cNvPr id="2" name="Rectangle 1"/>
-          <p:cNvSpPr/>
-          <p:nvPr/>
-        </p:nvSpPr>
-        <p:spPr>
-          <a:xfrm>
-            <a:off x="571500" y="857250"/>
-            <a:ext cx="11049000" cy="771525"/>
-          </a:xfrm>
-          <a:prstGeom prst="rect">
-            <a:avLst/>
-          </a:prstGeom>
-          <a:noFill/>
-          <a:ln>
-            <a:noFill/>
-          </a:ln>
-          <a:effectLst/>
-        </p:spPr>
-        <p:style>
-          <a:lnRef idx="1">
-            <a:schemeClr val="accent1"/>
-          </a:lnRef>
-          <a:fillRef idx="3">
-            <a:schemeClr val="accent1"/>
-          </a:fillRef>
-          <a:effectRef idx="2">
-            <a:schemeClr val="accent1"/>
-          </a:effectRef>
-          <a:fontRef idx="minor">
-            <a:schemeClr val="lt1"/>
-          </a:fontRef>
-        </p:style>
-        <p:txBody>
-          <a:bodyPr rtlCol="0" anchor="ctr"/>
-          <a:lstStyle/>
-          <a:p>
-            <a:pPr algn="ctr"/>
-          </a:p>
-        </p:txBody>
-      </p:sp>
-      <p:sp>
-        <p:nvSpPr>
-          <p:cNvPr id="3" name="Rectangle 2"/>
-          <p:cNvSpPr/>
-          <p:nvPr/>
-        </p:nvSpPr>
-        <p:spPr>
-          <a:xfrm>
-            <a:off x="571500" y="1628775"/>
-            <a:ext cx="11049000" cy="771525"/>
-          </a:xfrm>
-          <a:prstGeom prst="rect">
-            <a:avLst/>
-          </a:prstGeom>
-          <a:noFill/>
-          <a:ln>
-            <a:noFill/>
-          </a:ln>
-          <a:effectLst/>
-        </p:spPr>
-        <p:style>
-          <a:lnRef idx="1">
-            <a:schemeClr val="accent1"/>
-          </a:lnRef>
-          <a:fillRef idx="3">
-            <a:schemeClr val="accent1"/>
-          </a:fillRef>
-          <a:effectRef idx="2">
-            <a:schemeClr val="accent1"/>
-          </a:effectRef>
-          <a:fontRef idx="minor">
-            <a:schemeClr val="lt1"/>
-          </a:fontRef>
-        </p:style>
-        <p:txBody>
-          <a:bodyPr rtlCol="0" anchor="ctr"/>
-          <a:lstStyle/>
-          <a:p>
-            <a:pPr algn="ctr"/>
-          </a:p>
-        </p:txBody>
-      </p:sp>
-      <p:sp>
-        <p:nvSpPr>
-          <p:cNvPr id="4" name="Rectangle 3"/>
-          <p:cNvSpPr/>
-          <p:nvPr/>
-        </p:nvSpPr>
-        <p:spPr>
-          <a:xfrm>
-            <a:off x="571500" y="1619250"/>
-            <a:ext cx="11049000" cy="9525"/>
-          </a:xfrm>
-          <a:prstGeom prst="rect">
-            <a:avLst/>
-          </a:prstGeom>
-          <a:solidFill>
-            <a:srgbClr val="757575"/>
-          </a:solidFill>
-          <a:ln>
-            <a:noFill/>
-          </a:ln>
-          <a:effectLst/>
-        </p:spPr>
-        <p:style>
-          <a:lnRef idx="1">
-            <a:schemeClr val="accent1"/>
-          </a:lnRef>
-          <a:fillRef idx="3">
-            <a:schemeClr val="accent1"/>
-          </a:fillRef>
-          <a:effectRef idx="2">
-            <a:schemeClr val="accent1"/>
-          </a:effectRef>
-          <a:fontRef idx="minor">
-            <a:schemeClr val="lt1"/>
-          </a:fontRef>
-        </p:style>
-        <p:txBody>
-          <a:bodyPr rtlCol="0" anchor="ctr"/>
-          <a:lstStyle/>
-          <a:p>
-            <a:pPr algn="ctr"/>
-          </a:p>
-        </p:txBody>
-      </p:sp>
-      <p:sp>
-        <p:nvSpPr>
-          <p:cNvPr id="5" name="Rectangle 4"/>
-          <p:cNvSpPr/>
-          <p:nvPr/>
-        </p:nvSpPr>
-        <p:spPr>
-          <a:xfrm>
-            <a:off x="571500" y="1619250"/>
-            <a:ext cx="11049000" cy="9525"/>
-          </a:xfrm>
-          <a:prstGeom prst="rect">
-            <a:avLst/>
-          </a:prstGeom>
-          <a:solidFill>
-            <a:srgbClr val="757575"/>
-          </a:solidFill>
-          <a:ln>
-            <a:noFill/>
-          </a:ln>
-          <a:effectLst/>
-        </p:spPr>
-        <p:style>
-          <a:lnRef idx="1">
-            <a:schemeClr val="accent1"/>
-          </a:lnRef>
-          <a:fillRef idx="3">
-            <a:schemeClr val="accent1"/>
-          </a:fillRef>
-          <a:effectRef idx="2">
-            <a:schemeClr val="accent1"/>
-          </a:effectRef>
-          <a:fontRef idx="minor">
-            <a:schemeClr val="lt1"/>
-          </a:fontRef>
-        </p:style>
-        <p:txBody>
-          <a:bodyPr rtlCol="0" anchor="ctr"/>
-          <a:lstStyle/>
-          <a:p>
-            <a:pPr algn="ctr"/>
-          </a:p>
-        </p:txBody>
-      </p:sp>
-      <p:sp>
-        <p:nvSpPr>
-          <p:cNvPr id="6" name="Rectangle 5"/>
-          <p:cNvSpPr/>
-          <p:nvPr/>
-        </p:nvSpPr>
-        <p:spPr>
-          <a:xfrm>
-            <a:off x="571500" y="2390775"/>
-            <a:ext cx="11049000" cy="9525"/>
-          </a:xfrm>
-          <a:prstGeom prst="rect">
-            <a:avLst/>
-          </a:prstGeom>
-          <a:solidFill>
-            <a:srgbClr val="757575"/>
-          </a:solidFill>
-          <a:ln>
-            <a:noFill/>
-          </a:ln>
-          <a:effectLst/>
-        </p:spPr>
-        <p:style>
-          <a:lnRef idx="1">
-            <a:schemeClr val="accent1"/>
-          </a:lnRef>
-          <a:fillRef idx="3">
-            <a:schemeClr val="accent1"/>
-          </a:fillRef>
-          <a:effectRef idx="2">
-            <a:schemeClr val="accent1"/>
-          </a:effectRef>
-          <a:fontRef idx="minor">
-            <a:schemeClr val="lt1"/>
-          </a:fontRef>
-        </p:style>
-        <p:txBody>
-          <a:bodyPr rtlCol="0" anchor="ctr"/>
-          <a:lstStyle/>
-          <a:p>
-            <a:pPr algn="ctr"/>
-          </a:p>
-        </p:txBody>
-      </p:sp>
-      <p:sp>
-        <p:nvSpPr>
-          <p:cNvPr id="7" name="Rectangle 6"/>
-          <p:cNvSpPr/>
-          <p:nvPr/>
-        </p:nvSpPr>
-        <p:spPr>
-          <a:xfrm>
-            <a:off x="571500" y="2390775"/>
-            <a:ext cx="11049000" cy="9525"/>
-          </a:xfrm>
-          <a:prstGeom prst="rect">
-            <a:avLst/>
-          </a:prstGeom>
-          <a:solidFill>
-            <a:srgbClr val="757575"/>
-          </a:solidFill>
-          <a:ln>
-            <a:noFill/>
-          </a:ln>
-          <a:effectLst/>
-        </p:spPr>
-        <p:style>
-          <a:lnRef idx="1">
-            <a:schemeClr val="accent1"/>
-          </a:lnRef>
-          <a:fillRef idx="3">
-            <a:schemeClr val="accent1"/>
-          </a:fillRef>
-          <a:effectRef idx="2">
-            <a:schemeClr val="accent1"/>
-          </a:effectRef>
-          <a:fontRef idx="minor">
-            <a:schemeClr val="lt1"/>
-          </a:fontRef>
-        </p:style>
-        <p:txBody>
-          <a:bodyPr rtlCol="0" anchor="ctr"/>
-          <a:lstStyle/>
-          <a:p>
-            <a:pPr algn="ctr"/>
-          </a:p>
-        </p:txBody>
-      </p:sp>
+      <p:grpSpPr>
+        <a:xfrm>
+          <a:off x="0" y="0"/>
+          <a:ext cx="0" cy="0"/>
+          <a:chOff x="0" y="0"/>
+          <a:chExt cx="0" cy="0"/>
+        </a:xfrm>
+      </p:grpSpPr>
       <p:pic>
         <p:nvPicPr>
-          <p:cNvPr id="8" name="Picture 7" descr="image.png"/>
+          <p:cNvPr id="2" name="Picture 1" descr="image.png"/>
           <p:cNvPicPr>
             <a:picLocks noChangeAspect="1"/>
           </p:cNvPicPr>
@@ -4571,8 +4345,8 @@
         </p:blipFill>
         <p:spPr>
           <a:xfrm>
-            <a:off x="571500" y="1000125"/>
-            <a:ext cx="857250" cy="476250"/>
+            <a:off x="6858000" y="0"/>
+            <a:ext cx="5334000" cy="6858000"/>
           </a:xfrm>
           <a:prstGeom prst="rect">
             <a:avLst/>
@@ -4581,7 +4355,7 @@
       </p:pic>
       <p:pic>
         <p:nvPicPr>
-          <p:cNvPr id="9" name="Picture 8" descr="image.png"/>
+          <p:cNvPr id="3" name="Picture 2" descr="image.png"/>
           <p:cNvPicPr>
             <a:picLocks noChangeAspect="1"/>
           </p:cNvPicPr>
@@ -4595,8 +4369,8 @@
         </p:blipFill>
         <p:spPr>
           <a:xfrm>
-            <a:off x="571500" y="1771650"/>
-            <a:ext cx="857250" cy="476250"/>
+            <a:off x="6858000" y="0"/>
+            <a:ext cx="5334000" cy="6858000"/>
           </a:xfrm>
           <a:prstGeom prst="rect">
             <a:avLst/>
@@ -4605,7 +4379,7 @@
       </p:pic>
       <p:pic>
         <p:nvPicPr>
-          <p:cNvPr id="10" name="Picture 9" descr="image.png"/>
+          <p:cNvPr id="4" name="Picture 3" descr="image.png"/>
           <p:cNvPicPr>
             <a:picLocks noChangeAspect="1"/>
           </p:cNvPicPr>
@@ -4619,14 +4393,221 @@
         </p:blipFill>
         <p:spPr>
           <a:xfrm>
-            <a:off x="571500" y="2543175"/>
-            <a:ext cx="857250" cy="476250"/>
+            <a:off x="762000" y="3201292"/>
+            <a:ext cx="266700" cy="276225"/>
           </a:xfrm>
           <a:prstGeom prst="rect">
             <a:avLst/>
           </a:prstGeom>
         </p:spPr>
       </p:pic>
+      <p:pic>
+        <p:nvPicPr>
+          <p:cNvPr id="5" name="Picture 4" descr="image.png"/>
+          <p:cNvPicPr>
+            <a:picLocks noChangeAspect="1"/>
+          </p:cNvPicPr>
+          <p:nvPr/>
+        </p:nvPicPr>
+        <p:blipFill>
+          <a:blip r:embed="rId5"/>
+          <a:stretch>
+            <a:fillRect/>
+          </a:stretch>
+        </p:blipFill>
+        <p:spPr>
+          <a:xfrm>
+            <a:off x="762000" y="4134742"/>
+            <a:ext cx="333375" cy="276225"/>
+          </a:xfrm>
+          <a:prstGeom prst="rect">
+            <a:avLst/>
+          </a:prstGeom>
+        </p:spPr>
+      </p:pic>
+      <p:sp>
+        <p:nvSpPr>
+          <p:cNvPr id="6" name="TextBox 5"/>
+          <p:cNvSpPr txBox="1"/>
+          <p:nvPr/>
+        </p:nvSpPr>
+        <p:spPr>
+          <a:xfrm>
+            <a:off x="762000" y="1194494"/>
+            <a:ext cx="6667500" cy="190500"/>
+          </a:xfrm>
+          <a:prstGeom prst="rect">
+            <a:avLst/>
+          </a:prstGeom>
+          <a:noFill/>
+        </p:spPr>
+        <p:txBody>
+          <a:bodyPr wrap="none" lIns="0" tIns="0" rIns="0" bIns="0" anchor="t">
+            <a:spAutoFit/>
+          </a:bodyPr>
+          <a:lstStyle/>
+          <a:p>
+            <a:pPr algn="l"/>
+            <a:r>
+              <a:rPr sz="1200" b="1" i="0" u="none">
+                <a:solidFill>
+                  <a:srgbClr val="EF4444"/>
+                </a:solidFill>
+                <a:latin typeface="Outfit"/>
+              </a:rPr>
+              <a:t>01 / PROBLEM STATEMENT</a:t>
+            </a:r>
+          </a:p>
+        </p:txBody>
+      </p:sp>
+      <p:sp>
+        <p:nvSpPr>
+          <p:cNvPr id="7" name="TextBox 6"/>
+          <p:cNvSpPr txBox="1"/>
+          <p:nvPr/>
+        </p:nvSpPr>
+        <p:spPr>
+          <a:xfrm>
+            <a:off x="762000" y="1537394"/>
+            <a:ext cx="5700712" cy="1173360"/>
+          </a:xfrm>
+          <a:prstGeom prst="rect">
+            <a:avLst/>
+          </a:prstGeom>
+          <a:noFill/>
+        </p:spPr>
+        <p:txBody>
+          <a:bodyPr wrap="square" lIns="0" tIns="0" rIns="0" bIns="0" anchor="t">
+            <a:spAutoFit/>
+          </a:bodyPr>
+          <a:lstStyle/>
+          <a:p>
+            <a:pPr algn="l">
+              <a:lnSpc>
+                <a:spcPts val="4620"/>
+              </a:lnSpc>
+            </a:pPr>
+            <a:r>
+              <a:rPr sz="4200" b="1" i="0" u="none">
+                <a:solidFill>
+                  <a:srgbClr val="0F172A"/>
+                </a:solidFill>
+                <a:latin typeface="Outfit"/>
+              </a:rPr>
+              <a:t>The Disconnected Commute</a:t>
+            </a:r>
+          </a:p>
+        </p:txBody>
+      </p:sp>
+      <p:sp>
+        <p:nvSpPr>
+          <p:cNvPr id="8" name="TextBox 7"/>
+          <p:cNvSpPr txBox="1"/>
+          <p:nvPr/>
+        </p:nvSpPr>
+        <p:spPr>
+          <a:xfrm>
+            <a:off x="1219200" y="3167955"/>
+            <a:ext cx="5313164" cy="285750"/>
+          </a:xfrm>
+          <a:prstGeom prst="rect">
+            <a:avLst/>
+          </a:prstGeom>
+          <a:noFill/>
+        </p:spPr>
+        <p:txBody>
+          <a:bodyPr wrap="none" lIns="0" tIns="0" rIns="0" bIns="0" anchor="t">
+            <a:spAutoFit/>
+          </a:bodyPr>
+          <a:lstStyle/>
+          <a:p>
+            <a:pPr algn="l"/>
+            <a:r>
+              <a:rPr sz="1800" b="1" i="0" u="none">
+                <a:solidFill>
+                  <a:srgbClr val="0F172A"/>
+                </a:solidFill>
+                <a:latin typeface="Outfit"/>
+              </a:rPr>
+              <a:t>Unsynchronized Timetables</a:t>
+            </a:r>
+          </a:p>
+        </p:txBody>
+      </p:sp>
+      <p:sp>
+        <p:nvSpPr>
+          <p:cNvPr id="9" name="TextBox 8"/>
+          <p:cNvSpPr txBox="1"/>
+          <p:nvPr/>
+        </p:nvSpPr>
+        <p:spPr>
+          <a:xfrm>
+            <a:off x="1219200" y="3529905"/>
+            <a:ext cx="5060156" cy="266700"/>
+          </a:xfrm>
+          <a:prstGeom prst="rect">
+            <a:avLst/>
+          </a:prstGeom>
+          <a:noFill/>
+        </p:spPr>
+        <p:txBody>
+          <a:bodyPr wrap="none" lIns="0" tIns="0" rIns="0" bIns="0" anchor="t">
+            <a:spAutoFit/>
+          </a:bodyPr>
+          <a:lstStyle/>
+          <a:p>
+            <a:pPr algn="l">
+              <a:lnSpc>
+                <a:spcPts val="2100"/>
+              </a:lnSpc>
+            </a:pPr>
+            <a:r>
+              <a:rPr sz="1500" b="0" i="0" u="none">
+                <a:solidFill>
+                  <a:srgbClr val="64748B"/>
+                </a:solidFill>
+                <a:latin typeface="Inter"/>
+              </a:rPr>
+              <a:t>Ferries and feeder autos ignore train delays.</a:t>
+            </a:r>
+          </a:p>
+        </p:txBody>
+      </p:sp>
+      <p:sp>
+        <p:nvSpPr>
+          <p:cNvPr id="10" name="TextBox 9"/>
+          <p:cNvSpPr txBox="1"/>
+          <p:nvPr/>
+        </p:nvSpPr>
+        <p:spPr>
+          <a:xfrm>
+            <a:off x="1285875" y="4101405"/>
+            <a:ext cx="6163270" cy="285750"/>
+          </a:xfrm>
+          <a:prstGeom prst="rect">
+            <a:avLst/>
+          </a:prstGeom>
+          <a:noFill/>
+        </p:spPr>
+        <p:txBody>
+          <a:bodyPr wrap="none" lIns="0" tIns="0" rIns="0" bIns="0" anchor="t">
+            <a:spAutoFit/>
+          </a:bodyPr>
+          <a:lstStyle/>
+          <a:p>
+            <a:pPr algn="l"/>
+            <a:r>
+              <a:rPr sz="1800" b="1" i="0" u="none">
+                <a:solidFill>
+                  <a:srgbClr val="0F172A"/>
+                </a:solidFill>
+                <a:latin typeface="Outfit"/>
+              </a:rPr>
+              <a:t>Stranded Passengers</a:t>
+            </a:r>
+          </a:p>
+        </p:txBody>
+      </p:sp>
       <p:sp>
         <p:nvSpPr>
           <p:cNvPr id="11" name="TextBox 10"/>
@@ -4635,8 +4616,8 @@
         </p:nvSpPr>
         <p:spPr>
           <a:xfrm>
-            <a:off x="571500" y="571500"/>
-            <a:ext cx="2012751" cy="285750"/>
+            <a:off x="1285875" y="4463355"/>
+            <a:ext cx="5869781" cy="266700"/>
           </a:xfrm>
           <a:prstGeom prst="rect">
             <a:avLst/>
@@ -4644,34 +4625,73 @@
           <a:noFill/>
         </p:spPr>
         <p:txBody>
-          <a:bodyPr wrap="none" lIns="0" rIns="0" tIns="0" bIns="0" anchor="t">
+          <a:bodyPr wrap="none" lIns="0" tIns="0" rIns="0" bIns="0" anchor="t">
             <a:spAutoFit/>
           </a:bodyPr>
           <a:lstStyle/>
           <a:p>
+            <a:pPr algn="l">
+              <a:lnSpc>
+                <a:spcPts val="2100"/>
+              </a:lnSpc>
+            </a:pPr>
+            <a:r>
+              <a:rPr sz="1500" b="0" i="0" u="none">
+                <a:solidFill>
+                  <a:srgbClr val="64748B"/>
+                </a:solidFill>
+                <a:latin typeface="Inter"/>
+              </a:rPr>
+              <a:t>Missed connections cost daily wage earners hours.</a:t>
+            </a:r>
+          </a:p>
+        </p:txBody>
+      </p:sp>
+      <p:sp>
+        <p:nvSpPr>
+          <p:cNvPr id="12" name="TextBox 11"/>
+          <p:cNvSpPr txBox="1"/>
+          <p:nvPr/>
+        </p:nvSpPr>
+        <p:spPr>
+          <a:xfrm>
+            <a:off x="952500" y="5034855"/>
+            <a:ext cx="5825728" cy="285750"/>
+          </a:xfrm>
+          <a:prstGeom prst="rect">
+            <a:avLst/>
+          </a:prstGeom>
+          <a:noFill/>
+        </p:spPr>
+        <p:txBody>
+          <a:bodyPr wrap="none" lIns="0" tIns="0" rIns="0" bIns="0" anchor="t">
+            <a:spAutoFit/>
+          </a:bodyPr>
+          <a:lstStyle/>
+          <a:p>
             <a:pPr algn="l"/>
             <a:r>
-              <a:rPr b="1" sz="1800" i="0" u="none">
-                <a:solidFill>
-                  <a:srgbClr val="000000"/>
+              <a:rPr sz="1800" b="1" i="0" u="none">
+                <a:solidFill>
+                  <a:srgbClr val="0F172A"/>
                 </a:solidFill>
                 <a:latin typeface="Outfit"/>
               </a:rPr>
-              <a:t>Image Sources</a:t>
-            </a:r>
-          </a:p>
-        </p:txBody>
-      </p:sp>
-      <p:sp>
-        <p:nvSpPr>
-          <p:cNvPr id="12" name="TextBox 11"/>
+              <a:t>Invisible Disruptions</a:t>
+            </a:r>
+          </a:p>
+        </p:txBody>
+      </p:sp>
+      <p:sp>
+        <p:nvSpPr>
+          <p:cNvPr id="13" name="TextBox 12"/>
           <p:cNvSpPr txBox="1"/>
           <p:nvPr/>
         </p:nvSpPr>
         <p:spPr>
           <a:xfrm>
-            <a:off x="1666875" y="1042987"/>
-            <a:ext cx="9286875" cy="152400"/>
+            <a:off x="952500" y="5396805"/>
+            <a:ext cx="5548312" cy="266700"/>
           </a:xfrm>
           <a:prstGeom prst="rect">
             <a:avLst/>
@@ -4679,222 +4699,24 @@
           <a:noFill/>
         </p:spPr>
         <p:txBody>
-          <a:bodyPr wrap="none" lIns="0" rIns="0" tIns="0" bIns="0" anchor="t">
+          <a:bodyPr wrap="none" lIns="0" tIns="0" rIns="0" bIns="0" anchor="t">
             <a:spAutoFit/>
           </a:bodyPr>
           <a:lstStyle/>
           <a:p>
-            <a:pPr algn="l"/>
-            <a:r>
-              <a:rPr b="0" sz="975" i="0" u="none">
-                <a:solidFill>
-                  <a:srgbClr val="000000"/>
+            <a:pPr algn="l">
+              <a:lnSpc>
+                <a:spcPts val="2100"/>
+              </a:lnSpc>
+            </a:pPr>
+            <a:r>
+              <a:rPr sz="1500" b="0" i="0" u="none">
+                <a:solidFill>
+                  <a:srgbClr val="64748B"/>
                 </a:solidFill>
                 <a:latin typeface="Inter"/>
               </a:rPr>
-              <a:t>https://cf-images.assettype.com/downtoearth%2F2025-05-20%2Flz0ggtcq%2FChennai?w=480&amp;auto=format%2Ccompress</a:t>
-            </a:r>
-          </a:p>
-        </p:txBody>
-      </p:sp>
-      <p:sp>
-        <p:nvSpPr>
-          <p:cNvPr id="13" name="TextBox 12"/>
-          <p:cNvSpPr txBox="1"/>
-          <p:nvPr/>
-        </p:nvSpPr>
-        <p:spPr>
-          <a:xfrm>
-            <a:off x="1666875" y="1243012"/>
-            <a:ext cx="2976562" cy="190500"/>
-          </a:xfrm>
-          <a:prstGeom prst="rect">
-            <a:avLst/>
-          </a:prstGeom>
-          <a:noFill/>
-        </p:spPr>
-        <p:txBody>
-          <a:bodyPr wrap="none" lIns="0" rIns="0" tIns="0" bIns="0" anchor="t">
-            <a:spAutoFit/>
-          </a:bodyPr>
-          <a:lstStyle/>
-          <a:p>
-            <a:pPr algn="l"/>
-            <a:r>
-              <a:rPr b="0" sz="1200" i="0" u="none">
-                <a:solidFill>
-                  <a:srgbClr val="000000"/>
-                </a:solidFill>
-                <a:latin typeface="Inter"/>
-              </a:rPr>
-              <a:t>Source: </a:t>
-            </a:r>
-            <a:r>
-              <a:rPr b="0" sz="1200" i="0" u="none">
-                <a:solidFill>
-                  <a:srgbClr val="4F46E5"/>
-                </a:solidFill>
-                <a:latin typeface="Inter"/>
-              </a:rPr>
-              <a:t>www.downtoearth.org.in</a:t>
-            </a:r>
-          </a:p>
-        </p:txBody>
-      </p:sp>
-      <p:sp>
-        <p:nvSpPr>
-          <p:cNvPr id="14" name="TextBox 13"/>
-          <p:cNvSpPr txBox="1"/>
-          <p:nvPr/>
-        </p:nvSpPr>
-        <p:spPr>
-          <a:xfrm>
-            <a:off x="1666875" y="1814512"/>
-            <a:ext cx="7429500" cy="152400"/>
-          </a:xfrm>
-          <a:prstGeom prst="rect">
-            <a:avLst/>
-          </a:prstGeom>
-          <a:noFill/>
-        </p:spPr>
-        <p:txBody>
-          <a:bodyPr wrap="none" lIns="0" rIns="0" tIns="0" bIns="0" anchor="t">
-            <a:spAutoFit/>
-          </a:bodyPr>
-          <a:lstStyle/>
-          <a:p>
-            <a:pPr algn="l"/>
-            <a:r>
-              <a:rPr b="0" sz="975" i="0" u="none">
-                <a:solidFill>
-                  <a:srgbClr val="000000"/>
-                </a:solidFill>
-                <a:latin typeface="Inter"/>
-              </a:rPr>
-              <a:t>https://keralatourpackages.net/wp-content/uploads/2026/02/Kerala-Inland-Waterways-Cruise.webp</a:t>
-            </a:r>
-          </a:p>
-        </p:txBody>
-      </p:sp>
-      <p:sp>
-        <p:nvSpPr>
-          <p:cNvPr id="15" name="TextBox 14"/>
-          <p:cNvSpPr txBox="1"/>
-          <p:nvPr/>
-        </p:nvSpPr>
-        <p:spPr>
-          <a:xfrm>
-            <a:off x="1666875" y="2014537"/>
-            <a:ext cx="2857500" cy="190500"/>
-          </a:xfrm>
-          <a:prstGeom prst="rect">
-            <a:avLst/>
-          </a:prstGeom>
-          <a:noFill/>
-        </p:spPr>
-        <p:txBody>
-          <a:bodyPr wrap="none" lIns="0" rIns="0" tIns="0" bIns="0" anchor="t">
-            <a:spAutoFit/>
-          </a:bodyPr>
-          <a:lstStyle/>
-          <a:p>
-            <a:pPr algn="l"/>
-            <a:r>
-              <a:rPr b="0" sz="1200" i="0" u="none">
-                <a:solidFill>
-                  <a:srgbClr val="000000"/>
-                </a:solidFill>
-                <a:latin typeface="Inter"/>
-              </a:rPr>
-              <a:t>Source: </a:t>
-            </a:r>
-            <a:r>
-              <a:rPr b="0" sz="1200" i="0" u="none">
-                <a:solidFill>
-                  <a:srgbClr val="4F46E5"/>
-                </a:solidFill>
-                <a:latin typeface="Inter"/>
-              </a:rPr>
-              <a:t>keralatourpackages.net</a:t>
-            </a:r>
-          </a:p>
-        </p:txBody>
-      </p:sp>
-      <p:sp>
-        <p:nvSpPr>
-          <p:cNvPr id="16" name="TextBox 15"/>
-          <p:cNvSpPr txBox="1"/>
-          <p:nvPr/>
-        </p:nvSpPr>
-        <p:spPr>
-          <a:xfrm>
-            <a:off x="1666875" y="2586037"/>
-            <a:ext cx="5512593" cy="152400"/>
-          </a:xfrm>
-          <a:prstGeom prst="rect">
-            <a:avLst/>
-          </a:prstGeom>
-          <a:noFill/>
-        </p:spPr>
-        <p:txBody>
-          <a:bodyPr wrap="none" lIns="0" rIns="0" tIns="0" bIns="0" anchor="t">
-            <a:spAutoFit/>
-          </a:bodyPr>
-          <a:lstStyle/>
-          <a:p>
-            <a:pPr algn="l"/>
-            <a:r>
-              <a:rPr b="0" sz="975" i="0" u="none">
-                <a:solidFill>
-                  <a:srgbClr val="000000"/>
-                </a:solidFill>
-                <a:latin typeface="Inter"/>
-              </a:rPr>
-              <a:t>https://indiainfrahub.com/wp-content/uploads/2020/11/24BGRAILWAY1.jpg</a:t>
-            </a:r>
-          </a:p>
-        </p:txBody>
-      </p:sp>
-      <p:sp>
-        <p:nvSpPr>
-          <p:cNvPr id="17" name="TextBox 16"/>
-          <p:cNvSpPr txBox="1"/>
-          <p:nvPr/>
-        </p:nvSpPr>
-        <p:spPr>
-          <a:xfrm>
-            <a:off x="1666875" y="2786062"/>
-            <a:ext cx="2369343" cy="190500"/>
-          </a:xfrm>
-          <a:prstGeom prst="rect">
-            <a:avLst/>
-          </a:prstGeom>
-          <a:noFill/>
-        </p:spPr>
-        <p:txBody>
-          <a:bodyPr wrap="none" lIns="0" rIns="0" tIns="0" bIns="0" anchor="t">
-            <a:spAutoFit/>
-          </a:bodyPr>
-          <a:lstStyle/>
-          <a:p>
-            <a:pPr algn="l"/>
-            <a:r>
-              <a:rPr b="0" sz="1200" i="0" u="none">
-                <a:solidFill>
-                  <a:srgbClr val="000000"/>
-                </a:solidFill>
-                <a:latin typeface="Inter"/>
-              </a:rPr>
-              <a:t>Source: </a:t>
-            </a:r>
-            <a:r>
-              <a:rPr b="0" sz="1200" i="0" u="none">
-                <a:solidFill>
-                  <a:srgbClr val="4F46E5"/>
-                </a:solidFill>
-                <a:latin typeface="Inter"/>
-              </a:rPr>
-              <a:t>indiainfrahub.com</a:t>
+              <a:t>Closed level crossings break the last-mile chain.</a:t>
             </a:r>
           </a:p>
         </p:txBody>
@@ -4907,8 +4729,382 @@
 </p:sld>
 </file>
 
-<file path=ppt/slides/slide2.xml><?xml version="1.0" encoding="utf-8"?>
-<p:sld xmlns:a="http://schemas.openxmlformats.org/drawingml/2006/main" xmlns:p="http://schemas.openxmlformats.org/presentationml/2006/main" xmlns:r="http://schemas.openxmlformats.org/officeDocument/2006/relationships">
+<file path=ppt/slides/slide3.xml><?xml version="1.0" encoding="utf-8"?>
+<p:sld xmlns:a="http://schemas.openxmlformats.org/drawingml/2006/main" xmlns:r="http://schemas.openxmlformats.org/officeDocument/2006/relationships" xmlns:p="http://schemas.openxmlformats.org/presentationml/2006/main">
+  <p:cSld>
+    <p:bg>
+      <p:bgPr>
+        <a:solidFill>
+          <a:srgbClr val="F8FAFC"/>
+        </a:solidFill>
+        <a:effectLst/>
+      </p:bgPr>
+    </p:bg>
+    <p:spTree>
+      <p:nvGrpSpPr>
+        <p:cNvPr id="1" name=""/>
+        <p:cNvGrpSpPr/>
+        <p:nvPr/>
+      </p:nvGrpSpPr>
+      <p:grpSpPr>
+        <a:xfrm>
+          <a:off x="0" y="0"/>
+          <a:ext cx="0" cy="0"/>
+          <a:chOff x="0" y="0"/>
+          <a:chExt cx="0" cy="0"/>
+        </a:xfrm>
+      </p:grpSpPr>
+      <p:sp>
+        <p:nvSpPr>
+          <p:cNvPr id="2" name="Rectangle 1"/>
+          <p:cNvSpPr/>
+          <p:nvPr/>
+        </p:nvSpPr>
+        <p:spPr>
+          <a:xfrm>
+            <a:off x="4895850" y="4644181"/>
+            <a:ext cx="19050" cy="762000"/>
+          </a:xfrm>
+          <a:prstGeom prst="rect">
+            <a:avLst/>
+          </a:prstGeom>
+          <a:solidFill>
+            <a:srgbClr val="CBD5E1"/>
+          </a:solidFill>
+          <a:ln>
+            <a:noFill/>
+          </a:ln>
+          <a:effectLst/>
+        </p:spPr>
+        <p:style>
+          <a:lnRef idx="1">
+            <a:schemeClr val="accent1"/>
+          </a:lnRef>
+          <a:fillRef idx="3">
+            <a:schemeClr val="accent1"/>
+          </a:fillRef>
+          <a:effectRef idx="2">
+            <a:schemeClr val="accent1"/>
+          </a:effectRef>
+          <a:fontRef idx="minor">
+            <a:schemeClr val="lt1"/>
+          </a:fontRef>
+        </p:style>
+        <p:txBody>
+          <a:bodyPr rtlCol="0" anchor="ctr"/>
+          <a:lstStyle/>
+          <a:p>
+            <a:pPr algn="ctr"/>
+            <a:endParaRPr/>
+          </a:p>
+        </p:txBody>
+      </p:sp>
+      <p:sp>
+        <p:nvSpPr>
+          <p:cNvPr id="3" name="Rectangle 2"/>
+          <p:cNvSpPr/>
+          <p:nvPr/>
+        </p:nvSpPr>
+        <p:spPr>
+          <a:xfrm>
+            <a:off x="7877175" y="4644181"/>
+            <a:ext cx="19050" cy="762000"/>
+          </a:xfrm>
+          <a:prstGeom prst="rect">
+            <a:avLst/>
+          </a:prstGeom>
+          <a:solidFill>
+            <a:srgbClr val="CBD5E1"/>
+          </a:solidFill>
+          <a:ln>
+            <a:noFill/>
+          </a:ln>
+          <a:effectLst/>
+        </p:spPr>
+        <p:style>
+          <a:lnRef idx="1">
+            <a:schemeClr val="accent1"/>
+          </a:lnRef>
+          <a:fillRef idx="3">
+            <a:schemeClr val="accent1"/>
+          </a:fillRef>
+          <a:effectRef idx="2">
+            <a:schemeClr val="accent1"/>
+          </a:effectRef>
+          <a:fontRef idx="minor">
+            <a:schemeClr val="lt1"/>
+          </a:fontRef>
+        </p:style>
+        <p:txBody>
+          <a:bodyPr rtlCol="0" anchor="ctr"/>
+          <a:lstStyle/>
+          <a:p>
+            <a:pPr algn="ctr"/>
+            <a:endParaRPr/>
+          </a:p>
+        </p:txBody>
+      </p:sp>
+      <p:pic>
+        <p:nvPicPr>
+          <p:cNvPr id="4" name="Picture 3" descr="image.png"/>
+          <p:cNvPicPr>
+            <a:picLocks noChangeAspect="1"/>
+          </p:cNvPicPr>
+          <p:nvPr/>
+        </p:nvPicPr>
+        <p:blipFill>
+          <a:blip r:embed="rId2"/>
+          <a:stretch>
+            <a:fillRect/>
+          </a:stretch>
+        </p:blipFill>
+        <p:spPr>
+          <a:xfrm>
+            <a:off x="3019425" y="4606081"/>
+            <a:ext cx="457200" cy="457200"/>
+          </a:xfrm>
+          <a:prstGeom prst="rect">
+            <a:avLst/>
+          </a:prstGeom>
+        </p:spPr>
+      </p:pic>
+      <p:pic>
+        <p:nvPicPr>
+          <p:cNvPr id="5" name="Picture 4" descr="image.png"/>
+          <p:cNvPicPr>
+            <a:picLocks noChangeAspect="1"/>
+          </p:cNvPicPr>
+          <p:nvPr/>
+        </p:nvPicPr>
+        <p:blipFill>
+          <a:blip r:embed="rId3"/>
+          <a:stretch>
+            <a:fillRect/>
+          </a:stretch>
+        </p:blipFill>
+        <p:spPr>
+          <a:xfrm>
+            <a:off x="6167437" y="4606081"/>
+            <a:ext cx="457200" cy="457200"/>
+          </a:xfrm>
+          <a:prstGeom prst="rect">
+            <a:avLst/>
+          </a:prstGeom>
+        </p:spPr>
+      </p:pic>
+      <p:pic>
+        <p:nvPicPr>
+          <p:cNvPr id="6" name="Picture 5" descr="image.png"/>
+          <p:cNvPicPr>
+            <a:picLocks noChangeAspect="1"/>
+          </p:cNvPicPr>
+          <p:nvPr/>
+        </p:nvPicPr>
+        <p:blipFill>
+          <a:blip r:embed="rId4"/>
+          <a:stretch>
+            <a:fillRect/>
+          </a:stretch>
+        </p:blipFill>
+        <p:spPr>
+          <a:xfrm>
+            <a:off x="9015412" y="4606081"/>
+            <a:ext cx="457200" cy="457200"/>
+          </a:xfrm>
+          <a:prstGeom prst="rect">
+            <a:avLst/>
+          </a:prstGeom>
+        </p:spPr>
+      </p:pic>
+      <p:sp>
+        <p:nvSpPr>
+          <p:cNvPr id="7" name="TextBox 6"/>
+          <p:cNvSpPr txBox="1"/>
+          <p:nvPr/>
+        </p:nvSpPr>
+        <p:spPr>
+          <a:xfrm>
+            <a:off x="4619625" y="1413569"/>
+            <a:ext cx="2952750" cy="190500"/>
+          </a:xfrm>
+          <a:prstGeom prst="rect">
+            <a:avLst/>
+          </a:prstGeom>
+          <a:noFill/>
+        </p:spPr>
+        <p:txBody>
+          <a:bodyPr wrap="none" lIns="0" tIns="0" rIns="0" bIns="0" anchor="t">
+            <a:spAutoFit/>
+          </a:bodyPr>
+          <a:lstStyle/>
+          <a:p>
+            <a:pPr algn="ctr"/>
+            <a:r>
+              <a:rPr sz="1200" b="1" i="0" u="none">
+                <a:solidFill>
+                  <a:srgbClr val="3B82F6"/>
+                </a:solidFill>
+                <a:latin typeface="Outfit"/>
+              </a:rPr>
+              <a:t>02 / PROPOSED SOLUTION</a:t>
+            </a:r>
+          </a:p>
+        </p:txBody>
+      </p:sp>
+      <p:sp>
+        <p:nvSpPr>
+          <p:cNvPr id="8" name="TextBox 7"/>
+          <p:cNvSpPr txBox="1"/>
+          <p:nvPr/>
+        </p:nvSpPr>
+        <p:spPr>
+          <a:xfrm>
+            <a:off x="71437" y="1832669"/>
+            <a:ext cx="12049125" cy="2011412"/>
+          </a:xfrm>
+          <a:prstGeom prst="rect">
+            <a:avLst/>
+          </a:prstGeom>
+          <a:noFill/>
+        </p:spPr>
+        <p:txBody>
+          <a:bodyPr wrap="square" lIns="0" tIns="0" rIns="0" bIns="0" anchor="t">
+            <a:spAutoFit/>
+          </a:bodyPr>
+          <a:lstStyle/>
+          <a:p>
+            <a:pPr algn="ctr">
+              <a:lnSpc>
+                <a:spcPts val="5280"/>
+              </a:lnSpc>
+            </a:pPr>
+            <a:r>
+              <a:rPr sz="4800" b="1" i="0" u="none">
+                <a:solidFill>
+                  <a:srgbClr val="0F172A"/>
+                </a:solidFill>
+                <a:latin typeface="Outfit"/>
+              </a:rPr>
+              <a:t>A lightweight, community-powered multimodal transit planner.</a:t>
+            </a:r>
+          </a:p>
+        </p:txBody>
+      </p:sp>
+      <p:sp>
+        <p:nvSpPr>
+          <p:cNvPr id="9" name="TextBox 8"/>
+          <p:cNvSpPr txBox="1"/>
+          <p:nvPr/>
+        </p:nvSpPr>
+        <p:spPr>
+          <a:xfrm>
+            <a:off x="1950243" y="5215681"/>
+            <a:ext cx="2595562" cy="228600"/>
+          </a:xfrm>
+          <a:prstGeom prst="rect">
+            <a:avLst/>
+          </a:prstGeom>
+          <a:noFill/>
+        </p:spPr>
+        <p:txBody>
+          <a:bodyPr wrap="none" lIns="0" tIns="0" rIns="0" bIns="0" anchor="t">
+            <a:spAutoFit/>
+          </a:bodyPr>
+          <a:lstStyle/>
+          <a:p>
+            <a:pPr algn="ctr"/>
+            <a:r>
+              <a:rPr sz="1500" b="1" i="0" u="none">
+                <a:solidFill>
+                  <a:srgbClr val="475569"/>
+                </a:solidFill>
+                <a:latin typeface="Inter"/>
+              </a:rPr>
+              <a:t>Crowdsourced Signals</a:t>
+            </a:r>
+          </a:p>
+        </p:txBody>
+      </p:sp>
+      <p:sp>
+        <p:nvSpPr>
+          <p:cNvPr id="10" name="TextBox 9"/>
+          <p:cNvSpPr txBox="1"/>
+          <p:nvPr/>
+        </p:nvSpPr>
+        <p:spPr>
+          <a:xfrm>
+            <a:off x="5306615" y="5215681"/>
+            <a:ext cx="2178843" cy="228600"/>
+          </a:xfrm>
+          <a:prstGeom prst="rect">
+            <a:avLst/>
+          </a:prstGeom>
+          <a:noFill/>
+        </p:spPr>
+        <p:txBody>
+          <a:bodyPr wrap="none" lIns="0" tIns="0" rIns="0" bIns="0" anchor="t">
+            <a:spAutoFit/>
+          </a:bodyPr>
+          <a:lstStyle/>
+          <a:p>
+            <a:pPr algn="ctr"/>
+            <a:r>
+              <a:rPr sz="1500" b="1" i="0" u="none">
+                <a:solidFill>
+                  <a:srgbClr val="475569"/>
+                </a:solidFill>
+                <a:latin typeface="Inter"/>
+              </a:rPr>
+              <a:t>Dynamic Rerouting</a:t>
+            </a:r>
+          </a:p>
+        </p:txBody>
+      </p:sp>
+      <p:sp>
+        <p:nvSpPr>
+          <p:cNvPr id="11" name="TextBox 10"/>
+          <p:cNvSpPr txBox="1"/>
+          <p:nvPr/>
+        </p:nvSpPr>
+        <p:spPr>
+          <a:xfrm>
+            <a:off x="8321278" y="5215681"/>
+            <a:ext cx="1845468" cy="228600"/>
+          </a:xfrm>
+          <a:prstGeom prst="rect">
+            <a:avLst/>
+          </a:prstGeom>
+          <a:noFill/>
+        </p:spPr>
+        <p:txBody>
+          <a:bodyPr wrap="none" lIns="0" tIns="0" rIns="0" bIns="0" anchor="t">
+            <a:spAutoFit/>
+          </a:bodyPr>
+          <a:lstStyle/>
+          <a:p>
+            <a:pPr algn="ctr"/>
+            <a:r>
+              <a:rPr sz="1500" b="1" i="0" u="none">
+                <a:solidFill>
+                  <a:srgbClr val="475569"/>
+                </a:solidFill>
+                <a:latin typeface="Inter"/>
+              </a:rPr>
+              <a:t>Proactive Alerts</a:t>
+            </a:r>
+          </a:p>
+        </p:txBody>
+      </p:sp>
+    </p:spTree>
+  </p:cSld>
+  <p:clrMapOvr>
+    <a:masterClrMapping/>
+  </p:clrMapOvr>
+</p:sld>
+</file>
+
+<file path=ppt/slides/slide4.xml><?xml version="1.0" encoding="utf-8"?>
+<p:sld xmlns:a="http://schemas.openxmlformats.org/drawingml/2006/main" xmlns:r="http://schemas.openxmlformats.org/officeDocument/2006/relationships" xmlns:p="http://schemas.openxmlformats.org/presentationml/2006/main">
   <p:cSld>
     <p:bg>
       <p:bgPr>
@@ -4924,10 +5120,111 @@
         <p:cNvGrpSpPr/>
         <p:nvPr/>
       </p:nvGrpSpPr>
-      <p:grpSpPr/>
+      <p:grpSpPr>
+        <a:xfrm>
+          <a:off x="0" y="0"/>
+          <a:ext cx="0" cy="0"/>
+          <a:chOff x="0" y="0"/>
+          <a:chExt cx="0" cy="0"/>
+        </a:xfrm>
+      </p:grpSpPr>
+      <p:sp>
+        <p:nvSpPr>
+          <p:cNvPr id="2" name="Rounded Rectangle 1"/>
+          <p:cNvSpPr/>
+          <p:nvPr/>
+        </p:nvSpPr>
+        <p:spPr>
+          <a:xfrm>
+            <a:off x="762000" y="2286000"/>
+            <a:ext cx="3657600" cy="3810000"/>
+          </a:xfrm>
+          <a:prstGeom prst="roundRect">
+            <a:avLst>
+              <a:gd name="adj" fmla="val 6250"/>
+            </a:avLst>
+          </a:prstGeom>
+          <a:solidFill>
+            <a:srgbClr val="F8FAFC"/>
+          </a:solidFill>
+          <a:ln>
+            <a:noFill/>
+          </a:ln>
+          <a:effectLst/>
+        </p:spPr>
+        <p:style>
+          <a:lnRef idx="1">
+            <a:schemeClr val="accent1"/>
+          </a:lnRef>
+          <a:fillRef idx="3">
+            <a:schemeClr val="accent1"/>
+          </a:fillRef>
+          <a:effectRef idx="2">
+            <a:schemeClr val="accent1"/>
+          </a:effectRef>
+          <a:fontRef idx="minor">
+            <a:schemeClr val="lt1"/>
+          </a:fontRef>
+        </p:style>
+        <p:txBody>
+          <a:bodyPr rtlCol="0" anchor="ctr"/>
+          <a:lstStyle/>
+          <a:p>
+            <a:pPr algn="ctr"/>
+            <a:endParaRPr/>
+          </a:p>
+        </p:txBody>
+      </p:sp>
+      <p:sp>
+        <p:nvSpPr>
+          <p:cNvPr id="3" name="Rounded Rectangle 2"/>
+          <p:cNvSpPr/>
+          <p:nvPr/>
+        </p:nvSpPr>
+        <p:spPr>
+          <a:xfrm>
+            <a:off x="4724400" y="2286000"/>
+            <a:ext cx="3657600" cy="3810000"/>
+          </a:xfrm>
+          <a:prstGeom prst="roundRect">
+            <a:avLst>
+              <a:gd name="adj" fmla="val 6250"/>
+            </a:avLst>
+          </a:prstGeom>
+          <a:solidFill>
+            <a:srgbClr val="F8FAFC"/>
+          </a:solidFill>
+          <a:ln>
+            <a:noFill/>
+          </a:ln>
+          <a:effectLst/>
+        </p:spPr>
+        <p:style>
+          <a:lnRef idx="1">
+            <a:schemeClr val="accent1"/>
+          </a:lnRef>
+          <a:fillRef idx="3">
+            <a:schemeClr val="accent1"/>
+          </a:fillRef>
+          <a:effectRef idx="2">
+            <a:schemeClr val="accent1"/>
+          </a:effectRef>
+          <a:fontRef idx="minor">
+            <a:schemeClr val="lt1"/>
+          </a:fontRef>
+        </p:style>
+        <p:txBody>
+          <a:bodyPr rtlCol="0" anchor="ctr"/>
+          <a:lstStyle/>
+          <a:p>
+            <a:pPr algn="ctr"/>
+            <a:endParaRPr/>
+          </a:p>
+        </p:txBody>
+      </p:sp>
       <p:pic>
         <p:nvPicPr>
-          <p:cNvPr id="2" name="Picture 1" descr="image.png"/>
+          <p:cNvPr id="4" name="Picture 3" descr="image.png"/>
           <p:cNvPicPr>
             <a:picLocks noChangeAspect="1"/>
           </p:cNvPicPr>
@@ -4941,8 +5238,8 @@
         </p:blipFill>
         <p:spPr>
           <a:xfrm>
-            <a:off x="6858000" y="0"/>
-            <a:ext cx="5334000" cy="6858000"/>
+            <a:off x="1219200" y="2743200"/>
+            <a:ext cx="381000" cy="381000"/>
           </a:xfrm>
           <a:prstGeom prst="rect">
             <a:avLst/>
@@ -4951,7 +5248,7 @@
       </p:pic>
       <p:pic>
         <p:nvPicPr>
-          <p:cNvPr id="3" name="Picture 2" descr="image.png"/>
+          <p:cNvPr id="5" name="Picture 4" descr="image.png"/>
           <p:cNvPicPr>
             <a:picLocks noChangeAspect="1"/>
           </p:cNvPicPr>
@@ -4965,8 +5262,8 @@
         </p:blipFill>
         <p:spPr>
           <a:xfrm>
-            <a:off x="6858000" y="0"/>
-            <a:ext cx="5334000" cy="6858000"/>
+            <a:off x="5181600" y="2743200"/>
+            <a:ext cx="476250" cy="381000"/>
           </a:xfrm>
           <a:prstGeom prst="rect">
             <a:avLst/>
@@ -4975,7 +5272,7 @@
       </p:pic>
       <p:pic>
         <p:nvPicPr>
-          <p:cNvPr id="4" name="Picture 3" descr="image.png"/>
+          <p:cNvPr id="6" name="Picture 5" descr="image.png"/>
           <p:cNvPicPr>
             <a:picLocks noChangeAspect="1"/>
           </p:cNvPicPr>
@@ -4989,48 +5286,24 @@
         </p:blipFill>
         <p:spPr>
           <a:xfrm>
-            <a:off x="762000" y="3201292"/>
-            <a:ext cx="266700" cy="276225"/>
+            <a:off x="8686800" y="2286000"/>
+            <a:ext cx="2743200" cy="3810000"/>
           </a:xfrm>
           <a:prstGeom prst="rect">
             <a:avLst/>
           </a:prstGeom>
         </p:spPr>
       </p:pic>
-      <p:pic>
-        <p:nvPicPr>
-          <p:cNvPr id="5" name="Picture 4" descr="image.png"/>
-          <p:cNvPicPr>
-            <a:picLocks noChangeAspect="1"/>
-          </p:cNvPicPr>
-          <p:nvPr/>
-        </p:nvPicPr>
-        <p:blipFill>
-          <a:blip r:embed="rId5"/>
-          <a:stretch>
-            <a:fillRect/>
-          </a:stretch>
-        </p:blipFill>
-        <p:spPr>
-          <a:xfrm>
-            <a:off x="762000" y="4134742"/>
-            <a:ext cx="333375" cy="276225"/>
-          </a:xfrm>
-          <a:prstGeom prst="rect">
-            <a:avLst/>
-          </a:prstGeom>
-        </p:spPr>
-      </p:pic>
-      <p:sp>
-        <p:nvSpPr>
-          <p:cNvPr id="6" name="TextBox 5"/>
+      <p:sp>
+        <p:nvSpPr>
+          <p:cNvPr id="7" name="TextBox 6"/>
           <p:cNvSpPr txBox="1"/>
           <p:nvPr/>
         </p:nvSpPr>
         <p:spPr>
           <a:xfrm>
-            <a:off x="762000" y="1194494"/>
-            <a:ext cx="6667500" cy="190500"/>
+            <a:off x="762000" y="762000"/>
+            <a:ext cx="11430000" cy="190500"/>
           </a:xfrm>
           <a:prstGeom prst="rect">
             <a:avLst/>
@@ -5038,34 +5311,34 @@
           <a:noFill/>
         </p:spPr>
         <p:txBody>
-          <a:bodyPr wrap="none" lIns="0" rIns="0" tIns="0" bIns="0" anchor="t">
+          <a:bodyPr wrap="none" lIns="0" tIns="0" rIns="0" bIns="0" anchor="t">
             <a:spAutoFit/>
           </a:bodyPr>
           <a:lstStyle/>
           <a:p>
             <a:pPr algn="l"/>
             <a:r>
-              <a:rPr b="1" sz="1200" i="0" u="none">
-                <a:solidFill>
-                  <a:srgbClr val="EF4444"/>
+              <a:rPr sz="1200" b="1" i="0" u="none">
+                <a:solidFill>
+                  <a:srgbClr val="3B82F6"/>
                 </a:solidFill>
                 <a:latin typeface="Outfit"/>
               </a:rPr>
-              <a:t>01 / PROBLEM STATEMENT</a:t>
-            </a:r>
-          </a:p>
-        </p:txBody>
-      </p:sp>
-      <p:sp>
-        <p:nvSpPr>
-          <p:cNvPr id="7" name="TextBox 6"/>
+              <a:t>03 / TARGET USERS &amp; USE CASE</a:t>
+            </a:r>
+          </a:p>
+        </p:txBody>
+      </p:sp>
+      <p:sp>
+        <p:nvSpPr>
+          <p:cNvPr id="8" name="TextBox 7"/>
           <p:cNvSpPr txBox="1"/>
           <p:nvPr/>
         </p:nvSpPr>
         <p:spPr>
           <a:xfrm>
-            <a:off x="762000" y="1537394"/>
-            <a:ext cx="5700712" cy="1173360"/>
+            <a:off x="762000" y="1104900"/>
+            <a:ext cx="11430000" cy="571500"/>
           </a:xfrm>
           <a:prstGeom prst="rect">
             <a:avLst/>
@@ -5073,38 +5346,143 @@
           <a:noFill/>
         </p:spPr>
         <p:txBody>
-          <a:bodyPr wrap="square" lIns="0" rIns="0" tIns="0" bIns="0" anchor="t">
+          <a:bodyPr wrap="none" lIns="0" tIns="0" rIns="0" bIns="0" anchor="t">
             <a:spAutoFit/>
           </a:bodyPr>
           <a:lstStyle/>
           <a:p>
+            <a:pPr algn="l"/>
+            <a:r>
+              <a:rPr sz="3600" b="1" i="0" u="none">
+                <a:solidFill>
+                  <a:srgbClr val="0F172A"/>
+                </a:solidFill>
+                <a:latin typeface="Outfit"/>
+              </a:rPr>
+              <a:t>Built for the complex Kerala commute.</a:t>
+            </a:r>
+          </a:p>
+        </p:txBody>
+      </p:sp>
+      <p:sp>
+        <p:nvSpPr>
+          <p:cNvPr id="9" name="TextBox 8"/>
+          <p:cNvSpPr txBox="1"/>
+          <p:nvPr/>
+        </p:nvSpPr>
+        <p:spPr>
+          <a:xfrm>
+            <a:off x="1219200" y="3352800"/>
+            <a:ext cx="3600450" cy="333375"/>
+          </a:xfrm>
+          <a:prstGeom prst="rect">
+            <a:avLst/>
+          </a:prstGeom>
+          <a:noFill/>
+        </p:spPr>
+        <p:txBody>
+          <a:bodyPr wrap="none" lIns="0" tIns="0" rIns="0" bIns="0" anchor="t">
+            <a:spAutoFit/>
+          </a:bodyPr>
+          <a:lstStyle/>
+          <a:p>
+            <a:pPr algn="l"/>
+            <a:r>
+              <a:rPr sz="2100" b="1" i="0" u="none">
+                <a:solidFill>
+                  <a:srgbClr val="0F172A"/>
+                </a:solidFill>
+                <a:latin typeface="Outfit"/>
+              </a:rPr>
+              <a:t>Daily Commuters</a:t>
+            </a:r>
+          </a:p>
+        </p:txBody>
+      </p:sp>
+      <p:sp>
+        <p:nvSpPr>
+          <p:cNvPr id="10" name="TextBox 9"/>
+          <p:cNvSpPr txBox="1"/>
+          <p:nvPr/>
+        </p:nvSpPr>
+        <p:spPr>
+          <a:xfrm>
+            <a:off x="1219200" y="3838575"/>
+            <a:ext cx="2838450" cy="771525"/>
+          </a:xfrm>
+          <a:prstGeom prst="rect">
+            <a:avLst/>
+          </a:prstGeom>
+          <a:noFill/>
+        </p:spPr>
+        <p:txBody>
+          <a:bodyPr wrap="square" lIns="0" tIns="0" rIns="0" bIns="0" anchor="t">
+            <a:spAutoFit/>
+          </a:bodyPr>
+          <a:lstStyle/>
+          <a:p>
             <a:pPr algn="l">
               <a:lnSpc>
-                <a:spcPts val="4620"/>
+                <a:spcPts val="2025"/>
               </a:lnSpc>
             </a:pPr>
             <a:r>
-              <a:rPr b="1" sz="4200" i="0" u="none">
+              <a:rPr sz="1350" b="0" i="0" u="none">
+                <a:solidFill>
+                  <a:srgbClr val="64748B"/>
+                </a:solidFill>
+                <a:latin typeface="Inter"/>
+              </a:rPr>
+              <a:t>Navigating tight transfers between KSRTC buses and local passenger ferries.</a:t>
+            </a:r>
+          </a:p>
+        </p:txBody>
+      </p:sp>
+      <p:sp>
+        <p:nvSpPr>
+          <p:cNvPr id="11" name="TextBox 10"/>
+          <p:cNvSpPr txBox="1"/>
+          <p:nvPr/>
+        </p:nvSpPr>
+        <p:spPr>
+          <a:xfrm>
+            <a:off x="5181600" y="3352800"/>
+            <a:ext cx="3600450" cy="333375"/>
+          </a:xfrm>
+          <a:prstGeom prst="rect">
+            <a:avLst/>
+          </a:prstGeom>
+          <a:noFill/>
+        </p:spPr>
+        <p:txBody>
+          <a:bodyPr wrap="none" lIns="0" tIns="0" rIns="0" bIns="0" anchor="t">
+            <a:spAutoFit/>
+          </a:bodyPr>
+          <a:lstStyle/>
+          <a:p>
+            <a:pPr algn="l"/>
+            <a:r>
+              <a:rPr sz="2100" b="1" i="0" u="none">
                 <a:solidFill>
                   <a:srgbClr val="0F172A"/>
                 </a:solidFill>
                 <a:latin typeface="Outfit"/>
               </a:rPr>
-              <a:t>The Disconnected Commute</a:t>
-            </a:r>
-          </a:p>
-        </p:txBody>
-      </p:sp>
-      <p:sp>
-        <p:nvSpPr>
-          <p:cNvPr id="8" name="TextBox 7"/>
+              <a:t>Students</a:t>
+            </a:r>
+          </a:p>
+        </p:txBody>
+      </p:sp>
+      <p:sp>
+        <p:nvSpPr>
+          <p:cNvPr id="12" name="TextBox 11"/>
           <p:cNvSpPr txBox="1"/>
           <p:nvPr/>
         </p:nvSpPr>
         <p:spPr>
           <a:xfrm>
-            <a:off x="1219200" y="3167955"/>
-            <a:ext cx="5313164" cy="285750"/>
+            <a:off x="5181600" y="3838575"/>
+            <a:ext cx="2838450" cy="771525"/>
           </a:xfrm>
           <a:prstGeom prst="rect">
             <a:avLst/>
@@ -5112,207 +5490,24 @@
           <a:noFill/>
         </p:spPr>
         <p:txBody>
-          <a:bodyPr wrap="none" lIns="0" rIns="0" tIns="0" bIns="0" anchor="t">
+          <a:bodyPr wrap="square" lIns="0" tIns="0" rIns="0" bIns="0" anchor="t">
             <a:spAutoFit/>
           </a:bodyPr>
           <a:lstStyle/>
           <a:p>
-            <a:pPr algn="l"/>
-            <a:r>
-              <a:rPr b="1" sz="1800" i="0" u="none">
-                <a:solidFill>
-                  <a:srgbClr val="0F172A"/>
-                </a:solidFill>
-                <a:latin typeface="Outfit"/>
-              </a:rPr>
-              <a:t>Unsynchronized Timetables</a:t>
-            </a:r>
-          </a:p>
-        </p:txBody>
-      </p:sp>
-      <p:sp>
-        <p:nvSpPr>
-          <p:cNvPr id="9" name="TextBox 8"/>
-          <p:cNvSpPr txBox="1"/>
-          <p:nvPr/>
-        </p:nvSpPr>
-        <p:spPr>
-          <a:xfrm>
-            <a:off x="1219200" y="3529905"/>
-            <a:ext cx="5060156" cy="266700"/>
-          </a:xfrm>
-          <a:prstGeom prst="rect">
-            <a:avLst/>
-          </a:prstGeom>
-          <a:noFill/>
-        </p:spPr>
-        <p:txBody>
-          <a:bodyPr wrap="none" lIns="0" rIns="0" tIns="0" bIns="0" anchor="t">
-            <a:spAutoFit/>
-          </a:bodyPr>
-          <a:lstStyle/>
-          <a:p>
             <a:pPr algn="l">
               <a:lnSpc>
-                <a:spcPts val="2100"/>
+                <a:spcPts val="2025"/>
               </a:lnSpc>
             </a:pPr>
             <a:r>
-              <a:rPr b="0" sz="1500" i="0" u="none">
+              <a:rPr sz="1350" b="0" i="0" u="none">
                 <a:solidFill>
                   <a:srgbClr val="64748B"/>
                 </a:solidFill>
                 <a:latin typeface="Inter"/>
               </a:rPr>
-              <a:t>Ferries and feeder autos ignore train delays.</a:t>
-            </a:r>
-          </a:p>
-        </p:txBody>
-      </p:sp>
-      <p:sp>
-        <p:nvSpPr>
-          <p:cNvPr id="10" name="TextBox 9"/>
-          <p:cNvSpPr txBox="1"/>
-          <p:nvPr/>
-        </p:nvSpPr>
-        <p:spPr>
-          <a:xfrm>
-            <a:off x="1285875" y="4101405"/>
-            <a:ext cx="6163270" cy="285750"/>
-          </a:xfrm>
-          <a:prstGeom prst="rect">
-            <a:avLst/>
-          </a:prstGeom>
-          <a:noFill/>
-        </p:spPr>
-        <p:txBody>
-          <a:bodyPr wrap="none" lIns="0" rIns="0" tIns="0" bIns="0" anchor="t">
-            <a:spAutoFit/>
-          </a:bodyPr>
-          <a:lstStyle/>
-          <a:p>
-            <a:pPr algn="l"/>
-            <a:r>
-              <a:rPr b="1" sz="1800" i="0" u="none">
-                <a:solidFill>
-                  <a:srgbClr val="0F172A"/>
-                </a:solidFill>
-                <a:latin typeface="Outfit"/>
-              </a:rPr>
-              <a:t>Stranded Passengers</a:t>
-            </a:r>
-          </a:p>
-        </p:txBody>
-      </p:sp>
-      <p:sp>
-        <p:nvSpPr>
-          <p:cNvPr id="11" name="TextBox 10"/>
-          <p:cNvSpPr txBox="1"/>
-          <p:nvPr/>
-        </p:nvSpPr>
-        <p:spPr>
-          <a:xfrm>
-            <a:off x="1285875" y="4463355"/>
-            <a:ext cx="5869781" cy="266700"/>
-          </a:xfrm>
-          <a:prstGeom prst="rect">
-            <a:avLst/>
-          </a:prstGeom>
-          <a:noFill/>
-        </p:spPr>
-        <p:txBody>
-          <a:bodyPr wrap="none" lIns="0" rIns="0" tIns="0" bIns="0" anchor="t">
-            <a:spAutoFit/>
-          </a:bodyPr>
-          <a:lstStyle/>
-          <a:p>
-            <a:pPr algn="l">
-              <a:lnSpc>
-                <a:spcPts val="2100"/>
-              </a:lnSpc>
-            </a:pPr>
-            <a:r>
-              <a:rPr b="0" sz="1500" i="0" u="none">
-                <a:solidFill>
-                  <a:srgbClr val="64748B"/>
-                </a:solidFill>
-                <a:latin typeface="Inter"/>
-              </a:rPr>
-              <a:t>Missed connections cost daily wage earners hours.</a:t>
-            </a:r>
-          </a:p>
-        </p:txBody>
-      </p:sp>
-      <p:sp>
-        <p:nvSpPr>
-          <p:cNvPr id="12" name="TextBox 11"/>
-          <p:cNvSpPr txBox="1"/>
-          <p:nvPr/>
-        </p:nvSpPr>
-        <p:spPr>
-          <a:xfrm>
-            <a:off x="952500" y="5034855"/>
-            <a:ext cx="5825728" cy="285750"/>
-          </a:xfrm>
-          <a:prstGeom prst="rect">
-            <a:avLst/>
-          </a:prstGeom>
-          <a:noFill/>
-        </p:spPr>
-        <p:txBody>
-          <a:bodyPr wrap="none" lIns="0" rIns="0" tIns="0" bIns="0" anchor="t">
-            <a:spAutoFit/>
-          </a:bodyPr>
-          <a:lstStyle/>
-          <a:p>
-            <a:pPr algn="l"/>
-            <a:r>
-              <a:rPr b="1" sz="1800" i="0" u="none">
-                <a:solidFill>
-                  <a:srgbClr val="0F172A"/>
-                </a:solidFill>
-                <a:latin typeface="Outfit"/>
-              </a:rPr>
-              <a:t>Invisible Disruptions</a:t>
-            </a:r>
-          </a:p>
-        </p:txBody>
-      </p:sp>
-      <p:sp>
-        <p:nvSpPr>
-          <p:cNvPr id="13" name="TextBox 12"/>
-          <p:cNvSpPr txBox="1"/>
-          <p:nvPr/>
-        </p:nvSpPr>
-        <p:spPr>
-          <a:xfrm>
-            <a:off x="952500" y="5396805"/>
-            <a:ext cx="5548312" cy="266700"/>
-          </a:xfrm>
-          <a:prstGeom prst="rect">
-            <a:avLst/>
-          </a:prstGeom>
-          <a:noFill/>
-        </p:spPr>
-        <p:txBody>
-          <a:bodyPr wrap="none" lIns="0" rIns="0" tIns="0" bIns="0" anchor="t">
-            <a:spAutoFit/>
-          </a:bodyPr>
-          <a:lstStyle/>
-          <a:p>
-            <a:pPr algn="l">
-              <a:lnSpc>
-                <a:spcPts val="2100"/>
-              </a:lnSpc>
-            </a:pPr>
-            <a:r>
-              <a:rPr b="0" sz="1500" i="0" u="none">
-                <a:solidFill>
-                  <a:srgbClr val="64748B"/>
-                </a:solidFill>
-                <a:latin typeface="Inter"/>
-              </a:rPr>
-              <a:t>Closed level crossings break the last-mile chain.</a:t>
+              <a:t>Relying on last-mile feeder autos to reach off-grid campuses safely.</a:t>
             </a:r>
           </a:p>
         </p:txBody>
@@ -5325,13 +5520,13 @@
 </p:sld>
 </file>
 
-<file path=ppt/slides/slide3.xml><?xml version="1.0" encoding="utf-8"?>
-<p:sld xmlns:a="http://schemas.openxmlformats.org/drawingml/2006/main" xmlns:p="http://schemas.openxmlformats.org/presentationml/2006/main" xmlns:r="http://schemas.openxmlformats.org/officeDocument/2006/relationships">
+<file path=ppt/slides/slide5.xml><?xml version="1.0" encoding="utf-8"?>
+<p:sld xmlns:a="http://schemas.openxmlformats.org/drawingml/2006/main" xmlns:r="http://schemas.openxmlformats.org/officeDocument/2006/relationships" xmlns:p="http://schemas.openxmlformats.org/presentationml/2006/main">
   <p:cSld>
     <p:bg>
       <p:bgPr>
         <a:solidFill>
-          <a:srgbClr val="F8FAFC"/>
+          <a:srgbClr val="F1F5F9"/>
         </a:solidFill>
         <a:effectLst/>
       </p:bgPr>
@@ -5342,23 +5537,32 @@
         <p:cNvGrpSpPr/>
         <p:nvPr/>
       </p:nvGrpSpPr>
-      <p:grpSpPr/>
-      <p:sp>
-        <p:nvSpPr>
-          <p:cNvPr id="2" name="Rectangle 1"/>
+      <p:grpSpPr>
+        <a:xfrm>
+          <a:off x="0" y="0"/>
+          <a:ext cx="0" cy="0"/>
+          <a:chOff x="0" y="0"/>
+          <a:chExt cx="0" cy="0"/>
+        </a:xfrm>
+      </p:grpSpPr>
+      <p:sp>
+        <p:nvSpPr>
+          <p:cNvPr id="2" name="Rounded Rectangle 1"/>
           <p:cNvSpPr/>
           <p:nvPr/>
         </p:nvSpPr>
         <p:spPr>
           <a:xfrm>
-            <a:off x="4895850" y="4644181"/>
-            <a:ext cx="19050" cy="762000"/>
-          </a:xfrm>
-          <a:prstGeom prst="rect">
-            <a:avLst/>
+            <a:off x="762000" y="2495550"/>
+            <a:ext cx="5181600" cy="1562100"/>
+          </a:xfrm>
+          <a:prstGeom prst="roundRect">
+            <a:avLst>
+              <a:gd name="adj" fmla="val 9756"/>
+            </a:avLst>
           </a:prstGeom>
           <a:solidFill>
-            <a:srgbClr val="CBD5E1"/>
+            <a:srgbClr val="FFFFFF"/>
           </a:solidFill>
           <a:ln>
             <a:noFill/>
@@ -5384,25 +5588,28 @@
           <a:lstStyle/>
           <a:p>
             <a:pPr algn="ctr"/>
-          </a:p>
-        </p:txBody>
-      </p:sp>
-      <p:sp>
-        <p:nvSpPr>
-          <p:cNvPr id="3" name="Rectangle 2"/>
+            <a:endParaRPr/>
+          </a:p>
+        </p:txBody>
+      </p:sp>
+      <p:sp>
+        <p:nvSpPr>
+          <p:cNvPr id="3" name="Rounded Rectangle 2"/>
           <p:cNvSpPr/>
           <p:nvPr/>
         </p:nvSpPr>
         <p:spPr>
           <a:xfrm>
-            <a:off x="7877175" y="4644181"/>
-            <a:ext cx="19050" cy="762000"/>
-          </a:xfrm>
-          <a:prstGeom prst="rect">
-            <a:avLst/>
+            <a:off x="6248400" y="2495550"/>
+            <a:ext cx="5181600" cy="1562100"/>
+          </a:xfrm>
+          <a:prstGeom prst="roundRect">
+            <a:avLst>
+              <a:gd name="adj" fmla="val 9756"/>
+            </a:avLst>
           </a:prstGeom>
           <a:solidFill>
-            <a:srgbClr val="CBD5E1"/>
+            <a:srgbClr val="FFFFFF"/>
           </a:solidFill>
           <a:ln>
             <a:noFill/>
@@ -5428,81 +5635,149 @@
           <a:lstStyle/>
           <a:p>
             <a:pPr algn="ctr"/>
-          </a:p>
-        </p:txBody>
-      </p:sp>
-      <p:pic>
-        <p:nvPicPr>
-          <p:cNvPr id="4" name="Picture 3" descr="image.png"/>
-          <p:cNvPicPr>
-            <a:picLocks noChangeAspect="1"/>
-          </p:cNvPicPr>
-          <p:nvPr/>
-        </p:nvPicPr>
-        <p:blipFill>
-          <a:blip r:embed="rId2"/>
-          <a:stretch>
-            <a:fillRect/>
-          </a:stretch>
-        </p:blipFill>
-        <p:spPr>
-          <a:xfrm>
-            <a:off x="3019425" y="4606081"/>
-            <a:ext cx="457200" cy="457200"/>
-          </a:xfrm>
-          <a:prstGeom prst="rect">
-            <a:avLst/>
-          </a:prstGeom>
-        </p:spPr>
-      </p:pic>
-      <p:pic>
-        <p:nvPicPr>
-          <p:cNvPr id="5" name="Picture 4" descr="image.png"/>
-          <p:cNvPicPr>
-            <a:picLocks noChangeAspect="1"/>
-          </p:cNvPicPr>
-          <p:nvPr/>
-        </p:nvPicPr>
-        <p:blipFill>
-          <a:blip r:embed="rId3"/>
-          <a:stretch>
-            <a:fillRect/>
-          </a:stretch>
-        </p:blipFill>
-        <p:spPr>
-          <a:xfrm>
-            <a:off x="6167437" y="4606081"/>
-            <a:ext cx="457200" cy="457200"/>
-          </a:xfrm>
-          <a:prstGeom prst="rect">
-            <a:avLst/>
-          </a:prstGeom>
-        </p:spPr>
-      </p:pic>
-      <p:pic>
-        <p:nvPicPr>
-          <p:cNvPr id="6" name="Picture 5" descr="image.png"/>
-          <p:cNvPicPr>
-            <a:picLocks noChangeAspect="1"/>
-          </p:cNvPicPr>
-          <p:nvPr/>
-        </p:nvPicPr>
-        <p:blipFill>
-          <a:blip r:embed="rId4"/>
-          <a:stretch>
-            <a:fillRect/>
-          </a:stretch>
-        </p:blipFill>
-        <p:spPr>
-          <a:xfrm>
-            <a:off x="9015412" y="4606081"/>
-            <a:ext cx="457200" cy="457200"/>
-          </a:xfrm>
-          <a:prstGeom prst="rect">
-            <a:avLst/>
-          </a:prstGeom>
-        </p:spPr>
-      </p:pic>
+            <a:endParaRPr/>
+          </a:p>
+        </p:txBody>
+      </p:sp>
+      <p:sp>
+        <p:nvSpPr>
+          <p:cNvPr id="4" name="Rounded Rectangle 3"/>
+          <p:cNvSpPr/>
+          <p:nvPr/>
+        </p:nvSpPr>
+        <p:spPr>
+          <a:xfrm>
+            <a:off x="762000" y="4362450"/>
+            <a:ext cx="5181600" cy="1371600"/>
+          </a:xfrm>
+          <a:prstGeom prst="roundRect">
+            <a:avLst>
+              <a:gd name="adj" fmla="val 11111"/>
+            </a:avLst>
+          </a:prstGeom>
+          <a:solidFill>
+            <a:srgbClr val="FFFFFF"/>
+          </a:solidFill>
+          <a:ln>
+            <a:noFill/>
+          </a:ln>
+          <a:effectLst/>
+        </p:spPr>
+        <p:style>
+          <a:lnRef idx="1">
+            <a:schemeClr val="accent1"/>
+          </a:lnRef>
+          <a:fillRef idx="3">
+            <a:schemeClr val="accent1"/>
+          </a:fillRef>
+          <a:effectRef idx="2">
+            <a:schemeClr val="accent1"/>
+          </a:effectRef>
+          <a:fontRef idx="minor">
+            <a:schemeClr val="lt1"/>
+          </a:fontRef>
+        </p:style>
+        <p:txBody>
+          <a:bodyPr rtlCol="0" anchor="ctr"/>
+          <a:lstStyle/>
+          <a:p>
+            <a:pPr algn="ctr"/>
+            <a:endParaRPr/>
+          </a:p>
+        </p:txBody>
+      </p:sp>
+      <p:sp>
+        <p:nvSpPr>
+          <p:cNvPr id="5" name="Rounded Rectangle 4"/>
+          <p:cNvSpPr/>
+          <p:nvPr/>
+        </p:nvSpPr>
+        <p:spPr>
+          <a:xfrm>
+            <a:off x="6248400" y="4362450"/>
+            <a:ext cx="5181600" cy="1371600"/>
+          </a:xfrm>
+          <a:prstGeom prst="roundRect">
+            <a:avLst>
+              <a:gd name="adj" fmla="val 11111"/>
+            </a:avLst>
+          </a:prstGeom>
+          <a:solidFill>
+            <a:srgbClr val="FFFFFF"/>
+          </a:solidFill>
+          <a:ln>
+            <a:noFill/>
+          </a:ln>
+          <a:effectLst/>
+        </p:spPr>
+        <p:style>
+          <a:lnRef idx="1">
+            <a:schemeClr val="accent1"/>
+          </a:lnRef>
+          <a:fillRef idx="3">
+            <a:schemeClr val="accent1"/>
+          </a:fillRef>
+          <a:effectRef idx="2">
+            <a:schemeClr val="accent1"/>
+          </a:effectRef>
+          <a:fontRef idx="minor">
+            <a:schemeClr val="lt1"/>
+          </a:fontRef>
+        </p:style>
+        <p:txBody>
+          <a:bodyPr rtlCol="0" anchor="ctr"/>
+          <a:lstStyle/>
+          <a:p>
+            <a:pPr algn="ctr"/>
+            <a:endParaRPr/>
+          </a:p>
+        </p:txBody>
+      </p:sp>
+      <p:sp>
+        <p:nvSpPr>
+          <p:cNvPr id="6" name="Rectangle 5"/>
+          <p:cNvSpPr/>
+          <p:nvPr/>
+        </p:nvSpPr>
+        <p:spPr>
+          <a:xfrm>
+            <a:off x="6248400" y="4362450"/>
+            <a:ext cx="38100" cy="1371600"/>
+          </a:xfrm>
+          <a:prstGeom prst="rect">
+            <a:avLst/>
+          </a:prstGeom>
+          <a:solidFill>
+            <a:srgbClr val="EF4444"/>
+          </a:solidFill>
+          <a:ln>
+            <a:noFill/>
+          </a:ln>
+          <a:effectLst/>
+        </p:spPr>
+        <p:style>
+          <a:lnRef idx="1">
+            <a:schemeClr val="accent1"/>
+          </a:lnRef>
+          <a:fillRef idx="3">
+            <a:schemeClr val="accent1"/>
+          </a:fillRef>
+          <a:effectRef idx="2">
+            <a:schemeClr val="accent1"/>
+          </a:effectRef>
+          <a:fontRef idx="minor">
+            <a:schemeClr val="lt1"/>
+          </a:fontRef>
+        </p:style>
+        <p:txBody>
+          <a:bodyPr rtlCol="0" anchor="ctr"/>
+          <a:lstStyle/>
+          <a:p>
+            <a:pPr algn="ctr"/>
+            <a:endParaRPr/>
+          </a:p>
+        </p:txBody>
+      </p:sp>
       <p:sp>
         <p:nvSpPr>
           <p:cNvPr id="7" name="TextBox 6"/>
@@ -5511,8 +5786,8 @@
         </p:nvSpPr>
         <p:spPr>
           <a:xfrm>
-            <a:off x="4619625" y="1413569"/>
-            <a:ext cx="2952750" cy="190500"/>
+            <a:off x="762000" y="1123950"/>
+            <a:ext cx="11430000" cy="190500"/>
           </a:xfrm>
           <a:prstGeom prst="rect">
             <a:avLst/>
@@ -5520,20 +5795,20 @@
           <a:noFill/>
         </p:spPr>
         <p:txBody>
-          <a:bodyPr wrap="none" lIns="0" rIns="0" tIns="0" bIns="0" anchor="t">
+          <a:bodyPr wrap="none" lIns="0" tIns="0" rIns="0" bIns="0" anchor="t">
             <a:spAutoFit/>
           </a:bodyPr>
           <a:lstStyle/>
           <a:p>
-            <a:pPr algn="ctr"/>
-            <a:r>
-              <a:rPr b="1" sz="1200" i="0" u="none">
+            <a:pPr algn="l"/>
+            <a:r>
+              <a:rPr sz="1200" b="1" i="0" u="none">
                 <a:solidFill>
                   <a:srgbClr val="3B82F6"/>
                 </a:solidFill>
                 <a:latin typeface="Outfit"/>
               </a:rPr>
-              <a:t>02 / PROPOSED SOLUTION</a:t>
+              <a:t>04 / KEY FEATURES</a:t>
             </a:r>
           </a:p>
         </p:txBody>
@@ -5546,8 +5821,8 @@
         </p:nvSpPr>
         <p:spPr>
           <a:xfrm>
-            <a:off x="71437" y="1832669"/>
-            <a:ext cx="12049125" cy="2011412"/>
+            <a:off x="762000" y="1466850"/>
+            <a:ext cx="11430000" cy="571500"/>
           </a:xfrm>
           <a:prstGeom prst="rect">
             <a:avLst/>
@@ -5555,24 +5830,20 @@
           <a:noFill/>
         </p:spPr>
         <p:txBody>
-          <a:bodyPr wrap="square" lIns="0" rIns="0" tIns="0" bIns="0" anchor="t">
+          <a:bodyPr wrap="none" lIns="0" tIns="0" rIns="0" bIns="0" anchor="t">
             <a:spAutoFit/>
           </a:bodyPr>
           <a:lstStyle/>
           <a:p>
-            <a:pPr algn="ctr">
-              <a:lnSpc>
-                <a:spcPts val="5280"/>
-              </a:lnSpc>
-            </a:pPr>
-            <a:r>
-              <a:rPr b="1" sz="4800" i="0" u="none">
+            <a:pPr algn="l"/>
+            <a:r>
+              <a:rPr sz="3600" b="1" i="0" u="none">
                 <a:solidFill>
                   <a:srgbClr val="0F172A"/>
                 </a:solidFill>
                 <a:latin typeface="Outfit"/>
               </a:rPr>
-              <a:t>A lightweight, community-powered multimodal transit planner.</a:t>
+              <a:t>Intelligence at every node.</a:t>
             </a:r>
           </a:p>
         </p:txBody>
@@ -5585,8 +5856,8 @@
         </p:nvSpPr>
         <p:spPr>
           <a:xfrm>
-            <a:off x="1950243" y="5215681"/>
-            <a:ext cx="2595562" cy="228600"/>
+            <a:off x="1143000" y="2876550"/>
+            <a:ext cx="5800725" cy="285750"/>
           </a:xfrm>
           <a:prstGeom prst="rect">
             <a:avLst/>
@@ -5594,34 +5865,69 @@
           <a:noFill/>
         </p:spPr>
         <p:txBody>
-          <a:bodyPr wrap="none" lIns="0" rIns="0" tIns="0" bIns="0" anchor="t">
+          <a:bodyPr wrap="none" lIns="0" tIns="0" rIns="0" bIns="0" anchor="t">
             <a:spAutoFit/>
           </a:bodyPr>
           <a:lstStyle/>
           <a:p>
-            <a:pPr algn="ctr"/>
-            <a:r>
-              <a:rPr b="1" sz="1500" i="0" u="none">
-                <a:solidFill>
-                  <a:srgbClr val="475569"/>
+            <a:pPr algn="l"/>
+            <a:r>
+              <a:rPr sz="1800" b="1" i="0" u="none">
+                <a:solidFill>
+                  <a:srgbClr val="0F172A"/>
+                </a:solidFill>
+                <a:latin typeface="Outfit"/>
+              </a:rPr>
+              <a:t>Transfer Risk Scoring</a:t>
+            </a:r>
+          </a:p>
+        </p:txBody>
+      </p:sp>
+      <p:sp>
+        <p:nvSpPr>
+          <p:cNvPr id="10" name="TextBox 9"/>
+          <p:cNvSpPr txBox="1"/>
+          <p:nvPr/>
+        </p:nvSpPr>
+        <p:spPr>
+          <a:xfrm>
+            <a:off x="1143000" y="3276600"/>
+            <a:ext cx="4514850" cy="400050"/>
+          </a:xfrm>
+          <a:prstGeom prst="rect">
+            <a:avLst/>
+          </a:prstGeom>
+          <a:noFill/>
+        </p:spPr>
+        <p:txBody>
+          <a:bodyPr wrap="square" lIns="0" tIns="0" rIns="0" bIns="0" anchor="t">
+            <a:spAutoFit/>
+          </a:bodyPr>
+          <a:lstStyle/>
+          <a:p>
+            <a:pPr algn="l"/>
+            <a:r>
+              <a:rPr sz="1350" b="0" i="0" u="none">
+                <a:solidFill>
+                  <a:srgbClr val="64748B"/>
                 </a:solidFill>
                 <a:latin typeface="Inter"/>
               </a:rPr>
-              <a:t>Crowdsourced Signals</a:t>
-            </a:r>
-          </a:p>
-        </p:txBody>
-      </p:sp>
-      <p:sp>
-        <p:nvSpPr>
-          <p:cNvPr id="10" name="TextBox 9"/>
+              <a:t>Automated High/Med/Low risk assessment between modes.</a:t>
+            </a:r>
+          </a:p>
+        </p:txBody>
+      </p:sp>
+      <p:sp>
+        <p:nvSpPr>
+          <p:cNvPr id="11" name="TextBox 10"/>
           <p:cNvSpPr txBox="1"/>
           <p:nvPr/>
         </p:nvSpPr>
         <p:spPr>
           <a:xfrm>
-            <a:off x="5306615" y="5215681"/>
-            <a:ext cx="2178843" cy="228600"/>
+            <a:off x="6629400" y="2876550"/>
+            <a:ext cx="5562600" cy="285750"/>
           </a:xfrm>
           <a:prstGeom prst="rect">
             <a:avLst/>
@@ -5629,34 +5935,69 @@
           <a:noFill/>
         </p:spPr>
         <p:txBody>
-          <a:bodyPr wrap="none" lIns="0" rIns="0" tIns="0" bIns="0" anchor="t">
+          <a:bodyPr wrap="none" lIns="0" tIns="0" rIns="0" bIns="0" anchor="t">
             <a:spAutoFit/>
           </a:bodyPr>
           <a:lstStyle/>
           <a:p>
-            <a:pPr algn="ctr"/>
-            <a:r>
-              <a:rPr b="1" sz="1500" i="0" u="none">
-                <a:solidFill>
-                  <a:srgbClr val="475569"/>
+            <a:pPr algn="l"/>
+            <a:r>
+              <a:rPr sz="1800" b="1" i="0" u="none">
+                <a:solidFill>
+                  <a:srgbClr val="0F172A"/>
+                </a:solidFill>
+                <a:latin typeface="Outfit"/>
+              </a:rPr>
+              <a:t>Community Delay Updates</a:t>
+            </a:r>
+          </a:p>
+        </p:txBody>
+      </p:sp>
+      <p:sp>
+        <p:nvSpPr>
+          <p:cNvPr id="12" name="TextBox 11"/>
+          <p:cNvSpPr txBox="1"/>
+          <p:nvPr/>
+        </p:nvSpPr>
+        <p:spPr>
+          <a:xfrm>
+            <a:off x="6629400" y="3276600"/>
+            <a:ext cx="5524500" cy="200025"/>
+          </a:xfrm>
+          <a:prstGeom prst="rect">
+            <a:avLst/>
+          </a:prstGeom>
+          <a:noFill/>
+        </p:spPr>
+        <p:txBody>
+          <a:bodyPr wrap="none" lIns="0" tIns="0" rIns="0" bIns="0" anchor="t">
+            <a:spAutoFit/>
+          </a:bodyPr>
+          <a:lstStyle/>
+          <a:p>
+            <a:pPr algn="l"/>
+            <a:r>
+              <a:rPr sz="1350" b="0" i="0" u="none">
+                <a:solidFill>
+                  <a:srgbClr val="64748B"/>
                 </a:solidFill>
                 <a:latin typeface="Inter"/>
               </a:rPr>
-              <a:t>Dynamic Rerouting</a:t>
-            </a:r>
-          </a:p>
-        </p:txBody>
-      </p:sp>
-      <p:sp>
-        <p:nvSpPr>
-          <p:cNvPr id="11" name="TextBox 10"/>
+              <a:t>Crowdsourced real-time schedule adjustments.</a:t>
+            </a:r>
+          </a:p>
+        </p:txBody>
+      </p:sp>
+      <p:sp>
+        <p:nvSpPr>
+          <p:cNvPr id="13" name="TextBox 12"/>
           <p:cNvSpPr txBox="1"/>
           <p:nvPr/>
         </p:nvSpPr>
         <p:spPr>
           <a:xfrm>
-            <a:off x="8321278" y="5215681"/>
-            <a:ext cx="1845468" cy="228600"/>
+            <a:off x="1143000" y="4743450"/>
+            <a:ext cx="5800725" cy="285750"/>
           </a:xfrm>
           <a:prstGeom prst="rect">
             <a:avLst/>
@@ -5664,20 +6005,125 @@
           <a:noFill/>
         </p:spPr>
         <p:txBody>
-          <a:bodyPr wrap="none" lIns="0" rIns="0" tIns="0" bIns="0" anchor="t">
+          <a:bodyPr wrap="none" lIns="0" tIns="0" rIns="0" bIns="0" anchor="t">
             <a:spAutoFit/>
           </a:bodyPr>
           <a:lstStyle/>
           <a:p>
-            <a:pPr algn="ctr"/>
-            <a:r>
-              <a:rPr b="1" sz="1500" i="0" u="none">
-                <a:solidFill>
-                  <a:srgbClr val="475569"/>
+            <a:pPr algn="l"/>
+            <a:r>
+              <a:rPr sz="1800" b="1" i="0" u="none">
+                <a:solidFill>
+                  <a:srgbClr val="0F172A"/>
+                </a:solidFill>
+                <a:latin typeface="Outfit"/>
+              </a:rPr>
+              <a:t>Multimodal Alternatives</a:t>
+            </a:r>
+          </a:p>
+        </p:txBody>
+      </p:sp>
+      <p:sp>
+        <p:nvSpPr>
+          <p:cNvPr id="14" name="TextBox 13"/>
+          <p:cNvSpPr txBox="1"/>
+          <p:nvPr/>
+        </p:nvSpPr>
+        <p:spPr>
+          <a:xfrm>
+            <a:off x="1143000" y="5143500"/>
+            <a:ext cx="5524500" cy="209550"/>
+          </a:xfrm>
+          <a:prstGeom prst="rect">
+            <a:avLst/>
+          </a:prstGeom>
+          <a:noFill/>
+        </p:spPr>
+        <p:txBody>
+          <a:bodyPr wrap="none" lIns="0" tIns="0" rIns="0" bIns="0" anchor="t">
+            <a:spAutoFit/>
+          </a:bodyPr>
+          <a:lstStyle/>
+          <a:p>
+            <a:pPr algn="l"/>
+            <a:r>
+              <a:rPr sz="1350" b="0" i="0" u="none">
+                <a:solidFill>
+                  <a:srgbClr val="64748B"/>
                 </a:solidFill>
                 <a:latin typeface="Inter"/>
               </a:rPr>
-              <a:t>Proactive Alerts</a:t>
+              <a:t>Instant fallback generation (e.g., Train → Ferry).</a:t>
+            </a:r>
+          </a:p>
+        </p:txBody>
+      </p:sp>
+      <p:sp>
+        <p:nvSpPr>
+          <p:cNvPr id="15" name="TextBox 14"/>
+          <p:cNvSpPr txBox="1"/>
+          <p:nvPr/>
+        </p:nvSpPr>
+        <p:spPr>
+          <a:xfrm>
+            <a:off x="6667500" y="4743450"/>
+            <a:ext cx="5524500" cy="285750"/>
+          </a:xfrm>
+          <a:prstGeom prst="rect">
+            <a:avLst/>
+          </a:prstGeom>
+          <a:noFill/>
+        </p:spPr>
+        <p:txBody>
+          <a:bodyPr wrap="none" lIns="0" tIns="0" rIns="0" bIns="0" anchor="t">
+            <a:spAutoFit/>
+          </a:bodyPr>
+          <a:lstStyle/>
+          <a:p>
+            <a:pPr algn="l"/>
+            <a:r>
+              <a:rPr sz="1800" b="1" i="0" u="none">
+                <a:solidFill>
+                  <a:srgbClr val="0F172A"/>
+                </a:solidFill>
+                <a:latin typeface="Outfit"/>
+              </a:rPr>
+              <a:t>RailDetour Intelligence</a:t>
+            </a:r>
+          </a:p>
+        </p:txBody>
+      </p:sp>
+      <p:sp>
+        <p:nvSpPr>
+          <p:cNvPr id="16" name="TextBox 15"/>
+          <p:cNvSpPr txBox="1"/>
+          <p:nvPr/>
+        </p:nvSpPr>
+        <p:spPr>
+          <a:xfrm>
+            <a:off x="6667500" y="5143500"/>
+            <a:ext cx="5476875" cy="200025"/>
+          </a:xfrm>
+          <a:prstGeom prst="rect">
+            <a:avLst/>
+          </a:prstGeom>
+          <a:noFill/>
+        </p:spPr>
+        <p:txBody>
+          <a:bodyPr wrap="none" lIns="0" tIns="0" rIns="0" bIns="0" anchor="t">
+            <a:spAutoFit/>
+          </a:bodyPr>
+          <a:lstStyle/>
+          <a:p>
+            <a:pPr algn="l"/>
+            <a:r>
+              <a:rPr sz="1350" b="0" i="0" u="none">
+                <a:solidFill>
+                  <a:srgbClr val="64748B"/>
+                </a:solidFill>
+                <a:latin typeface="Inter"/>
+              </a:rPr>
+              <a:t>Level-crossing closure prediction and road rerouting.</a:t>
             </a:r>
           </a:p>
         </p:txBody>
@@ -5690,8 +6136,8 @@
 </p:sld>
 </file>
 
-<file path=ppt/slides/slide4.xml><?xml version="1.0" encoding="utf-8"?>
-<p:sld xmlns:a="http://schemas.openxmlformats.org/drawingml/2006/main" xmlns:p="http://schemas.openxmlformats.org/presentationml/2006/main" xmlns:r="http://schemas.openxmlformats.org/officeDocument/2006/relationships">
+<file path=ppt/slides/slide6.xml><?xml version="1.0" encoding="utf-8"?>
+<p:sld xmlns:a="http://schemas.openxmlformats.org/drawingml/2006/main" xmlns:r="http://schemas.openxmlformats.org/officeDocument/2006/relationships" xmlns:p="http://schemas.openxmlformats.org/presentationml/2006/main">
   <p:cSld>
     <p:bg>
       <p:bgPr>
@@ -5707,25 +6153,30 @@
         <p:cNvGrpSpPr/>
         <p:nvPr/>
       </p:nvGrpSpPr>
-      <p:grpSpPr/>
-      <p:sp>
-        <p:nvSpPr>
-          <p:cNvPr id="2" name="Rounded Rectangle 1"/>
+      <p:grpSpPr>
+        <a:xfrm>
+          <a:off x="0" y="0"/>
+          <a:ext cx="0" cy="0"/>
+          <a:chOff x="0" y="0"/>
+          <a:chExt cx="0" cy="0"/>
+        </a:xfrm>
+      </p:grpSpPr>
+      <p:sp>
+        <p:nvSpPr>
+          <p:cNvPr id="2" name="Rectangle 1"/>
           <p:cNvSpPr/>
           <p:nvPr/>
         </p:nvSpPr>
         <p:spPr>
           <a:xfrm>
-            <a:off x="762000" y="2286000"/>
-            <a:ext cx="3657600" cy="3810000"/>
-          </a:xfrm>
-          <a:prstGeom prst="roundRect">
-            <a:avLst>
-              <a:gd name="adj" fmla="val 6250"/>
-            </a:avLst>
+            <a:off x="1295400" y="2971800"/>
+            <a:ext cx="9601200" cy="38100"/>
+          </a:xfrm>
+          <a:prstGeom prst="rect">
+            <a:avLst/>
           </a:prstGeom>
           <a:solidFill>
-            <a:srgbClr val="F8FAFC"/>
+            <a:srgbClr val="E2E8F0"/>
           </a:solidFill>
           <a:ln>
             <a:noFill/>
@@ -5751,27 +6202,98 @@
           <a:lstStyle/>
           <a:p>
             <a:pPr algn="ctr"/>
-          </a:p>
-        </p:txBody>
-      </p:sp>
-      <p:sp>
-        <p:nvSpPr>
-          <p:cNvPr id="3" name="Rounded Rectangle 2"/>
+            <a:endParaRPr/>
+          </a:p>
+        </p:txBody>
+      </p:sp>
+      <p:sp>
+        <p:nvSpPr>
+          <p:cNvPr id="3" name="TextBox 2"/>
+          <p:cNvSpPr txBox="1"/>
+          <p:nvPr/>
+        </p:nvSpPr>
+        <p:spPr>
+          <a:xfrm>
+            <a:off x="762000" y="762000"/>
+            <a:ext cx="11430000" cy="190500"/>
+          </a:xfrm>
+          <a:prstGeom prst="rect">
+            <a:avLst/>
+          </a:prstGeom>
+          <a:noFill/>
+        </p:spPr>
+        <p:txBody>
+          <a:bodyPr wrap="none" lIns="0" tIns="0" rIns="0" bIns="0" anchor="t">
+            <a:spAutoFit/>
+          </a:bodyPr>
+          <a:lstStyle/>
+          <a:p>
+            <a:pPr algn="l"/>
+            <a:r>
+              <a:rPr sz="1200" b="1" i="0" u="none">
+                <a:solidFill>
+                  <a:srgbClr val="3B82F6"/>
+                </a:solidFill>
+                <a:latin typeface="Outfit"/>
+              </a:rPr>
+              <a:t>05 / HOW IT WORKS</a:t>
+            </a:r>
+          </a:p>
+        </p:txBody>
+      </p:sp>
+      <p:sp>
+        <p:nvSpPr>
+          <p:cNvPr id="4" name="TextBox 3"/>
+          <p:cNvSpPr txBox="1"/>
+          <p:nvPr/>
+        </p:nvSpPr>
+        <p:spPr>
+          <a:xfrm>
+            <a:off x="762000" y="1104900"/>
+            <a:ext cx="11430000" cy="571500"/>
+          </a:xfrm>
+          <a:prstGeom prst="rect">
+            <a:avLst/>
+          </a:prstGeom>
+          <a:noFill/>
+        </p:spPr>
+        <p:txBody>
+          <a:bodyPr wrap="none" lIns="0" tIns="0" rIns="0" bIns="0" anchor="t">
+            <a:spAutoFit/>
+          </a:bodyPr>
+          <a:lstStyle/>
+          <a:p>
+            <a:pPr algn="l"/>
+            <a:r>
+              <a:rPr sz="3600" b="1" i="0" u="none">
+                <a:solidFill>
+                  <a:srgbClr val="0F172A"/>
+                </a:solidFill>
+                <a:latin typeface="Outfit"/>
+              </a:rPr>
+              <a:t>Seamless risk mitigation.</a:t>
+            </a:r>
+          </a:p>
+        </p:txBody>
+      </p:sp>
+      <p:sp>
+        <p:nvSpPr>
+          <p:cNvPr id="5" name="Rounded Rectangle 4"/>
           <p:cNvSpPr/>
           <p:nvPr/>
         </p:nvSpPr>
         <p:spPr>
           <a:xfrm>
-            <a:off x="4724400" y="2286000"/>
-            <a:ext cx="3657600" cy="3810000"/>
+            <a:off x="1924050" y="2819400"/>
+            <a:ext cx="342900" cy="342900"/>
           </a:xfrm>
           <a:prstGeom prst="roundRect">
             <a:avLst>
-              <a:gd name="adj" fmla="val 6250"/>
+              <a:gd name="adj" fmla="val 50000"/>
             </a:avLst>
           </a:prstGeom>
           <a:solidFill>
-            <a:srgbClr val="F8FAFC"/>
+            <a:srgbClr val="3B82F6"/>
           </a:solidFill>
           <a:ln>
             <a:noFill/>
@@ -5797,91 +6319,161 @@
           <a:lstStyle/>
           <a:p>
             <a:pPr algn="ctr"/>
-          </a:p>
-        </p:txBody>
-      </p:sp>
-      <p:pic>
-        <p:nvPicPr>
-          <p:cNvPr id="4" name="Picture 3" descr="image.png"/>
-          <p:cNvPicPr>
-            <a:picLocks noChangeAspect="1"/>
-          </p:cNvPicPr>
-          <p:nvPr/>
-        </p:nvPicPr>
-        <p:blipFill>
-          <a:blip r:embed="rId2"/>
-          <a:stretch>
-            <a:fillRect/>
-          </a:stretch>
-        </p:blipFill>
-        <p:spPr>
-          <a:xfrm>
-            <a:off x="1219200" y="2743200"/>
-            <a:ext cx="381000" cy="381000"/>
-          </a:xfrm>
-          <a:prstGeom prst="rect">
-            <a:avLst/>
-          </a:prstGeom>
-        </p:spPr>
-      </p:pic>
-      <p:pic>
-        <p:nvPicPr>
-          <p:cNvPr id="5" name="Picture 4" descr="image.png"/>
-          <p:cNvPicPr>
-            <a:picLocks noChangeAspect="1"/>
-          </p:cNvPicPr>
-          <p:nvPr/>
-        </p:nvPicPr>
-        <p:blipFill>
-          <a:blip r:embed="rId3"/>
-          <a:stretch>
-            <a:fillRect/>
-          </a:stretch>
-        </p:blipFill>
-        <p:spPr>
-          <a:xfrm>
-            <a:off x="5181600" y="2743200"/>
-            <a:ext cx="476250" cy="381000"/>
-          </a:xfrm>
-          <a:prstGeom prst="rect">
-            <a:avLst/>
-          </a:prstGeom>
-        </p:spPr>
-      </p:pic>
-      <p:pic>
-        <p:nvPicPr>
-          <p:cNvPr id="6" name="Picture 5" descr="image.png"/>
-          <p:cNvPicPr>
-            <a:picLocks noChangeAspect="1"/>
-          </p:cNvPicPr>
-          <p:nvPr/>
-        </p:nvPicPr>
-        <p:blipFill>
-          <a:blip r:embed="rId4"/>
-          <a:stretch>
-            <a:fillRect/>
-          </a:stretch>
-        </p:blipFill>
-        <p:spPr>
-          <a:xfrm>
-            <a:off x="8686800" y="2286000"/>
-            <a:ext cx="2743200" cy="3810000"/>
-          </a:xfrm>
-          <a:prstGeom prst="rect">
-            <a:avLst/>
-          </a:prstGeom>
-        </p:spPr>
-      </p:pic>
-      <p:sp>
-        <p:nvSpPr>
-          <p:cNvPr id="7" name="TextBox 6"/>
+            <a:endParaRPr/>
+          </a:p>
+        </p:txBody>
+      </p:sp>
+      <p:sp>
+        <p:nvSpPr>
+          <p:cNvPr id="6" name="Rounded Rectangle 5"/>
+          <p:cNvSpPr/>
+          <p:nvPr/>
+        </p:nvSpPr>
+        <p:spPr>
+          <a:xfrm>
+            <a:off x="4591050" y="2819400"/>
+            <a:ext cx="342900" cy="342900"/>
+          </a:xfrm>
+          <a:prstGeom prst="roundRect">
+            <a:avLst>
+              <a:gd name="adj" fmla="val 50000"/>
+            </a:avLst>
+          </a:prstGeom>
+          <a:solidFill>
+            <a:srgbClr val="0F172A"/>
+          </a:solidFill>
+          <a:ln>
+            <a:noFill/>
+          </a:ln>
+          <a:effectLst/>
+        </p:spPr>
+        <p:style>
+          <a:lnRef idx="1">
+            <a:schemeClr val="accent1"/>
+          </a:lnRef>
+          <a:fillRef idx="3">
+            <a:schemeClr val="accent1"/>
+          </a:fillRef>
+          <a:effectRef idx="2">
+            <a:schemeClr val="accent1"/>
+          </a:effectRef>
+          <a:fontRef idx="minor">
+            <a:schemeClr val="lt1"/>
+          </a:fontRef>
+        </p:style>
+        <p:txBody>
+          <a:bodyPr rtlCol="0" anchor="ctr"/>
+          <a:lstStyle/>
+          <a:p>
+            <a:pPr algn="ctr"/>
+            <a:endParaRPr/>
+          </a:p>
+        </p:txBody>
+      </p:sp>
+      <p:sp>
+        <p:nvSpPr>
+          <p:cNvPr id="7" name="Rounded Rectangle 6"/>
+          <p:cNvSpPr/>
+          <p:nvPr/>
+        </p:nvSpPr>
+        <p:spPr>
+          <a:xfrm>
+            <a:off x="7258050" y="2819400"/>
+            <a:ext cx="342900" cy="342900"/>
+          </a:xfrm>
+          <a:prstGeom prst="roundRect">
+            <a:avLst>
+              <a:gd name="adj" fmla="val 50000"/>
+            </a:avLst>
+          </a:prstGeom>
+          <a:solidFill>
+            <a:srgbClr val="EF4444"/>
+          </a:solidFill>
+          <a:ln>
+            <a:noFill/>
+          </a:ln>
+          <a:effectLst/>
+        </p:spPr>
+        <p:style>
+          <a:lnRef idx="1">
+            <a:schemeClr val="accent1"/>
+          </a:lnRef>
+          <a:fillRef idx="3">
+            <a:schemeClr val="accent1"/>
+          </a:fillRef>
+          <a:effectRef idx="2">
+            <a:schemeClr val="accent1"/>
+          </a:effectRef>
+          <a:fontRef idx="minor">
+            <a:schemeClr val="lt1"/>
+          </a:fontRef>
+        </p:style>
+        <p:txBody>
+          <a:bodyPr rtlCol="0" anchor="ctr"/>
+          <a:lstStyle/>
+          <a:p>
+            <a:pPr algn="ctr"/>
+            <a:endParaRPr/>
+          </a:p>
+        </p:txBody>
+      </p:sp>
+      <p:sp>
+        <p:nvSpPr>
+          <p:cNvPr id="8" name="Rounded Rectangle 7"/>
+          <p:cNvSpPr/>
+          <p:nvPr/>
+        </p:nvSpPr>
+        <p:spPr>
+          <a:xfrm>
+            <a:off x="9925050" y="2819400"/>
+            <a:ext cx="342900" cy="342900"/>
+          </a:xfrm>
+          <a:prstGeom prst="roundRect">
+            <a:avLst>
+              <a:gd name="adj" fmla="val 50000"/>
+            </a:avLst>
+          </a:prstGeom>
+          <a:solidFill>
+            <a:srgbClr val="10B981"/>
+          </a:solidFill>
+          <a:ln>
+            <a:noFill/>
+          </a:ln>
+          <a:effectLst/>
+        </p:spPr>
+        <p:style>
+          <a:lnRef idx="1">
+            <a:schemeClr val="accent1"/>
+          </a:lnRef>
+          <a:fillRef idx="3">
+            <a:schemeClr val="accent1"/>
+          </a:fillRef>
+          <a:effectRef idx="2">
+            <a:schemeClr val="accent1"/>
+          </a:effectRef>
+          <a:fontRef idx="minor">
+            <a:schemeClr val="lt1"/>
+          </a:fontRef>
+        </p:style>
+        <p:txBody>
+          <a:bodyPr rtlCol="0" anchor="ctr"/>
+          <a:lstStyle/>
+          <a:p>
+            <a:pPr algn="ctr"/>
+            <a:endParaRPr/>
+          </a:p>
+        </p:txBody>
+      </p:sp>
+      <p:sp>
+        <p:nvSpPr>
+          <p:cNvPr id="9" name="TextBox 8"/>
           <p:cNvSpPr txBox="1"/>
           <p:nvPr/>
         </p:nvSpPr>
         <p:spPr>
           <a:xfrm>
-            <a:off x="762000" y="762000"/>
-            <a:ext cx="11430000" cy="190500"/>
+            <a:off x="1781175" y="2819400"/>
+            <a:ext cx="628650" cy="342900"/>
           </a:xfrm>
           <a:prstGeom prst="rect">
             <a:avLst/>
@@ -5889,34 +6481,69 @@
           <a:noFill/>
         </p:spPr>
         <p:txBody>
-          <a:bodyPr wrap="none" lIns="0" rIns="0" tIns="0" bIns="0" anchor="t">
+          <a:bodyPr wrap="square" lIns="0" tIns="0" rIns="0" bIns="0" anchor="ctr">
             <a:spAutoFit/>
           </a:bodyPr>
           <a:lstStyle/>
           <a:p>
-            <a:pPr algn="l"/>
-            <a:r>
-              <a:rPr b="1" sz="1200" i="0" u="none">
-                <a:solidFill>
-                  <a:srgbClr val="3B82F6"/>
+            <a:pPr algn="ctr"/>
+            <a:r>
+              <a:rPr sz="1200" b="1" i="0" u="none">
+                <a:solidFill>
+                  <a:srgbClr val="FFFFFF"/>
+                </a:solidFill>
+                <a:latin typeface="Inter"/>
+              </a:rPr>
+              <a:t>1</a:t>
+            </a:r>
+          </a:p>
+        </p:txBody>
+      </p:sp>
+      <p:sp>
+        <p:nvSpPr>
+          <p:cNvPr id="10" name="TextBox 9"/>
+          <p:cNvSpPr txBox="1"/>
+          <p:nvPr/>
+        </p:nvSpPr>
+        <p:spPr>
+          <a:xfrm>
+            <a:off x="345281" y="3390900"/>
+            <a:ext cx="3500437" cy="266700"/>
+          </a:xfrm>
+          <a:prstGeom prst="rect">
+            <a:avLst/>
+          </a:prstGeom>
+          <a:noFill/>
+        </p:spPr>
+        <p:txBody>
+          <a:bodyPr wrap="none" lIns="0" tIns="0" rIns="0" bIns="0" anchor="t">
+            <a:spAutoFit/>
+          </a:bodyPr>
+          <a:lstStyle/>
+          <a:p>
+            <a:pPr algn="ctr"/>
+            <a:r>
+              <a:rPr sz="1650" b="1" i="0" u="none">
+                <a:solidFill>
+                  <a:srgbClr val="0F172A"/>
                 </a:solidFill>
                 <a:latin typeface="Outfit"/>
               </a:rPr>
-              <a:t>03 / TARGET USERS &amp; USE CASE</a:t>
-            </a:r>
-          </a:p>
-        </p:txBody>
-      </p:sp>
-      <p:sp>
-        <p:nvSpPr>
-          <p:cNvPr id="8" name="TextBox 7"/>
+              <a:t>Plan Journey</a:t>
+            </a:r>
+          </a:p>
+        </p:txBody>
+      </p:sp>
+      <p:sp>
+        <p:nvSpPr>
+          <p:cNvPr id="11" name="TextBox 10"/>
           <p:cNvSpPr txBox="1"/>
           <p:nvPr/>
         </p:nvSpPr>
         <p:spPr>
           <a:xfrm>
-            <a:off x="762000" y="1104900"/>
-            <a:ext cx="11430000" cy="571500"/>
+            <a:off x="428625" y="3733800"/>
+            <a:ext cx="3333750" cy="381000"/>
           </a:xfrm>
           <a:prstGeom prst="rect">
             <a:avLst/>
@@ -5924,34 +6551,104 @@
           <a:noFill/>
         </p:spPr>
         <p:txBody>
-          <a:bodyPr wrap="none" lIns="0" rIns="0" tIns="0" bIns="0" anchor="t">
+          <a:bodyPr wrap="square" lIns="0" tIns="0" rIns="0" bIns="0" anchor="t">
             <a:spAutoFit/>
           </a:bodyPr>
           <a:lstStyle/>
           <a:p>
-            <a:pPr algn="l"/>
-            <a:r>
-              <a:rPr b="1" sz="3600" i="0" u="none">
+            <a:pPr algn="ctr"/>
+            <a:r>
+              <a:rPr sz="1200" b="0" i="0" u="none">
+                <a:solidFill>
+                  <a:srgbClr val="64748B"/>
+                </a:solidFill>
+                <a:latin typeface="Inter"/>
+              </a:rPr>
+              <a:t>Origin, destination, and departure time set.</a:t>
+            </a:r>
+          </a:p>
+        </p:txBody>
+      </p:sp>
+      <p:sp>
+        <p:nvSpPr>
+          <p:cNvPr id="12" name="TextBox 11"/>
+          <p:cNvSpPr txBox="1"/>
+          <p:nvPr/>
+        </p:nvSpPr>
+        <p:spPr>
+          <a:xfrm>
+            <a:off x="4448175" y="2819400"/>
+            <a:ext cx="628650" cy="342900"/>
+          </a:xfrm>
+          <a:prstGeom prst="rect">
+            <a:avLst/>
+          </a:prstGeom>
+          <a:noFill/>
+        </p:spPr>
+        <p:txBody>
+          <a:bodyPr wrap="square" lIns="0" tIns="0" rIns="0" bIns="0" anchor="ctr">
+            <a:spAutoFit/>
+          </a:bodyPr>
+          <a:lstStyle/>
+          <a:p>
+            <a:pPr algn="ctr"/>
+            <a:r>
+              <a:rPr sz="1200" b="1" i="0" u="none">
+                <a:solidFill>
+                  <a:srgbClr val="FFFFFF"/>
+                </a:solidFill>
+                <a:latin typeface="Inter"/>
+              </a:rPr>
+              <a:t>2</a:t>
+            </a:r>
+          </a:p>
+        </p:txBody>
+      </p:sp>
+      <p:sp>
+        <p:nvSpPr>
+          <p:cNvPr id="13" name="TextBox 12"/>
+          <p:cNvSpPr txBox="1"/>
+          <p:nvPr/>
+        </p:nvSpPr>
+        <p:spPr>
+          <a:xfrm>
+            <a:off x="3012281" y="3390900"/>
+            <a:ext cx="3500437" cy="266700"/>
+          </a:xfrm>
+          <a:prstGeom prst="rect">
+            <a:avLst/>
+          </a:prstGeom>
+          <a:noFill/>
+        </p:spPr>
+        <p:txBody>
+          <a:bodyPr wrap="none" lIns="0" tIns="0" rIns="0" bIns="0" anchor="t">
+            <a:spAutoFit/>
+          </a:bodyPr>
+          <a:lstStyle/>
+          <a:p>
+            <a:pPr algn="ctr"/>
+            <a:r>
+              <a:rPr sz="1650" b="1" i="0" u="none">
                 <a:solidFill>
                   <a:srgbClr val="0F172A"/>
                 </a:solidFill>
                 <a:latin typeface="Outfit"/>
               </a:rPr>
-              <a:t>Built for the complex Kerala commute.</a:t>
-            </a:r>
-          </a:p>
-        </p:txBody>
-      </p:sp>
-      <p:sp>
-        <p:nvSpPr>
-          <p:cNvPr id="9" name="TextBox 8"/>
+              <a:t>Sync Schedules</a:t>
+            </a:r>
+          </a:p>
+        </p:txBody>
+      </p:sp>
+      <p:sp>
+        <p:nvSpPr>
+          <p:cNvPr id="14" name="TextBox 13"/>
           <p:cNvSpPr txBox="1"/>
           <p:nvPr/>
         </p:nvSpPr>
         <p:spPr>
           <a:xfrm>
-            <a:off x="1219200" y="3352800"/>
-            <a:ext cx="3600450" cy="333375"/>
+            <a:off x="3095625" y="3733800"/>
+            <a:ext cx="3333750" cy="190500"/>
           </a:xfrm>
           <a:prstGeom prst="rect">
             <a:avLst/>
@@ -5959,34 +6656,104 @@
           <a:noFill/>
         </p:spPr>
         <p:txBody>
-          <a:bodyPr wrap="none" lIns="0" rIns="0" tIns="0" bIns="0" anchor="t">
+          <a:bodyPr wrap="none" lIns="0" tIns="0" rIns="0" bIns="0" anchor="t">
             <a:spAutoFit/>
           </a:bodyPr>
           <a:lstStyle/>
           <a:p>
-            <a:pPr algn="l"/>
-            <a:r>
-              <a:rPr b="1" sz="2100" i="0" u="none">
+            <a:pPr algn="ctr"/>
+            <a:r>
+              <a:rPr sz="1200" b="0" i="0" u="none">
+                <a:solidFill>
+                  <a:srgbClr val="64748B"/>
+                </a:solidFill>
+                <a:latin typeface="Inter"/>
+              </a:rPr>
+              <a:t>Cross-reference baseline timetables.</a:t>
+            </a:r>
+          </a:p>
+        </p:txBody>
+      </p:sp>
+      <p:sp>
+        <p:nvSpPr>
+          <p:cNvPr id="15" name="TextBox 14"/>
+          <p:cNvSpPr txBox="1"/>
+          <p:nvPr/>
+        </p:nvSpPr>
+        <p:spPr>
+          <a:xfrm>
+            <a:off x="7115175" y="2819400"/>
+            <a:ext cx="628650" cy="342900"/>
+          </a:xfrm>
+          <a:prstGeom prst="rect">
+            <a:avLst/>
+          </a:prstGeom>
+          <a:noFill/>
+        </p:spPr>
+        <p:txBody>
+          <a:bodyPr wrap="square" lIns="0" tIns="0" rIns="0" bIns="0" anchor="ctr">
+            <a:spAutoFit/>
+          </a:bodyPr>
+          <a:lstStyle/>
+          <a:p>
+            <a:pPr algn="ctr"/>
+            <a:r>
+              <a:rPr sz="1200" b="1" i="0" u="none">
+                <a:solidFill>
+                  <a:srgbClr val="FFFFFF"/>
+                </a:solidFill>
+                <a:latin typeface="Inter"/>
+              </a:rPr>
+              <a:t>3</a:t>
+            </a:r>
+          </a:p>
+        </p:txBody>
+      </p:sp>
+      <p:sp>
+        <p:nvSpPr>
+          <p:cNvPr id="16" name="TextBox 15"/>
+          <p:cNvSpPr txBox="1"/>
+          <p:nvPr/>
+        </p:nvSpPr>
+        <p:spPr>
+          <a:xfrm>
+            <a:off x="5679281" y="3390900"/>
+            <a:ext cx="3500437" cy="266700"/>
+          </a:xfrm>
+          <a:prstGeom prst="rect">
+            <a:avLst/>
+          </a:prstGeom>
+          <a:noFill/>
+        </p:spPr>
+        <p:txBody>
+          <a:bodyPr wrap="none" lIns="0" tIns="0" rIns="0" bIns="0" anchor="t">
+            <a:spAutoFit/>
+          </a:bodyPr>
+          <a:lstStyle/>
+          <a:p>
+            <a:pPr algn="ctr"/>
+            <a:r>
+              <a:rPr sz="1650" b="1" i="0" u="none">
                 <a:solidFill>
                   <a:srgbClr val="0F172A"/>
                 </a:solidFill>
                 <a:latin typeface="Outfit"/>
               </a:rPr>
-              <a:t>Daily Commuters</a:t>
-            </a:r>
-          </a:p>
-        </p:txBody>
-      </p:sp>
-      <p:sp>
-        <p:nvSpPr>
-          <p:cNvPr id="10" name="TextBox 9"/>
+              <a:t>Flag Risks</a:t>
+            </a:r>
+          </a:p>
+        </p:txBody>
+      </p:sp>
+      <p:sp>
+        <p:nvSpPr>
+          <p:cNvPr id="17" name="TextBox 16"/>
           <p:cNvSpPr txBox="1"/>
           <p:nvPr/>
         </p:nvSpPr>
         <p:spPr>
           <a:xfrm>
-            <a:off x="1219200" y="3838575"/>
-            <a:ext cx="2838450" cy="771525"/>
+            <a:off x="5762625" y="3733800"/>
+            <a:ext cx="3333750" cy="381000"/>
           </a:xfrm>
           <a:prstGeom prst="rect">
             <a:avLst/>
@@ -5994,38 +6761,34 @@
           <a:noFill/>
         </p:spPr>
         <p:txBody>
-          <a:bodyPr wrap="square" lIns="0" rIns="0" tIns="0" bIns="0" anchor="t">
+          <a:bodyPr wrap="square" lIns="0" tIns="0" rIns="0" bIns="0" anchor="t">
             <a:spAutoFit/>
           </a:bodyPr>
           <a:lstStyle/>
           <a:p>
-            <a:pPr algn="l">
-              <a:lnSpc>
-                <a:spcPts val="2025"/>
-              </a:lnSpc>
-            </a:pPr>
-            <a:r>
-              <a:rPr b="0" sz="1350" i="0" u="none">
+            <a:pPr algn="ctr"/>
+            <a:r>
+              <a:rPr sz="1200" b="0" i="0" u="none">
                 <a:solidFill>
                   <a:srgbClr val="64748B"/>
                 </a:solidFill>
                 <a:latin typeface="Inter"/>
               </a:rPr>
-              <a:t>Navigating tight transfers between KSRTC buses and local passenger ferries.</a:t>
-            </a:r>
-          </a:p>
-        </p:txBody>
-      </p:sp>
-      <p:sp>
-        <p:nvSpPr>
-          <p:cNvPr id="11" name="TextBox 10"/>
+              <a:t>Detect overlapping ETAs via community data.</a:t>
+            </a:r>
+          </a:p>
+        </p:txBody>
+      </p:sp>
+      <p:sp>
+        <p:nvSpPr>
+          <p:cNvPr id="18" name="TextBox 17"/>
           <p:cNvSpPr txBox="1"/>
           <p:nvPr/>
         </p:nvSpPr>
         <p:spPr>
           <a:xfrm>
-            <a:off x="5181600" y="3352800"/>
-            <a:ext cx="3600450" cy="333375"/>
+            <a:off x="9782175" y="2819400"/>
+            <a:ext cx="628650" cy="342900"/>
           </a:xfrm>
           <a:prstGeom prst="rect">
             <a:avLst/>
@@ -6033,34 +6796,69 @@
           <a:noFill/>
         </p:spPr>
         <p:txBody>
-          <a:bodyPr wrap="none" lIns="0" rIns="0" tIns="0" bIns="0" anchor="t">
+          <a:bodyPr wrap="square" lIns="0" tIns="0" rIns="0" bIns="0" anchor="ctr">
             <a:spAutoFit/>
           </a:bodyPr>
           <a:lstStyle/>
           <a:p>
-            <a:pPr algn="l"/>
-            <a:r>
-              <a:rPr b="1" sz="2100" i="0" u="none">
+            <a:pPr algn="ctr"/>
+            <a:r>
+              <a:rPr sz="1200" b="1" i="0" u="none">
+                <a:solidFill>
+                  <a:srgbClr val="F8FAFC"/>
+                </a:solidFill>
+                <a:latin typeface="Inter"/>
+              </a:rPr>
+              <a:t>4</a:t>
+            </a:r>
+          </a:p>
+        </p:txBody>
+      </p:sp>
+      <p:sp>
+        <p:nvSpPr>
+          <p:cNvPr id="19" name="TextBox 18"/>
+          <p:cNvSpPr txBox="1"/>
+          <p:nvPr/>
+        </p:nvSpPr>
+        <p:spPr>
+          <a:xfrm>
+            <a:off x="8346281" y="3390900"/>
+            <a:ext cx="3500437" cy="266700"/>
+          </a:xfrm>
+          <a:prstGeom prst="rect">
+            <a:avLst/>
+          </a:prstGeom>
+          <a:noFill/>
+        </p:spPr>
+        <p:txBody>
+          <a:bodyPr wrap="none" lIns="0" tIns="0" rIns="0" bIns="0" anchor="t">
+            <a:spAutoFit/>
+          </a:bodyPr>
+          <a:lstStyle/>
+          <a:p>
+            <a:pPr algn="ctr"/>
+            <a:r>
+              <a:rPr sz="1650" b="1" i="0" u="none">
                 <a:solidFill>
                   <a:srgbClr val="0F172A"/>
                 </a:solidFill>
                 <a:latin typeface="Outfit"/>
               </a:rPr>
-              <a:t>Students</a:t>
-            </a:r>
-          </a:p>
-        </p:txBody>
-      </p:sp>
-      <p:sp>
-        <p:nvSpPr>
-          <p:cNvPr id="12" name="TextBox 11"/>
+              <a:t>Suggest Fallback</a:t>
+            </a:r>
+          </a:p>
+        </p:txBody>
+      </p:sp>
+      <p:sp>
+        <p:nvSpPr>
+          <p:cNvPr id="20" name="TextBox 19"/>
           <p:cNvSpPr txBox="1"/>
           <p:nvPr/>
         </p:nvSpPr>
         <p:spPr>
           <a:xfrm>
-            <a:off x="5181600" y="3838575"/>
-            <a:ext cx="2838450" cy="771525"/>
+            <a:off x="8429625" y="3733800"/>
+            <a:ext cx="3333750" cy="381000"/>
           </a:xfrm>
           <a:prstGeom prst="rect">
             <a:avLst/>
@@ -6068,24 +6866,20 @@
           <a:noFill/>
         </p:spPr>
         <p:txBody>
-          <a:bodyPr wrap="square" lIns="0" rIns="0" tIns="0" bIns="0" anchor="t">
+          <a:bodyPr wrap="square" lIns="0" tIns="0" rIns="0" bIns="0" anchor="t">
             <a:spAutoFit/>
           </a:bodyPr>
           <a:lstStyle/>
           <a:p>
-            <a:pPr algn="l">
-              <a:lnSpc>
-                <a:spcPts val="2025"/>
-              </a:lnSpc>
-            </a:pPr>
-            <a:r>
-              <a:rPr b="0" sz="1350" i="0" u="none">
+            <a:pPr algn="ctr"/>
+            <a:r>
+              <a:rPr sz="1200" b="0" i="0" u="none">
                 <a:solidFill>
                   <a:srgbClr val="64748B"/>
                 </a:solidFill>
                 <a:latin typeface="Inter"/>
               </a:rPr>
-              <a:t>Relying on last-mile feeder autos to reach off-grid campuses safely.</a:t>
+              <a:t>Provide immediate alternative multimodal path.</a:t>
             </a:r>
           </a:p>
         </p:txBody>
@@ -6098,8 +6892,393 @@
 </p:sld>
 </file>
 
-<file path=ppt/slides/slide5.xml><?xml version="1.0" encoding="utf-8"?>
-<p:sld xmlns:a="http://schemas.openxmlformats.org/drawingml/2006/main" xmlns:p="http://schemas.openxmlformats.org/presentationml/2006/main" xmlns:r="http://schemas.openxmlformats.org/officeDocument/2006/relationships">
+<file path=ppt/slides/slide7.xml><?xml version="1.0" encoding="utf-8"?>
+<p:sld xmlns:a="http://schemas.openxmlformats.org/drawingml/2006/main" xmlns:r="http://schemas.openxmlformats.org/officeDocument/2006/relationships" xmlns:p="http://schemas.openxmlformats.org/presentationml/2006/main">
+  <p:cSld>
+    <p:bg>
+      <p:bgPr>
+        <a:solidFill>
+          <a:srgbClr val="0F172A"/>
+        </a:solidFill>
+        <a:effectLst/>
+      </p:bgPr>
+    </p:bg>
+    <p:spTree>
+      <p:nvGrpSpPr>
+        <p:cNvPr id="1" name=""/>
+        <p:cNvGrpSpPr/>
+        <p:nvPr/>
+      </p:nvGrpSpPr>
+      <p:grpSpPr>
+        <a:xfrm>
+          <a:off x="0" y="0"/>
+          <a:ext cx="0" cy="0"/>
+          <a:chOff x="0" y="0"/>
+          <a:chExt cx="0" cy="0"/>
+        </a:xfrm>
+      </p:grpSpPr>
+      <p:pic>
+        <p:nvPicPr>
+          <p:cNvPr id="2" name="Picture 1" descr="image.png"/>
+          <p:cNvPicPr>
+            <a:picLocks noChangeAspect="1"/>
+          </p:cNvPicPr>
+          <p:nvPr/>
+        </p:nvPicPr>
+        <p:blipFill>
+          <a:blip r:embed="rId2"/>
+          <a:stretch>
+            <a:fillRect/>
+          </a:stretch>
+        </p:blipFill>
+        <p:spPr>
+          <a:xfrm>
+            <a:off x="762000" y="3262312"/>
+            <a:ext cx="533400" cy="533400"/>
+          </a:xfrm>
+          <a:prstGeom prst="rect">
+            <a:avLst/>
+          </a:prstGeom>
+        </p:spPr>
+      </p:pic>
+      <p:pic>
+        <p:nvPicPr>
+          <p:cNvPr id="3" name="Picture 2" descr="image.png"/>
+          <p:cNvPicPr>
+            <a:picLocks noChangeAspect="1"/>
+          </p:cNvPicPr>
+          <p:nvPr/>
+        </p:nvPicPr>
+        <p:blipFill>
+          <a:blip r:embed="rId3"/>
+          <a:stretch>
+            <a:fillRect/>
+          </a:stretch>
+        </p:blipFill>
+        <p:spPr>
+          <a:xfrm>
+            <a:off x="4445049" y="3262312"/>
+            <a:ext cx="666750" cy="533400"/>
+          </a:xfrm>
+          <a:prstGeom prst="rect">
+            <a:avLst/>
+          </a:prstGeom>
+        </p:spPr>
+      </p:pic>
+      <p:pic>
+        <p:nvPicPr>
+          <p:cNvPr id="4" name="Picture 3" descr="image.png"/>
+          <p:cNvPicPr>
+            <a:picLocks noChangeAspect="1"/>
+          </p:cNvPicPr>
+          <p:nvPr/>
+        </p:nvPicPr>
+        <p:blipFill>
+          <a:blip r:embed="rId4"/>
+          <a:stretch>
+            <a:fillRect/>
+          </a:stretch>
+        </p:blipFill>
+        <p:spPr>
+          <a:xfrm>
+            <a:off x="8128099" y="3262312"/>
+            <a:ext cx="533400" cy="533400"/>
+          </a:xfrm>
+          <a:prstGeom prst="rect">
+            <a:avLst/>
+          </a:prstGeom>
+        </p:spPr>
+      </p:pic>
+      <p:sp>
+        <p:nvSpPr>
+          <p:cNvPr id="5" name="TextBox 4"/>
+          <p:cNvSpPr txBox="1"/>
+          <p:nvPr/>
+        </p:nvSpPr>
+        <p:spPr>
+          <a:xfrm>
+            <a:off x="762000" y="1738312"/>
+            <a:ext cx="11430000" cy="190500"/>
+          </a:xfrm>
+          <a:prstGeom prst="rect">
+            <a:avLst/>
+          </a:prstGeom>
+          <a:noFill/>
+        </p:spPr>
+        <p:txBody>
+          <a:bodyPr wrap="none" lIns="0" tIns="0" rIns="0" bIns="0" anchor="t">
+            <a:spAutoFit/>
+          </a:bodyPr>
+          <a:lstStyle/>
+          <a:p>
+            <a:pPr algn="l"/>
+            <a:r>
+              <a:rPr sz="1200" b="1" i="0" u="none">
+                <a:solidFill>
+                  <a:srgbClr val="3B82F6"/>
+                </a:solidFill>
+                <a:latin typeface="Outfit"/>
+              </a:rPr>
+              <a:t>06 / TECHNOLOGY &amp; TOOLS</a:t>
+            </a:r>
+          </a:p>
+        </p:txBody>
+      </p:sp>
+      <p:sp>
+        <p:nvSpPr>
+          <p:cNvPr id="6" name="TextBox 5"/>
+          <p:cNvSpPr txBox="1"/>
+          <p:nvPr/>
+        </p:nvSpPr>
+        <p:spPr>
+          <a:xfrm>
+            <a:off x="762000" y="2081212"/>
+            <a:ext cx="11430000" cy="571500"/>
+          </a:xfrm>
+          <a:prstGeom prst="rect">
+            <a:avLst/>
+          </a:prstGeom>
+          <a:noFill/>
+        </p:spPr>
+        <p:txBody>
+          <a:bodyPr wrap="none" lIns="0" tIns="0" rIns="0" bIns="0" anchor="t">
+            <a:spAutoFit/>
+          </a:bodyPr>
+          <a:lstStyle/>
+          <a:p>
+            <a:pPr algn="l"/>
+            <a:r>
+              <a:rPr sz="3600" b="1" i="0" u="none">
+                <a:solidFill>
+                  <a:srgbClr val="F8FAFC"/>
+                </a:solidFill>
+                <a:latin typeface="Outfit"/>
+              </a:rPr>
+              <a:t>Modern, stateless prototype architecture.</a:t>
+            </a:r>
+          </a:p>
+        </p:txBody>
+      </p:sp>
+      <p:sp>
+        <p:nvSpPr>
+          <p:cNvPr id="7" name="TextBox 6"/>
+          <p:cNvSpPr txBox="1"/>
+          <p:nvPr/>
+        </p:nvSpPr>
+        <p:spPr>
+          <a:xfrm>
+            <a:off x="762000" y="4024312"/>
+            <a:ext cx="4333940" cy="381000"/>
+          </a:xfrm>
+          <a:prstGeom prst="rect">
+            <a:avLst/>
+          </a:prstGeom>
+          <a:noFill/>
+        </p:spPr>
+        <p:txBody>
+          <a:bodyPr wrap="none" lIns="0" tIns="0" rIns="0" bIns="0" anchor="t">
+            <a:spAutoFit/>
+          </a:bodyPr>
+          <a:lstStyle/>
+          <a:p>
+            <a:pPr algn="l"/>
+            <a:r>
+              <a:rPr sz="2400" b="1" i="0" u="none">
+                <a:solidFill>
+                  <a:srgbClr val="F8FAFC"/>
+                </a:solidFill>
+                <a:latin typeface="Outfit"/>
+              </a:rPr>
+              <a:t>React Frontend</a:t>
+            </a:r>
+          </a:p>
+        </p:txBody>
+      </p:sp>
+      <p:sp>
+        <p:nvSpPr>
+          <p:cNvPr id="8" name="TextBox 7"/>
+          <p:cNvSpPr txBox="1"/>
+          <p:nvPr/>
+        </p:nvSpPr>
+        <p:spPr>
+          <a:xfrm>
+            <a:off x="762000" y="4519612"/>
+            <a:ext cx="3397299" cy="600075"/>
+          </a:xfrm>
+          <a:prstGeom prst="rect">
+            <a:avLst/>
+          </a:prstGeom>
+          <a:noFill/>
+        </p:spPr>
+        <p:txBody>
+          <a:bodyPr wrap="square" lIns="0" tIns="0" rIns="0" bIns="0" anchor="t">
+            <a:spAutoFit/>
+          </a:bodyPr>
+          <a:lstStyle/>
+          <a:p>
+            <a:pPr algn="l"/>
+            <a:r>
+              <a:rPr sz="1350" b="0" i="0" u="none">
+                <a:solidFill>
+                  <a:srgbClr val="94A3B8"/>
+                </a:solidFill>
+                <a:latin typeface="Inter"/>
+              </a:rPr>
+              <a:t>Responsive dashboard. LocalStorage state management for hackathon demo limits.</a:t>
+            </a:r>
+          </a:p>
+        </p:txBody>
+      </p:sp>
+      <p:sp>
+        <p:nvSpPr>
+          <p:cNvPr id="9" name="TextBox 8"/>
+          <p:cNvSpPr txBox="1"/>
+          <p:nvPr/>
+        </p:nvSpPr>
+        <p:spPr>
+          <a:xfrm>
+            <a:off x="4445049" y="4024312"/>
+            <a:ext cx="4333940" cy="381000"/>
+          </a:xfrm>
+          <a:prstGeom prst="rect">
+            <a:avLst/>
+          </a:prstGeom>
+          <a:noFill/>
+        </p:spPr>
+        <p:txBody>
+          <a:bodyPr wrap="none" lIns="0" tIns="0" rIns="0" bIns="0" anchor="t">
+            <a:spAutoFit/>
+          </a:bodyPr>
+          <a:lstStyle/>
+          <a:p>
+            <a:pPr algn="l"/>
+            <a:r>
+              <a:rPr sz="2400" b="1" i="0" u="none">
+                <a:solidFill>
+                  <a:srgbClr val="F8FAFC"/>
+                </a:solidFill>
+                <a:latin typeface="Outfit"/>
+              </a:rPr>
+              <a:t>TypeScript</a:t>
+            </a:r>
+          </a:p>
+        </p:txBody>
+      </p:sp>
+      <p:sp>
+        <p:nvSpPr>
+          <p:cNvPr id="10" name="TextBox 9"/>
+          <p:cNvSpPr txBox="1"/>
+          <p:nvPr/>
+        </p:nvSpPr>
+        <p:spPr>
+          <a:xfrm>
+            <a:off x="4445049" y="4519612"/>
+            <a:ext cx="3397299" cy="400050"/>
+          </a:xfrm>
+          <a:prstGeom prst="rect">
+            <a:avLst/>
+          </a:prstGeom>
+          <a:noFill/>
+        </p:spPr>
+        <p:txBody>
+          <a:bodyPr wrap="square" lIns="0" tIns="0" rIns="0" bIns="0" anchor="t">
+            <a:spAutoFit/>
+          </a:bodyPr>
+          <a:lstStyle/>
+          <a:p>
+            <a:pPr algn="l"/>
+            <a:r>
+              <a:rPr sz="1350" b="0" i="0" u="none">
+                <a:solidFill>
+                  <a:srgbClr val="94A3B8"/>
+                </a:solidFill>
+                <a:latin typeface="Inter"/>
+              </a:rPr>
+              <a:t>Strict type safety for complex multimodal route data interfaces.</a:t>
+            </a:r>
+          </a:p>
+        </p:txBody>
+      </p:sp>
+      <p:sp>
+        <p:nvSpPr>
+          <p:cNvPr id="11" name="TextBox 10"/>
+          <p:cNvSpPr txBox="1"/>
+          <p:nvPr/>
+        </p:nvSpPr>
+        <p:spPr>
+          <a:xfrm>
+            <a:off x="8128099" y="4024312"/>
+            <a:ext cx="4063900" cy="381000"/>
+          </a:xfrm>
+          <a:prstGeom prst="rect">
+            <a:avLst/>
+          </a:prstGeom>
+          <a:noFill/>
+        </p:spPr>
+        <p:txBody>
+          <a:bodyPr wrap="none" lIns="0" tIns="0" rIns="0" bIns="0" anchor="t">
+            <a:spAutoFit/>
+          </a:bodyPr>
+          <a:lstStyle/>
+          <a:p>
+            <a:pPr algn="l"/>
+            <a:r>
+              <a:rPr sz="2400" b="1" i="0" u="none">
+                <a:solidFill>
+                  <a:srgbClr val="F8FAFC"/>
+                </a:solidFill>
+                <a:latin typeface="Outfit"/>
+              </a:rPr>
+              <a:t>Express Node</a:t>
+            </a:r>
+          </a:p>
+        </p:txBody>
+      </p:sp>
+      <p:sp>
+        <p:nvSpPr>
+          <p:cNvPr id="12" name="TextBox 11"/>
+          <p:cNvSpPr txBox="1"/>
+          <p:nvPr/>
+        </p:nvSpPr>
+        <p:spPr>
+          <a:xfrm>
+            <a:off x="8128099" y="4519612"/>
+            <a:ext cx="3397299" cy="400050"/>
+          </a:xfrm>
+          <a:prstGeom prst="rect">
+            <a:avLst/>
+          </a:prstGeom>
+          <a:noFill/>
+        </p:spPr>
+        <p:txBody>
+          <a:bodyPr wrap="square" lIns="0" tIns="0" rIns="0" bIns="0" anchor="t">
+            <a:spAutoFit/>
+          </a:bodyPr>
+          <a:lstStyle/>
+          <a:p>
+            <a:pPr algn="l"/>
+            <a:r>
+              <a:rPr sz="1350" b="0" i="0" u="none">
+                <a:solidFill>
+                  <a:srgbClr val="94A3B8"/>
+                </a:solidFill>
+                <a:latin typeface="Inter"/>
+              </a:rPr>
+              <a:t>Lightweight API endpoints processing demo transit schedules and risk logic.</a:t>
+            </a:r>
+          </a:p>
+        </p:txBody>
+      </p:sp>
+    </p:spTree>
+  </p:cSld>
+  <p:clrMapOvr>
+    <a:masterClrMapping/>
+  </p:clrMapOvr>
+</p:sld>
+</file>
+
+<file path=ppt/slides/slide8.xml><?xml version="1.0" encoding="utf-8"?>
+<p:sld xmlns:a="http://schemas.openxmlformats.org/drawingml/2006/main" xmlns:r="http://schemas.openxmlformats.org/officeDocument/2006/relationships" xmlns:p="http://schemas.openxmlformats.org/presentationml/2006/main">
   <p:cSld>
     <p:bg>
       <p:bgPr>
@@ -6115,7 +7294,14 @@
         <p:cNvGrpSpPr/>
         <p:nvPr/>
       </p:nvGrpSpPr>
-      <p:grpSpPr/>
+      <p:grpSpPr>
+        <a:xfrm>
+          <a:off x="0" y="0"/>
+          <a:ext cx="0" cy="0"/>
+          <a:chOff x="0" y="0"/>
+          <a:chExt cx="0" cy="0"/>
+        </a:xfrm>
+      </p:grpSpPr>
       <p:sp>
         <p:nvSpPr>
           <p:cNvPr id="2" name="Rounded Rectangle 1"/>
@@ -6124,16 +7310,63 @@
         </p:nvSpPr>
         <p:spPr>
           <a:xfrm>
-            <a:off x="762000" y="2495550"/>
-            <a:ext cx="5181600" cy="1562100"/>
+            <a:off x="609600" y="800100"/>
+            <a:ext cx="10972800" cy="5600700"/>
           </a:xfrm>
           <a:prstGeom prst="roundRect">
             <a:avLst>
-              <a:gd name="adj" fmla="val 9756"/>
+              <a:gd name="adj" fmla="val 2721"/>
             </a:avLst>
           </a:prstGeom>
           <a:solidFill>
-            <a:srgbClr val="FFFFFF"/>
+            <a:srgbClr val="0F172A"/>
+          </a:solidFill>
+          <a:ln w="9525">
+            <a:solidFill>
+              <a:srgbClr val="334155"/>
+            </a:solidFill>
+          </a:ln>
+          <a:effectLst/>
+        </p:spPr>
+        <p:style>
+          <a:lnRef idx="1">
+            <a:schemeClr val="accent1"/>
+          </a:lnRef>
+          <a:fillRef idx="3">
+            <a:schemeClr val="accent1"/>
+          </a:fillRef>
+          <a:effectRef idx="2">
+            <a:schemeClr val="accent1"/>
+          </a:effectRef>
+          <a:fontRef idx="minor">
+            <a:schemeClr val="lt1"/>
+          </a:fontRef>
+        </p:style>
+        <p:txBody>
+          <a:bodyPr rtlCol="0" anchor="ctr"/>
+          <a:lstStyle/>
+          <a:p>
+            <a:pPr algn="ctr"/>
+            <a:endParaRPr/>
+          </a:p>
+        </p:txBody>
+      </p:sp>
+      <p:sp>
+        <p:nvSpPr>
+          <p:cNvPr id="3" name="Rectangle 2"/>
+          <p:cNvSpPr/>
+          <p:nvPr/>
+        </p:nvSpPr>
+        <p:spPr>
+          <a:xfrm>
+            <a:off x="619125" y="809625"/>
+            <a:ext cx="3429000" cy="5581650"/>
+          </a:xfrm>
+          <a:prstGeom prst="rect">
+            <a:avLst/>
+          </a:prstGeom>
+          <a:solidFill>
+            <a:srgbClr val="1E293B"/>
           </a:solidFill>
           <a:ln>
             <a:noFill/>
@@ -6159,27 +7392,26 @@
           <a:lstStyle/>
           <a:p>
             <a:pPr algn="ctr"/>
-          </a:p>
-        </p:txBody>
-      </p:sp>
-      <p:sp>
-        <p:nvSpPr>
-          <p:cNvPr id="3" name="Rounded Rectangle 2"/>
+            <a:endParaRPr/>
+          </a:p>
+        </p:txBody>
+      </p:sp>
+      <p:sp>
+        <p:nvSpPr>
+          <p:cNvPr id="4" name="Rectangle 3"/>
           <p:cNvSpPr/>
           <p:nvPr/>
         </p:nvSpPr>
         <p:spPr>
           <a:xfrm>
-            <a:off x="6248400" y="2495550"/>
-            <a:ext cx="5181600" cy="1562100"/>
-          </a:xfrm>
-          <a:prstGeom prst="roundRect">
-            <a:avLst>
-              <a:gd name="adj" fmla="val 9756"/>
-            </a:avLst>
+            <a:off x="4048125" y="809625"/>
+            <a:ext cx="7524750" cy="5581650"/>
+          </a:xfrm>
+          <a:prstGeom prst="rect">
+            <a:avLst/>
           </a:prstGeom>
           <a:solidFill>
-            <a:srgbClr val="FFFFFF"/>
+            <a:srgbClr val="0F172A"/>
           </a:solidFill>
           <a:ln>
             <a:noFill/>
@@ -6205,27 +7437,28 @@
           <a:lstStyle/>
           <a:p>
             <a:pPr algn="ctr"/>
-          </a:p>
-        </p:txBody>
-      </p:sp>
-      <p:sp>
-        <p:nvSpPr>
-          <p:cNvPr id="4" name="Rounded Rectangle 3"/>
+            <a:endParaRPr/>
+          </a:p>
+        </p:txBody>
+      </p:sp>
+      <p:sp>
+        <p:nvSpPr>
+          <p:cNvPr id="5" name="Rounded Rectangle 4"/>
           <p:cNvSpPr/>
           <p:nvPr/>
         </p:nvSpPr>
         <p:spPr>
           <a:xfrm>
-            <a:off x="762000" y="4362450"/>
-            <a:ext cx="5181600" cy="1371600"/>
+            <a:off x="923925" y="5381625"/>
+            <a:ext cx="2819400" cy="704850"/>
           </a:xfrm>
           <a:prstGeom prst="roundRect">
             <a:avLst>
-              <a:gd name="adj" fmla="val 11111"/>
+              <a:gd name="adj" fmla="val 16216"/>
             </a:avLst>
           </a:prstGeom>
           <a:solidFill>
-            <a:srgbClr val="FFFFFF"/>
+            <a:srgbClr val="334155"/>
           </a:solidFill>
           <a:ln>
             <a:noFill/>
@@ -6251,30 +7484,33 @@
           <a:lstStyle/>
           <a:p>
             <a:pPr algn="ctr"/>
-          </a:p>
-        </p:txBody>
-      </p:sp>
-      <p:sp>
-        <p:nvSpPr>
-          <p:cNvPr id="5" name="Rounded Rectangle 4"/>
+            <a:endParaRPr/>
+          </a:p>
+        </p:txBody>
+      </p:sp>
+      <p:sp>
+        <p:nvSpPr>
+          <p:cNvPr id="6" name="Rounded Rectangle 5"/>
           <p:cNvSpPr/>
           <p:nvPr/>
         </p:nvSpPr>
         <p:spPr>
           <a:xfrm>
-            <a:off x="6248400" y="4362450"/>
-            <a:ext cx="5181600" cy="1371600"/>
+            <a:off x="4505325" y="1738312"/>
+            <a:ext cx="6610350" cy="1581150"/>
           </a:xfrm>
           <a:prstGeom prst="roundRect">
             <a:avLst>
-              <a:gd name="adj" fmla="val 11111"/>
+              <a:gd name="adj" fmla="val 9638"/>
             </a:avLst>
           </a:prstGeom>
           <a:solidFill>
-            <a:srgbClr val="FFFFFF"/>
+            <a:srgbClr val="251C2D"/>
           </a:solidFill>
-          <a:ln>
-            <a:noFill/>
+          <a:ln w="9525">
+            <a:solidFill>
+              <a:srgbClr val="EF4444"/>
+            </a:solidFill>
           </a:ln>
           <a:effectLst/>
         </p:spPr>
@@ -6297,22 +7533,74 @@
           <a:lstStyle/>
           <a:p>
             <a:pPr algn="ctr"/>
-          </a:p>
-        </p:txBody>
-      </p:sp>
-      <p:sp>
-        <p:nvSpPr>
-          <p:cNvPr id="6" name="Rectangle 5"/>
+            <a:endParaRPr/>
+          </a:p>
+        </p:txBody>
+      </p:sp>
+      <p:sp>
+        <p:nvSpPr>
+          <p:cNvPr id="7" name="Rounded Rectangle 6"/>
           <p:cNvSpPr/>
           <p:nvPr/>
         </p:nvSpPr>
         <p:spPr>
           <a:xfrm>
-            <a:off x="6248400" y="4362450"/>
-            <a:ext cx="38100" cy="1371600"/>
-          </a:xfrm>
-          <a:prstGeom prst="rect">
-            <a:avLst/>
+            <a:off x="4505325" y="3624262"/>
+            <a:ext cx="6610350" cy="1838325"/>
+          </a:xfrm>
+          <a:prstGeom prst="roundRect">
+            <a:avLst>
+              <a:gd name="adj" fmla="val 8290"/>
+            </a:avLst>
+          </a:prstGeom>
+          <a:solidFill>
+            <a:srgbClr val="1E293B"/>
+          </a:solidFill>
+          <a:ln w="9525">
+            <a:solidFill>
+              <a:srgbClr val="3B82F6"/>
+            </a:solidFill>
+          </a:ln>
+          <a:effectLst/>
+        </p:spPr>
+        <p:style>
+          <a:lnRef idx="1">
+            <a:schemeClr val="accent1"/>
+          </a:lnRef>
+          <a:fillRef idx="3">
+            <a:schemeClr val="accent1"/>
+          </a:fillRef>
+          <a:effectRef idx="2">
+            <a:schemeClr val="accent1"/>
+          </a:effectRef>
+          <a:fontRef idx="minor">
+            <a:schemeClr val="lt1"/>
+          </a:fontRef>
+        </p:style>
+        <p:txBody>
+          <a:bodyPr rtlCol="0" anchor="ctr"/>
+          <a:lstStyle/>
+          <a:p>
+            <a:pPr algn="ctr"/>
+            <a:endParaRPr/>
+          </a:p>
+        </p:txBody>
+      </p:sp>
+      <p:sp>
+        <p:nvSpPr>
+          <p:cNvPr id="8" name="Rounded Rectangle 7"/>
+          <p:cNvSpPr/>
+          <p:nvPr/>
+        </p:nvSpPr>
+        <p:spPr>
+          <a:xfrm>
+            <a:off x="923925" y="1638300"/>
+            <a:ext cx="114300" cy="114300"/>
+          </a:xfrm>
+          <a:prstGeom prst="roundRect">
+            <a:avLst>
+              <a:gd name="adj" fmla="val 50000"/>
+            </a:avLst>
           </a:prstGeom>
           <a:solidFill>
             <a:srgbClr val="EF4444"/>
@@ -6341,19 +7629,397 @@
           <a:lstStyle/>
           <a:p>
             <a:pPr algn="ctr"/>
-          </a:p>
-        </p:txBody>
-      </p:sp>
-      <p:sp>
-        <p:nvSpPr>
-          <p:cNvPr id="7" name="TextBox 6"/>
+            <a:endParaRPr/>
+          </a:p>
+        </p:txBody>
+      </p:sp>
+      <p:sp>
+        <p:nvSpPr>
+          <p:cNvPr id="9" name="Rectangle 8"/>
+          <p:cNvSpPr/>
+          <p:nvPr/>
+        </p:nvSpPr>
+        <p:spPr>
+          <a:xfrm>
+            <a:off x="971550" y="1752600"/>
+            <a:ext cx="19050" cy="457200"/>
+          </a:xfrm>
+          <a:prstGeom prst="rect">
+            <a:avLst/>
+          </a:prstGeom>
+          <a:solidFill>
+            <a:srgbClr val="334155"/>
+          </a:solidFill>
+          <a:ln>
+            <a:noFill/>
+          </a:ln>
+          <a:effectLst/>
+        </p:spPr>
+        <p:style>
+          <a:lnRef idx="1">
+            <a:schemeClr val="accent1"/>
+          </a:lnRef>
+          <a:fillRef idx="3">
+            <a:schemeClr val="accent1"/>
+          </a:fillRef>
+          <a:effectRef idx="2">
+            <a:schemeClr val="accent1"/>
+          </a:effectRef>
+          <a:fontRef idx="minor">
+            <a:schemeClr val="lt1"/>
+          </a:fontRef>
+        </p:style>
+        <p:txBody>
+          <a:bodyPr rtlCol="0" anchor="ctr"/>
+          <a:lstStyle/>
+          <a:p>
+            <a:pPr algn="ctr"/>
+            <a:endParaRPr/>
+          </a:p>
+        </p:txBody>
+      </p:sp>
+      <p:sp>
+        <p:nvSpPr>
+          <p:cNvPr id="10" name="Rounded Rectangle 9"/>
+          <p:cNvSpPr/>
+          <p:nvPr/>
+        </p:nvSpPr>
+        <p:spPr>
+          <a:xfrm>
+            <a:off x="923925" y="2209800"/>
+            <a:ext cx="114300" cy="114300"/>
+          </a:xfrm>
+          <a:prstGeom prst="roundRect">
+            <a:avLst>
+              <a:gd name="adj" fmla="val 50000"/>
+            </a:avLst>
+          </a:prstGeom>
+          <a:solidFill>
+            <a:srgbClr val="3B82F6"/>
+          </a:solidFill>
+          <a:ln>
+            <a:noFill/>
+          </a:ln>
+          <a:effectLst/>
+        </p:spPr>
+        <p:style>
+          <a:lnRef idx="1">
+            <a:schemeClr val="accent1"/>
+          </a:lnRef>
+          <a:fillRef idx="3">
+            <a:schemeClr val="accent1"/>
+          </a:fillRef>
+          <a:effectRef idx="2">
+            <a:schemeClr val="accent1"/>
+          </a:effectRef>
+          <a:fontRef idx="minor">
+            <a:schemeClr val="lt1"/>
+          </a:fontRef>
+        </p:style>
+        <p:txBody>
+          <a:bodyPr rtlCol="0" anchor="ctr"/>
+          <a:lstStyle/>
+          <a:p>
+            <a:pPr algn="ctr"/>
+            <a:endParaRPr/>
+          </a:p>
+        </p:txBody>
+      </p:sp>
+      <p:sp>
+        <p:nvSpPr>
+          <p:cNvPr id="11" name="Rounded Rectangle 10"/>
+          <p:cNvSpPr/>
+          <p:nvPr/>
+        </p:nvSpPr>
+        <p:spPr>
+          <a:xfrm>
+            <a:off x="10001250" y="2085975"/>
+            <a:ext cx="800100" cy="219075"/>
+          </a:xfrm>
+          <a:prstGeom prst="roundRect">
+            <a:avLst>
+              <a:gd name="adj" fmla="val 50000"/>
+            </a:avLst>
+          </a:prstGeom>
+          <a:solidFill>
+            <a:srgbClr val="FEE2E2"/>
+          </a:solidFill>
+          <a:ln>
+            <a:noFill/>
+          </a:ln>
+          <a:effectLst/>
+        </p:spPr>
+        <p:style>
+          <a:lnRef idx="1">
+            <a:schemeClr val="accent1"/>
+          </a:lnRef>
+          <a:fillRef idx="3">
+            <a:schemeClr val="accent1"/>
+          </a:fillRef>
+          <a:effectRef idx="2">
+            <a:schemeClr val="accent1"/>
+          </a:effectRef>
+          <a:fontRef idx="minor">
+            <a:schemeClr val="lt1"/>
+          </a:fontRef>
+        </p:style>
+        <p:txBody>
+          <a:bodyPr rtlCol="0" anchor="ctr"/>
+          <a:lstStyle/>
+          <a:p>
+            <a:pPr algn="ctr"/>
+            <a:endParaRPr/>
+          </a:p>
+        </p:txBody>
+      </p:sp>
+      <p:sp>
+        <p:nvSpPr>
+          <p:cNvPr id="12" name="Rounded Rectangle 11"/>
+          <p:cNvSpPr/>
+          <p:nvPr/>
+        </p:nvSpPr>
+        <p:spPr>
+          <a:xfrm>
+            <a:off x="9944100" y="3971925"/>
+            <a:ext cx="857250" cy="219075"/>
+          </a:xfrm>
+          <a:prstGeom prst="roundRect">
+            <a:avLst>
+              <a:gd name="adj" fmla="val 50000"/>
+            </a:avLst>
+          </a:prstGeom>
+          <a:solidFill>
+            <a:srgbClr val="DCFCE3"/>
+          </a:solidFill>
+          <a:ln>
+            <a:noFill/>
+          </a:ln>
+          <a:effectLst/>
+        </p:spPr>
+        <p:style>
+          <a:lnRef idx="1">
+            <a:schemeClr val="accent1"/>
+          </a:lnRef>
+          <a:fillRef idx="3">
+            <a:schemeClr val="accent1"/>
+          </a:fillRef>
+          <a:effectRef idx="2">
+            <a:schemeClr val="accent1"/>
+          </a:effectRef>
+          <a:fontRef idx="minor">
+            <a:schemeClr val="lt1"/>
+          </a:fontRef>
+        </p:style>
+        <p:txBody>
+          <a:bodyPr rtlCol="0" anchor="ctr"/>
+          <a:lstStyle/>
+          <a:p>
+            <a:pPr algn="ctr"/>
+            <a:endParaRPr/>
+          </a:p>
+        </p:txBody>
+      </p:sp>
+      <p:sp>
+        <p:nvSpPr>
+          <p:cNvPr id="13" name="Rounded Rectangle 12"/>
+          <p:cNvSpPr/>
+          <p:nvPr/>
+        </p:nvSpPr>
+        <p:spPr>
+          <a:xfrm>
+            <a:off x="7439025" y="4805362"/>
+            <a:ext cx="1733550" cy="342900"/>
+          </a:xfrm>
+          <a:prstGeom prst="roundRect">
+            <a:avLst>
+              <a:gd name="adj" fmla="val 22222"/>
+            </a:avLst>
+          </a:prstGeom>
+          <a:solidFill>
+            <a:srgbClr val="3B82F6"/>
+          </a:solidFill>
+          <a:ln>
+            <a:noFill/>
+          </a:ln>
+          <a:effectLst/>
+        </p:spPr>
+        <p:style>
+          <a:lnRef idx="1">
+            <a:schemeClr val="accent1"/>
+          </a:lnRef>
+          <a:fillRef idx="3">
+            <a:schemeClr val="accent1"/>
+          </a:fillRef>
+          <a:effectRef idx="2">
+            <a:schemeClr val="accent1"/>
+          </a:effectRef>
+          <a:fontRef idx="minor">
+            <a:schemeClr val="lt1"/>
+          </a:fontRef>
+        </p:style>
+        <p:txBody>
+          <a:bodyPr rtlCol="0" anchor="ctr"/>
+          <a:lstStyle/>
+          <a:p>
+            <a:pPr algn="ctr"/>
+            <a:endParaRPr/>
+          </a:p>
+        </p:txBody>
+      </p:sp>
+      <p:pic>
+        <p:nvPicPr>
+          <p:cNvPr id="14" name="Picture 13" descr="image.png"/>
+          <p:cNvPicPr>
+            <a:picLocks noChangeAspect="1"/>
+          </p:cNvPicPr>
+          <p:nvPr/>
+        </p:nvPicPr>
+        <p:blipFill>
+          <a:blip r:embed="rId2"/>
+          <a:stretch>
+            <a:fillRect/>
+          </a:stretch>
+        </p:blipFill>
+        <p:spPr>
+          <a:xfrm>
+            <a:off x="1076325" y="5791200"/>
+            <a:ext cx="133350" cy="133350"/>
+          </a:xfrm>
+          <a:prstGeom prst="rect">
+            <a:avLst/>
+          </a:prstGeom>
+        </p:spPr>
+      </p:pic>
+      <p:pic>
+        <p:nvPicPr>
+          <p:cNvPr id="15" name="Picture 14" descr="image.png"/>
+          <p:cNvPicPr>
+            <a:picLocks noChangeAspect="1"/>
+          </p:cNvPicPr>
+          <p:nvPr/>
+        </p:nvPicPr>
+        <p:blipFill>
+          <a:blip r:embed="rId3"/>
+          <a:stretch>
+            <a:fillRect/>
+          </a:stretch>
+        </p:blipFill>
+        <p:spPr>
+          <a:xfrm>
+            <a:off x="5667375" y="4900612"/>
+            <a:ext cx="133350" cy="152400"/>
+          </a:xfrm>
+          <a:prstGeom prst="rect">
+            <a:avLst/>
+          </a:prstGeom>
+        </p:spPr>
+      </p:pic>
+      <p:pic>
+        <p:nvPicPr>
+          <p:cNvPr id="16" name="Picture 15" descr="image.png"/>
+          <p:cNvPicPr>
+            <a:picLocks noChangeAspect="1"/>
+          </p:cNvPicPr>
+          <p:nvPr/>
+        </p:nvPicPr>
+        <p:blipFill>
+          <a:blip r:embed="rId3"/>
+          <a:stretch>
+            <a:fillRect/>
+          </a:stretch>
+        </p:blipFill>
+        <p:spPr>
+          <a:xfrm>
+            <a:off x="7077075" y="4900612"/>
+            <a:ext cx="133350" cy="152400"/>
+          </a:xfrm>
+          <a:prstGeom prst="rect">
+            <a:avLst/>
+          </a:prstGeom>
+        </p:spPr>
+      </p:pic>
+      <p:pic>
+        <p:nvPicPr>
+          <p:cNvPr id="17" name="Picture 16" descr="image.png"/>
+          <p:cNvPicPr>
+            <a:picLocks noChangeAspect="1"/>
+          </p:cNvPicPr>
+          <p:nvPr/>
+        </p:nvPicPr>
+        <p:blipFill>
+          <a:blip r:embed="rId4"/>
+          <a:stretch>
+            <a:fillRect/>
+          </a:stretch>
+        </p:blipFill>
+        <p:spPr>
+          <a:xfrm>
+            <a:off x="4819650" y="4881562"/>
+            <a:ext cx="171450" cy="190500"/>
+          </a:xfrm>
+          <a:prstGeom prst="rect">
+            <a:avLst/>
+          </a:prstGeom>
+        </p:spPr>
+      </p:pic>
+      <p:pic>
+        <p:nvPicPr>
+          <p:cNvPr id="18" name="Picture 17" descr="image.png"/>
+          <p:cNvPicPr>
+            <a:picLocks noChangeAspect="1"/>
+          </p:cNvPicPr>
+          <p:nvPr/>
+        </p:nvPicPr>
+        <p:blipFill>
+          <a:blip r:embed="rId5"/>
+          <a:stretch>
+            <a:fillRect/>
+          </a:stretch>
+        </p:blipFill>
+        <p:spPr>
+          <a:xfrm>
+            <a:off x="6029325" y="4881562"/>
+            <a:ext cx="123825" cy="190500"/>
+          </a:xfrm>
+          <a:prstGeom prst="rect">
+            <a:avLst/>
+          </a:prstGeom>
+        </p:spPr>
+      </p:pic>
+      <p:pic>
+        <p:nvPicPr>
+          <p:cNvPr id="19" name="Picture 18" descr="image.png"/>
+          <p:cNvPicPr>
+            <a:picLocks noChangeAspect="1"/>
+          </p:cNvPicPr>
+          <p:nvPr/>
+        </p:nvPicPr>
+        <p:blipFill>
+          <a:blip r:embed="rId6"/>
+          <a:stretch>
+            <a:fillRect/>
+          </a:stretch>
+        </p:blipFill>
+        <p:spPr>
+          <a:xfrm>
+            <a:off x="7591425" y="4881562"/>
+            <a:ext cx="219075" cy="190500"/>
+          </a:xfrm>
+          <a:prstGeom prst="rect">
+            <a:avLst/>
+          </a:prstGeom>
+        </p:spPr>
+      </p:pic>
+      <p:sp>
+        <p:nvSpPr>
+          <p:cNvPr id="20" name="TextBox 19"/>
           <p:cNvSpPr txBox="1"/>
           <p:nvPr/>
         </p:nvSpPr>
         <p:spPr>
           <a:xfrm>
-            <a:off x="762000" y="1123950"/>
-            <a:ext cx="11430000" cy="190500"/>
+            <a:off x="609600" y="457200"/>
+            <a:ext cx="11582400" cy="190500"/>
           </a:xfrm>
           <a:prstGeom prst="rect">
             <a:avLst/>
@@ -6361,34 +8027,34 @@
           <a:noFill/>
         </p:spPr>
         <p:txBody>
-          <a:bodyPr wrap="none" lIns="0" rIns="0" tIns="0" bIns="0" anchor="t">
+          <a:bodyPr wrap="none" lIns="0" tIns="0" rIns="0" bIns="0" anchor="t">
             <a:spAutoFit/>
           </a:bodyPr>
           <a:lstStyle/>
           <a:p>
             <a:pPr algn="l"/>
             <a:r>
-              <a:rPr b="1" sz="1200" i="0" u="none">
+              <a:rPr sz="1200" b="1" i="0" u="none">
                 <a:solidFill>
                   <a:srgbClr val="3B82F6"/>
                 </a:solidFill>
                 <a:latin typeface="Outfit"/>
               </a:rPr>
-              <a:t>04 / KEY FEATURES</a:t>
-            </a:r>
-          </a:p>
-        </p:txBody>
-      </p:sp>
-      <p:sp>
-        <p:nvSpPr>
-          <p:cNvPr id="8" name="TextBox 7"/>
+              <a:t>07 / PROTOTYPE: TRANSFER RISK UI</a:t>
+            </a:r>
+          </a:p>
+        </p:txBody>
+      </p:sp>
+      <p:sp>
+        <p:nvSpPr>
+          <p:cNvPr id="21" name="TextBox 20"/>
           <p:cNvSpPr txBox="1"/>
           <p:nvPr/>
         </p:nvSpPr>
         <p:spPr>
           <a:xfrm>
-            <a:off x="762000" y="1466850"/>
-            <a:ext cx="11430000" cy="571500"/>
+            <a:off x="923925" y="1114425"/>
+            <a:ext cx="3700462" cy="238125"/>
           </a:xfrm>
           <a:prstGeom prst="rect">
             <a:avLst/>
@@ -6396,34 +8062,34 @@
           <a:noFill/>
         </p:spPr>
         <p:txBody>
-          <a:bodyPr wrap="none" lIns="0" rIns="0" tIns="0" bIns="0" anchor="t">
+          <a:bodyPr wrap="none" lIns="0" tIns="0" rIns="0" bIns="0" anchor="t">
             <a:spAutoFit/>
           </a:bodyPr>
           <a:lstStyle/>
           <a:p>
             <a:pPr algn="l"/>
             <a:r>
-              <a:rPr b="1" sz="3600" i="0" u="none">
-                <a:solidFill>
-                  <a:srgbClr val="0F172A"/>
+              <a:rPr sz="1500" b="1" i="0" u="none">
+                <a:solidFill>
+                  <a:srgbClr val="FFFFFF"/>
                 </a:solidFill>
                 <a:latin typeface="Outfit"/>
               </a:rPr>
-              <a:t>Intelligence at every node.</a:t>
-            </a:r>
-          </a:p>
-        </p:txBody>
-      </p:sp>
-      <p:sp>
-        <p:nvSpPr>
-          <p:cNvPr id="9" name="TextBox 8"/>
+              <a:t>Active Journey</a:t>
+            </a:r>
+          </a:p>
+        </p:txBody>
+      </p:sp>
+      <p:sp>
+        <p:nvSpPr>
+          <p:cNvPr id="22" name="TextBox 21"/>
           <p:cNvSpPr txBox="1"/>
           <p:nvPr/>
         </p:nvSpPr>
         <p:spPr>
           <a:xfrm>
-            <a:off x="1143000" y="2876550"/>
-            <a:ext cx="5800725" cy="285750"/>
+            <a:off x="1076325" y="5534025"/>
+            <a:ext cx="3143250" cy="161925"/>
           </a:xfrm>
           <a:prstGeom prst="rect">
             <a:avLst/>
@@ -6431,34 +8097,318 @@
           <a:noFill/>
         </p:spPr>
         <p:txBody>
-          <a:bodyPr wrap="none" lIns="0" rIns="0" tIns="0" bIns="0" anchor="t">
+          <a:bodyPr wrap="none" lIns="0" tIns="0" rIns="0" bIns="0" anchor="t">
             <a:spAutoFit/>
           </a:bodyPr>
           <a:lstStyle/>
           <a:p>
             <a:pPr algn="l"/>
             <a:r>
-              <a:rPr b="1" sz="1800" i="0" u="none">
-                <a:solidFill>
-                  <a:srgbClr val="0F172A"/>
+              <a:rPr sz="1050" b="0" i="0" u="none">
+                <a:solidFill>
+                  <a:srgbClr val="CBD5E1"/>
+                </a:solidFill>
+                <a:latin typeface="Inter"/>
+              </a:rPr>
+              <a:t>Recent Report</a:t>
+            </a:r>
+          </a:p>
+        </p:txBody>
+      </p:sp>
+      <p:sp>
+        <p:nvSpPr>
+          <p:cNvPr id="23" name="TextBox 22"/>
+          <p:cNvSpPr txBox="1"/>
+          <p:nvPr/>
+        </p:nvSpPr>
+        <p:spPr>
+          <a:xfrm>
+            <a:off x="1076325" y="5772150"/>
+            <a:ext cx="3143250" cy="161925"/>
+          </a:xfrm>
+          <a:prstGeom prst="rect">
+            <a:avLst/>
+          </a:prstGeom>
+          <a:noFill/>
+        </p:spPr>
+        <p:txBody>
+          <a:bodyPr wrap="none" lIns="209550" tIns="0" rIns="0" bIns="0" anchor="t">
+            <a:spAutoFit/>
+          </a:bodyPr>
+          <a:lstStyle/>
+          <a:p>
+            <a:pPr algn="l"/>
+            <a:r>
+              <a:rPr sz="1050" b="1" i="0" u="none">
+                <a:solidFill>
+                  <a:srgbClr val="F8FAFC"/>
+                </a:solidFill>
+                <a:latin typeface="Inter"/>
+              </a:rPr>
+              <a:t>Train delayed by 25m.</a:t>
+            </a:r>
+          </a:p>
+        </p:txBody>
+      </p:sp>
+      <p:sp>
+        <p:nvSpPr>
+          <p:cNvPr id="24" name="TextBox 23"/>
+          <p:cNvSpPr txBox="1"/>
+          <p:nvPr/>
+        </p:nvSpPr>
+        <p:spPr>
+          <a:xfrm>
+            <a:off x="4819650" y="2490787"/>
+            <a:ext cx="6076950" cy="514350"/>
+          </a:xfrm>
+          <a:prstGeom prst="rect">
+            <a:avLst/>
+          </a:prstGeom>
+          <a:noFill/>
+        </p:spPr>
+        <p:txBody>
+          <a:bodyPr wrap="square" lIns="0" tIns="0" rIns="0" bIns="0" anchor="t">
+            <a:spAutoFit/>
+          </a:bodyPr>
+          <a:lstStyle/>
+          <a:p>
+            <a:pPr algn="l">
+              <a:lnSpc>
+                <a:spcPts val="2025"/>
+              </a:lnSpc>
+            </a:pPr>
+            <a:r>
+              <a:rPr sz="1350" b="0" i="0" u="none">
+                <a:solidFill>
+                  <a:srgbClr val="F8FAFC"/>
+                </a:solidFill>
+                <a:latin typeface="Inter"/>
+              </a:rPr>
+              <a:t>Train arrival ETA (09:40 AM) exceeds KSRTC feeder bus departure (09:35 AM). Connection will be missed.</a:t>
+            </a:r>
+          </a:p>
+        </p:txBody>
+      </p:sp>
+      <p:sp>
+        <p:nvSpPr>
+          <p:cNvPr id="25" name="TextBox 24"/>
+          <p:cNvSpPr txBox="1"/>
+          <p:nvPr/>
+        </p:nvSpPr>
+        <p:spPr>
+          <a:xfrm>
+            <a:off x="4819650" y="4376737"/>
+            <a:ext cx="7372350" cy="200025"/>
+          </a:xfrm>
+          <a:prstGeom prst="rect">
+            <a:avLst/>
+          </a:prstGeom>
+          <a:noFill/>
+        </p:spPr>
+        <p:txBody>
+          <a:bodyPr wrap="none" lIns="0" tIns="0" rIns="0" bIns="0" anchor="t">
+            <a:spAutoFit/>
+          </a:bodyPr>
+          <a:lstStyle/>
+          <a:p>
+            <a:pPr algn="l"/>
+            <a:r>
+              <a:rPr sz="1350" b="0" i="0" u="none">
+                <a:solidFill>
+                  <a:srgbClr val="CBD5E1"/>
+                </a:solidFill>
+                <a:latin typeface="Inter"/>
+              </a:rPr>
+              <a:t>Switch to Water Transport.</a:t>
+            </a:r>
+          </a:p>
+        </p:txBody>
+      </p:sp>
+      <p:sp>
+        <p:nvSpPr>
+          <p:cNvPr id="26" name="TextBox 25"/>
+          <p:cNvSpPr txBox="1"/>
+          <p:nvPr/>
+        </p:nvSpPr>
+        <p:spPr>
+          <a:xfrm>
+            <a:off x="1190625" y="1581150"/>
+            <a:ext cx="2333625" cy="190500"/>
+          </a:xfrm>
+          <a:prstGeom prst="rect">
+            <a:avLst/>
+          </a:prstGeom>
+          <a:noFill/>
+        </p:spPr>
+        <p:txBody>
+          <a:bodyPr wrap="none" lIns="0" tIns="0" rIns="0" bIns="0" anchor="t">
+            <a:spAutoFit/>
+          </a:bodyPr>
+          <a:lstStyle/>
+          <a:p>
+            <a:pPr algn="l"/>
+            <a:r>
+              <a:rPr sz="1200" b="1" i="0" u="none">
+                <a:solidFill>
+                  <a:srgbClr val="F8FAFC"/>
+                </a:solidFill>
+                <a:latin typeface="Inter"/>
+              </a:rPr>
+              <a:t>Kollam Junction</a:t>
+            </a:r>
+          </a:p>
+        </p:txBody>
+      </p:sp>
+      <p:sp>
+        <p:nvSpPr>
+          <p:cNvPr id="27" name="TextBox 26"/>
+          <p:cNvSpPr txBox="1"/>
+          <p:nvPr/>
+        </p:nvSpPr>
+        <p:spPr>
+          <a:xfrm>
+            <a:off x="1190625" y="1809750"/>
+            <a:ext cx="2333625" cy="161925"/>
+          </a:xfrm>
+          <a:prstGeom prst="rect">
+            <a:avLst/>
+          </a:prstGeom>
+          <a:noFill/>
+        </p:spPr>
+        <p:txBody>
+          <a:bodyPr wrap="none" lIns="0" tIns="0" rIns="0" bIns="0" anchor="t">
+            <a:spAutoFit/>
+          </a:bodyPr>
+          <a:lstStyle/>
+          <a:p>
+            <a:pPr algn="l"/>
+            <a:r>
+              <a:rPr sz="1050" b="0" i="0" u="none">
+                <a:solidFill>
+                  <a:srgbClr val="94A3B8"/>
+                </a:solidFill>
+                <a:latin typeface="Inter"/>
+              </a:rPr>
+              <a:t>09:15 AM (Delayed)</a:t>
+            </a:r>
+          </a:p>
+        </p:txBody>
+      </p:sp>
+      <p:sp>
+        <p:nvSpPr>
+          <p:cNvPr id="28" name="TextBox 27"/>
+          <p:cNvSpPr txBox="1"/>
+          <p:nvPr/>
+        </p:nvSpPr>
+        <p:spPr>
+          <a:xfrm>
+            <a:off x="1190625" y="2200275"/>
+            <a:ext cx="2333625" cy="190500"/>
+          </a:xfrm>
+          <a:prstGeom prst="rect">
+            <a:avLst/>
+          </a:prstGeom>
+          <a:noFill/>
+        </p:spPr>
+        <p:txBody>
+          <a:bodyPr wrap="none" lIns="0" tIns="0" rIns="0" bIns="0" anchor="t">
+            <a:spAutoFit/>
+          </a:bodyPr>
+          <a:lstStyle/>
+          <a:p>
+            <a:pPr algn="l"/>
+            <a:r>
+              <a:rPr sz="1200" b="1" i="0" u="none">
+                <a:solidFill>
+                  <a:srgbClr val="F8FAFC"/>
+                </a:solidFill>
+                <a:latin typeface="Inter"/>
+              </a:rPr>
+              <a:t>Ashtamudi Ferry Terminal</a:t>
+            </a:r>
+          </a:p>
+        </p:txBody>
+      </p:sp>
+      <p:sp>
+        <p:nvSpPr>
+          <p:cNvPr id="29" name="TextBox 28"/>
+          <p:cNvSpPr txBox="1"/>
+          <p:nvPr/>
+        </p:nvSpPr>
+        <p:spPr>
+          <a:xfrm>
+            <a:off x="1190625" y="2428875"/>
+            <a:ext cx="2333625" cy="161925"/>
+          </a:xfrm>
+          <a:prstGeom prst="rect">
+            <a:avLst/>
+          </a:prstGeom>
+          <a:noFill/>
+        </p:spPr>
+        <p:txBody>
+          <a:bodyPr wrap="none" lIns="0" tIns="0" rIns="0" bIns="0" anchor="t">
+            <a:spAutoFit/>
+          </a:bodyPr>
+          <a:lstStyle/>
+          <a:p>
+            <a:pPr algn="l"/>
+            <a:r>
+              <a:rPr sz="1050" b="0" i="0" u="none">
+                <a:solidFill>
+                  <a:srgbClr val="94A3B8"/>
+                </a:solidFill>
+                <a:latin typeface="Inter"/>
+              </a:rPr>
+              <a:t>10:05 AM</a:t>
+            </a:r>
+          </a:p>
+        </p:txBody>
+      </p:sp>
+      <p:sp>
+        <p:nvSpPr>
+          <p:cNvPr id="30" name="TextBox 29"/>
+          <p:cNvSpPr txBox="1"/>
+          <p:nvPr/>
+        </p:nvSpPr>
+        <p:spPr>
+          <a:xfrm>
+            <a:off x="4819650" y="2052637"/>
+            <a:ext cx="3175396" cy="285750"/>
+          </a:xfrm>
+          <a:prstGeom prst="rect">
+            <a:avLst/>
+          </a:prstGeom>
+          <a:noFill/>
+        </p:spPr>
+        <p:txBody>
+          <a:bodyPr wrap="none" lIns="0" tIns="0" rIns="0" bIns="0" anchor="t">
+            <a:spAutoFit/>
+          </a:bodyPr>
+          <a:lstStyle/>
+          <a:p>
+            <a:pPr algn="l"/>
+            <a:r>
+              <a:rPr sz="1800" b="1" i="0" u="none">
+                <a:solidFill>
+                  <a:srgbClr val="FCA5A5"/>
                 </a:solidFill>
                 <a:latin typeface="Outfit"/>
               </a:rPr>
-              <a:t>Transfer Risk Scoring</a:t>
-            </a:r>
-          </a:p>
-        </p:txBody>
-      </p:sp>
-      <p:sp>
-        <p:nvSpPr>
-          <p:cNvPr id="10" name="TextBox 9"/>
+              <a:t>Transfer Risk Detected</a:t>
+            </a:r>
+          </a:p>
+        </p:txBody>
+      </p:sp>
+      <p:sp>
+        <p:nvSpPr>
+          <p:cNvPr id="31" name="TextBox 30"/>
           <p:cNvSpPr txBox="1"/>
           <p:nvPr/>
         </p:nvSpPr>
         <p:spPr>
           <a:xfrm>
-            <a:off x="1143000" y="3276600"/>
-            <a:ext cx="4514850" cy="400050"/>
+            <a:off x="10115550" y="2124075"/>
+            <a:ext cx="666750" cy="142875"/>
           </a:xfrm>
           <a:prstGeom prst="rect">
             <a:avLst/>
@@ -6466,34 +8416,34 @@
           <a:noFill/>
         </p:spPr>
         <p:txBody>
-          <a:bodyPr wrap="square" lIns="0" rIns="0" tIns="0" bIns="0" anchor="t">
+          <a:bodyPr wrap="square" lIns="0" tIns="0" rIns="0" bIns="0" anchor="t">
             <a:spAutoFit/>
           </a:bodyPr>
           <a:lstStyle/>
           <a:p>
             <a:pPr algn="l"/>
             <a:r>
-              <a:rPr b="0" sz="1350" i="0" u="none">
-                <a:solidFill>
-                  <a:srgbClr val="64748B"/>
+              <a:rPr sz="900" b="1" i="0" u="none">
+                <a:solidFill>
+                  <a:srgbClr val="991B1B"/>
                 </a:solidFill>
                 <a:latin typeface="Inter"/>
               </a:rPr>
-              <a:t>Automated High/Med/Low risk assessment between modes.</a:t>
-            </a:r>
-          </a:p>
-        </p:txBody>
-      </p:sp>
-      <p:sp>
-        <p:nvSpPr>
-          <p:cNvPr id="11" name="TextBox 10"/>
+              <a:t>HIGH RISK</a:t>
+            </a:r>
+          </a:p>
+        </p:txBody>
+      </p:sp>
+      <p:sp>
+        <p:nvSpPr>
+          <p:cNvPr id="32" name="TextBox 31"/>
           <p:cNvSpPr txBox="1"/>
           <p:nvPr/>
         </p:nvSpPr>
         <p:spPr>
           <a:xfrm>
-            <a:off x="6629400" y="2876550"/>
-            <a:ext cx="5562600" cy="285750"/>
+            <a:off x="4819650" y="3938587"/>
+            <a:ext cx="4088010" cy="285750"/>
           </a:xfrm>
           <a:prstGeom prst="rect">
             <a:avLst/>
@@ -6501,34 +8451,34 @@
           <a:noFill/>
         </p:spPr>
         <p:txBody>
-          <a:bodyPr wrap="none" lIns="0" rIns="0" tIns="0" bIns="0" anchor="t">
+          <a:bodyPr wrap="none" lIns="0" tIns="0" rIns="0" bIns="0" anchor="t">
             <a:spAutoFit/>
           </a:bodyPr>
           <a:lstStyle/>
           <a:p>
             <a:pPr algn="l"/>
             <a:r>
-              <a:rPr b="1" sz="1800" i="0" u="none">
-                <a:solidFill>
-                  <a:srgbClr val="0F172A"/>
+              <a:rPr sz="1800" b="1" i="0" u="none">
+                <a:solidFill>
+                  <a:srgbClr val="93C5FD"/>
                 </a:solidFill>
                 <a:latin typeface="Outfit"/>
               </a:rPr>
-              <a:t>Community Delay Updates</a:t>
-            </a:r>
-          </a:p>
-        </p:txBody>
-      </p:sp>
-      <p:sp>
-        <p:nvSpPr>
-          <p:cNvPr id="12" name="TextBox 11"/>
+              <a:t>Alternative Multimodal Route</a:t>
+            </a:r>
+          </a:p>
+        </p:txBody>
+      </p:sp>
+      <p:sp>
+        <p:nvSpPr>
+          <p:cNvPr id="33" name="TextBox 32"/>
           <p:cNvSpPr txBox="1"/>
           <p:nvPr/>
         </p:nvSpPr>
         <p:spPr>
           <a:xfrm>
-            <a:off x="6629400" y="3276600"/>
-            <a:ext cx="5524500" cy="200025"/>
+            <a:off x="10058400" y="4010025"/>
+            <a:ext cx="723900" cy="142875"/>
           </a:xfrm>
           <a:prstGeom prst="rect">
             <a:avLst/>
@@ -6536,34 +8486,34 @@
           <a:noFill/>
         </p:spPr>
         <p:txBody>
-          <a:bodyPr wrap="none" lIns="0" rIns="0" tIns="0" bIns="0" anchor="t">
+          <a:bodyPr wrap="square" lIns="0" tIns="0" rIns="0" bIns="0" anchor="t">
             <a:spAutoFit/>
           </a:bodyPr>
           <a:lstStyle/>
           <a:p>
             <a:pPr algn="l"/>
             <a:r>
-              <a:rPr b="0" sz="1350" i="0" u="none">
-                <a:solidFill>
-                  <a:srgbClr val="64748B"/>
+              <a:rPr sz="900" b="1" i="0" u="none">
+                <a:solidFill>
+                  <a:srgbClr val="166534"/>
                 </a:solidFill>
                 <a:latin typeface="Inter"/>
               </a:rPr>
-              <a:t>Crowdsourced real-time schedule adjustments.</a:t>
-            </a:r>
-          </a:p>
-        </p:txBody>
-      </p:sp>
-      <p:sp>
-        <p:nvSpPr>
-          <p:cNvPr id="13" name="TextBox 12"/>
+              <a:t>AVAILABLE</a:t>
+            </a:r>
+          </a:p>
+        </p:txBody>
+      </p:sp>
+      <p:sp>
+        <p:nvSpPr>
+          <p:cNvPr id="34" name="TextBox 33"/>
           <p:cNvSpPr txBox="1"/>
           <p:nvPr/>
         </p:nvSpPr>
         <p:spPr>
           <a:xfrm>
-            <a:off x="1143000" y="4743450"/>
-            <a:ext cx="5800725" cy="285750"/>
+            <a:off x="5067300" y="4881562"/>
+            <a:ext cx="657225" cy="190500"/>
           </a:xfrm>
           <a:prstGeom prst="rect">
             <a:avLst/>
@@ -6571,34 +8521,34 @@
           <a:noFill/>
         </p:spPr>
         <p:txBody>
-          <a:bodyPr wrap="none" lIns="0" rIns="0" tIns="0" bIns="0" anchor="t">
+          <a:bodyPr wrap="none" lIns="0" tIns="0" rIns="0" bIns="0" anchor="t">
             <a:spAutoFit/>
           </a:bodyPr>
           <a:lstStyle/>
           <a:p>
             <a:pPr algn="l"/>
             <a:r>
-              <a:rPr b="1" sz="1800" i="0" u="none">
-                <a:solidFill>
-                  <a:srgbClr val="0F172A"/>
-                </a:solidFill>
-                <a:latin typeface="Outfit"/>
+              <a:rPr sz="1200" b="1" i="0" u="none">
+                <a:solidFill>
+                  <a:srgbClr val="F8FAFC"/>
+                </a:solidFill>
+                <a:latin typeface="Inter"/>
               </a:rPr>
-              <a:t>Multimodal Alternatives</a:t>
-            </a:r>
-          </a:p>
-        </p:txBody>
-      </p:sp>
-      <p:sp>
-        <p:nvSpPr>
-          <p:cNvPr id="14" name="TextBox 13"/>
+              <a:t>Train</a:t>
+            </a:r>
+          </a:p>
+        </p:txBody>
+      </p:sp>
+      <p:sp>
+        <p:nvSpPr>
+          <p:cNvPr id="35" name="TextBox 34"/>
           <p:cNvSpPr txBox="1"/>
           <p:nvPr/>
         </p:nvSpPr>
         <p:spPr>
           <a:xfrm>
-            <a:off x="1143000" y="5143500"/>
-            <a:ext cx="5524500" cy="209550"/>
+            <a:off x="6229350" y="4881562"/>
+            <a:ext cx="904875" cy="190500"/>
           </a:xfrm>
           <a:prstGeom prst="rect">
             <a:avLst/>
@@ -6606,34 +8556,34 @@
           <a:noFill/>
         </p:spPr>
         <p:txBody>
-          <a:bodyPr wrap="none" lIns="0" rIns="0" tIns="0" bIns="0" anchor="t">
+          <a:bodyPr wrap="none" lIns="0" tIns="0" rIns="0" bIns="0" anchor="t">
             <a:spAutoFit/>
           </a:bodyPr>
           <a:lstStyle/>
           <a:p>
             <a:pPr algn="l"/>
             <a:r>
-              <a:rPr b="0" sz="1350" i="0" u="none">
-                <a:solidFill>
-                  <a:srgbClr val="64748B"/>
+              <a:rPr sz="1200" b="1" i="0" u="none">
+                <a:solidFill>
+                  <a:srgbClr val="F8FAFC"/>
                 </a:solidFill>
                 <a:latin typeface="Inter"/>
               </a:rPr>
-              <a:t>Instant fallback generation (e.g., Train → Ferry).</a:t>
-            </a:r>
-          </a:p>
-        </p:txBody>
-      </p:sp>
-      <p:sp>
-        <p:nvSpPr>
-          <p:cNvPr id="15" name="TextBox 14"/>
+              <a:t>Walk 5m</a:t>
+            </a:r>
+          </a:p>
+        </p:txBody>
+      </p:sp>
+      <p:sp>
+        <p:nvSpPr>
+          <p:cNvPr id="36" name="TextBox 35"/>
           <p:cNvSpPr txBox="1"/>
           <p:nvPr/>
         </p:nvSpPr>
         <p:spPr>
           <a:xfrm>
-            <a:off x="6667500" y="4743450"/>
-            <a:ext cx="5524500" cy="285750"/>
+            <a:off x="7886700" y="4881562"/>
+            <a:ext cx="1419225" cy="190500"/>
           </a:xfrm>
           <a:prstGeom prst="rect">
             <a:avLst/>
@@ -6641,55 +8591,20 @@
           <a:noFill/>
         </p:spPr>
         <p:txBody>
-          <a:bodyPr wrap="none" lIns="0" rIns="0" tIns="0" bIns="0" anchor="t">
+          <a:bodyPr wrap="none" lIns="0" tIns="0" rIns="0" bIns="0" anchor="t">
             <a:spAutoFit/>
           </a:bodyPr>
           <a:lstStyle/>
           <a:p>
             <a:pPr algn="l"/>
             <a:r>
-              <a:rPr b="1" sz="1800" i="0" u="none">
-                <a:solidFill>
-                  <a:srgbClr val="0F172A"/>
-                </a:solidFill>
-                <a:latin typeface="Outfit"/>
-              </a:rPr>
-              <a:t>RailDetour Intelligence</a:t>
-            </a:r>
-          </a:p>
-        </p:txBody>
-      </p:sp>
-      <p:sp>
-        <p:nvSpPr>
-          <p:cNvPr id="16" name="TextBox 15"/>
-          <p:cNvSpPr txBox="1"/>
-          <p:nvPr/>
-        </p:nvSpPr>
-        <p:spPr>
-          <a:xfrm>
-            <a:off x="6667500" y="5143500"/>
-            <a:ext cx="5476875" cy="200025"/>
-          </a:xfrm>
-          <a:prstGeom prst="rect">
-            <a:avLst/>
-          </a:prstGeom>
-          <a:noFill/>
-        </p:spPr>
-        <p:txBody>
-          <a:bodyPr wrap="none" lIns="0" rIns="0" tIns="0" bIns="0" anchor="t">
-            <a:spAutoFit/>
-          </a:bodyPr>
-          <a:lstStyle/>
-          <a:p>
-            <a:pPr algn="l"/>
-            <a:r>
-              <a:rPr b="0" sz="1350" i="0" u="none">
-                <a:solidFill>
-                  <a:srgbClr val="64748B"/>
+              <a:rPr sz="1200" b="1" i="0" u="none">
+                <a:solidFill>
+                  <a:srgbClr val="FFFFFF"/>
                 </a:solidFill>
                 <a:latin typeface="Inter"/>
               </a:rPr>
-              <a:t>Level-crossing closure prediction and road rerouting.</a:t>
+              <a:t>09:55 AM Ferry</a:t>
             </a:r>
           </a:p>
         </p:txBody>
@@ -6702,752 +8617,8 @@
 </p:sld>
 </file>
 
-<file path=ppt/slides/slide6.xml><?xml version="1.0" encoding="utf-8"?>
-<p:sld xmlns:a="http://schemas.openxmlformats.org/drawingml/2006/main" xmlns:p="http://schemas.openxmlformats.org/presentationml/2006/main" xmlns:r="http://schemas.openxmlformats.org/officeDocument/2006/relationships">
-  <p:cSld>
-    <p:bg>
-      <p:bgPr>
-        <a:solidFill>
-          <a:srgbClr val="FFFFFF"/>
-        </a:solidFill>
-        <a:effectLst/>
-      </p:bgPr>
-    </p:bg>
-    <p:spTree>
-      <p:nvGrpSpPr>
-        <p:cNvPr id="1" name=""/>
-        <p:cNvGrpSpPr/>
-        <p:nvPr/>
-      </p:nvGrpSpPr>
-      <p:grpSpPr/>
-      <p:sp>
-        <p:nvSpPr>
-          <p:cNvPr id="2" name="Rectangle 1"/>
-          <p:cNvSpPr/>
-          <p:nvPr/>
-        </p:nvSpPr>
-        <p:spPr>
-          <a:xfrm>
-            <a:off x="1295400" y="2971800"/>
-            <a:ext cx="9601200" cy="38100"/>
-          </a:xfrm>
-          <a:prstGeom prst="rect">
-            <a:avLst/>
-          </a:prstGeom>
-          <a:solidFill>
-            <a:srgbClr val="E2E8F0"/>
-          </a:solidFill>
-          <a:ln>
-            <a:noFill/>
-          </a:ln>
-          <a:effectLst/>
-        </p:spPr>
-        <p:style>
-          <a:lnRef idx="1">
-            <a:schemeClr val="accent1"/>
-          </a:lnRef>
-          <a:fillRef idx="3">
-            <a:schemeClr val="accent1"/>
-          </a:fillRef>
-          <a:effectRef idx="2">
-            <a:schemeClr val="accent1"/>
-          </a:effectRef>
-          <a:fontRef idx="minor">
-            <a:schemeClr val="lt1"/>
-          </a:fontRef>
-        </p:style>
-        <p:txBody>
-          <a:bodyPr rtlCol="0" anchor="ctr"/>
-          <a:lstStyle/>
-          <a:p>
-            <a:pPr algn="ctr"/>
-          </a:p>
-        </p:txBody>
-      </p:sp>
-      <p:sp>
-        <p:nvSpPr>
-          <p:cNvPr id="3" name="TextBox 2"/>
-          <p:cNvSpPr txBox="1"/>
-          <p:nvPr/>
-        </p:nvSpPr>
-        <p:spPr>
-          <a:xfrm>
-            <a:off x="762000" y="762000"/>
-            <a:ext cx="11430000" cy="190500"/>
-          </a:xfrm>
-          <a:prstGeom prst="rect">
-            <a:avLst/>
-          </a:prstGeom>
-          <a:noFill/>
-        </p:spPr>
-        <p:txBody>
-          <a:bodyPr wrap="none" lIns="0" rIns="0" tIns="0" bIns="0" anchor="t">
-            <a:spAutoFit/>
-          </a:bodyPr>
-          <a:lstStyle/>
-          <a:p>
-            <a:pPr algn="l"/>
-            <a:r>
-              <a:rPr b="1" sz="1200" i="0" u="none">
-                <a:solidFill>
-                  <a:srgbClr val="3B82F6"/>
-                </a:solidFill>
-                <a:latin typeface="Outfit"/>
-              </a:rPr>
-              <a:t>05 / HOW IT WORKS</a:t>
-            </a:r>
-          </a:p>
-        </p:txBody>
-      </p:sp>
-      <p:sp>
-        <p:nvSpPr>
-          <p:cNvPr id="4" name="TextBox 3"/>
-          <p:cNvSpPr txBox="1"/>
-          <p:nvPr/>
-        </p:nvSpPr>
-        <p:spPr>
-          <a:xfrm>
-            <a:off x="762000" y="1104900"/>
-            <a:ext cx="11430000" cy="571500"/>
-          </a:xfrm>
-          <a:prstGeom prst="rect">
-            <a:avLst/>
-          </a:prstGeom>
-          <a:noFill/>
-        </p:spPr>
-        <p:txBody>
-          <a:bodyPr wrap="none" lIns="0" rIns="0" tIns="0" bIns="0" anchor="t">
-            <a:spAutoFit/>
-          </a:bodyPr>
-          <a:lstStyle/>
-          <a:p>
-            <a:pPr algn="l"/>
-            <a:r>
-              <a:rPr b="1" sz="3600" i="0" u="none">
-                <a:solidFill>
-                  <a:srgbClr val="0F172A"/>
-                </a:solidFill>
-                <a:latin typeface="Outfit"/>
-              </a:rPr>
-              <a:t>Seamless risk mitigation.</a:t>
-            </a:r>
-          </a:p>
-        </p:txBody>
-      </p:sp>
-      <p:sp>
-        <p:nvSpPr>
-          <p:cNvPr id="5" name="Rounded Rectangle 4"/>
-          <p:cNvSpPr/>
-          <p:nvPr/>
-        </p:nvSpPr>
-        <p:spPr>
-          <a:xfrm>
-            <a:off x="1924050" y="2819400"/>
-            <a:ext cx="342900" cy="342900"/>
-          </a:xfrm>
-          <a:prstGeom prst="roundRect">
-            <a:avLst>
-              <a:gd name="adj" fmla="val 50000"/>
-            </a:avLst>
-          </a:prstGeom>
-          <a:solidFill>
-            <a:srgbClr val="3B82F6"/>
-          </a:solidFill>
-          <a:ln>
-            <a:noFill/>
-          </a:ln>
-          <a:effectLst/>
-        </p:spPr>
-        <p:style>
-          <a:lnRef idx="1">
-            <a:schemeClr val="accent1"/>
-          </a:lnRef>
-          <a:fillRef idx="3">
-            <a:schemeClr val="accent1"/>
-          </a:fillRef>
-          <a:effectRef idx="2">
-            <a:schemeClr val="accent1"/>
-          </a:effectRef>
-          <a:fontRef idx="minor">
-            <a:schemeClr val="lt1"/>
-          </a:fontRef>
-        </p:style>
-        <p:txBody>
-          <a:bodyPr rtlCol="0" anchor="ctr"/>
-          <a:lstStyle/>
-          <a:p>
-            <a:pPr algn="ctr"/>
-          </a:p>
-        </p:txBody>
-      </p:sp>
-      <p:sp>
-        <p:nvSpPr>
-          <p:cNvPr id="6" name="Rounded Rectangle 5"/>
-          <p:cNvSpPr/>
-          <p:nvPr/>
-        </p:nvSpPr>
-        <p:spPr>
-          <a:xfrm>
-            <a:off x="4591050" y="2819400"/>
-            <a:ext cx="342900" cy="342900"/>
-          </a:xfrm>
-          <a:prstGeom prst="roundRect">
-            <a:avLst>
-              <a:gd name="adj" fmla="val 50000"/>
-            </a:avLst>
-          </a:prstGeom>
-          <a:solidFill>
-            <a:srgbClr val="0F172A"/>
-          </a:solidFill>
-          <a:ln>
-            <a:noFill/>
-          </a:ln>
-          <a:effectLst/>
-        </p:spPr>
-        <p:style>
-          <a:lnRef idx="1">
-            <a:schemeClr val="accent1"/>
-          </a:lnRef>
-          <a:fillRef idx="3">
-            <a:schemeClr val="accent1"/>
-          </a:fillRef>
-          <a:effectRef idx="2">
-            <a:schemeClr val="accent1"/>
-          </a:effectRef>
-          <a:fontRef idx="minor">
-            <a:schemeClr val="lt1"/>
-          </a:fontRef>
-        </p:style>
-        <p:txBody>
-          <a:bodyPr rtlCol="0" anchor="ctr"/>
-          <a:lstStyle/>
-          <a:p>
-            <a:pPr algn="ctr"/>
-          </a:p>
-        </p:txBody>
-      </p:sp>
-      <p:sp>
-        <p:nvSpPr>
-          <p:cNvPr id="7" name="Rounded Rectangle 6"/>
-          <p:cNvSpPr/>
-          <p:nvPr/>
-        </p:nvSpPr>
-        <p:spPr>
-          <a:xfrm>
-            <a:off x="7258050" y="2819400"/>
-            <a:ext cx="342900" cy="342900"/>
-          </a:xfrm>
-          <a:prstGeom prst="roundRect">
-            <a:avLst>
-              <a:gd name="adj" fmla="val 50000"/>
-            </a:avLst>
-          </a:prstGeom>
-          <a:solidFill>
-            <a:srgbClr val="EF4444"/>
-          </a:solidFill>
-          <a:ln>
-            <a:noFill/>
-          </a:ln>
-          <a:effectLst/>
-        </p:spPr>
-        <p:style>
-          <a:lnRef idx="1">
-            <a:schemeClr val="accent1"/>
-          </a:lnRef>
-          <a:fillRef idx="3">
-            <a:schemeClr val="accent1"/>
-          </a:fillRef>
-          <a:effectRef idx="2">
-            <a:schemeClr val="accent1"/>
-          </a:effectRef>
-          <a:fontRef idx="minor">
-            <a:schemeClr val="lt1"/>
-          </a:fontRef>
-        </p:style>
-        <p:txBody>
-          <a:bodyPr rtlCol="0" anchor="ctr"/>
-          <a:lstStyle/>
-          <a:p>
-            <a:pPr algn="ctr"/>
-          </a:p>
-        </p:txBody>
-      </p:sp>
-      <p:sp>
-        <p:nvSpPr>
-          <p:cNvPr id="8" name="Rounded Rectangle 7"/>
-          <p:cNvSpPr/>
-          <p:nvPr/>
-        </p:nvSpPr>
-        <p:spPr>
-          <a:xfrm>
-            <a:off x="9925050" y="2819400"/>
-            <a:ext cx="342900" cy="342900"/>
-          </a:xfrm>
-          <a:prstGeom prst="roundRect">
-            <a:avLst>
-              <a:gd name="adj" fmla="val 50000"/>
-            </a:avLst>
-          </a:prstGeom>
-          <a:solidFill>
-            <a:srgbClr val="10B981"/>
-          </a:solidFill>
-          <a:ln>
-            <a:noFill/>
-          </a:ln>
-          <a:effectLst/>
-        </p:spPr>
-        <p:style>
-          <a:lnRef idx="1">
-            <a:schemeClr val="accent1"/>
-          </a:lnRef>
-          <a:fillRef idx="3">
-            <a:schemeClr val="accent1"/>
-          </a:fillRef>
-          <a:effectRef idx="2">
-            <a:schemeClr val="accent1"/>
-          </a:effectRef>
-          <a:fontRef idx="minor">
-            <a:schemeClr val="lt1"/>
-          </a:fontRef>
-        </p:style>
-        <p:txBody>
-          <a:bodyPr rtlCol="0" anchor="ctr"/>
-          <a:lstStyle/>
-          <a:p>
-            <a:pPr algn="ctr"/>
-          </a:p>
-        </p:txBody>
-      </p:sp>
-      <p:sp>
-        <p:nvSpPr>
-          <p:cNvPr id="9" name="TextBox 8"/>
-          <p:cNvSpPr txBox="1"/>
-          <p:nvPr/>
-        </p:nvSpPr>
-        <p:spPr>
-          <a:xfrm>
-            <a:off x="1781175" y="2819400"/>
-            <a:ext cx="628650" cy="342900"/>
-          </a:xfrm>
-          <a:prstGeom prst="rect">
-            <a:avLst/>
-          </a:prstGeom>
-          <a:noFill/>
-        </p:spPr>
-        <p:txBody>
-          <a:bodyPr wrap="square" lIns="0" rIns="0" tIns="0" bIns="0" anchor="ctr">
-            <a:spAutoFit/>
-          </a:bodyPr>
-          <a:lstStyle/>
-          <a:p>
-            <a:pPr algn="ctr"/>
-            <a:r>
-              <a:rPr b="1" sz="1200" i="0" u="none">
-                <a:solidFill>
-                  <a:srgbClr val="FFFFFF"/>
-                </a:solidFill>
-                <a:latin typeface="Inter"/>
-              </a:rPr>
-              <a:t>1</a:t>
-            </a:r>
-          </a:p>
-        </p:txBody>
-      </p:sp>
-      <p:sp>
-        <p:nvSpPr>
-          <p:cNvPr id="10" name="TextBox 9"/>
-          <p:cNvSpPr txBox="1"/>
-          <p:nvPr/>
-        </p:nvSpPr>
-        <p:spPr>
-          <a:xfrm>
-            <a:off x="345281" y="3390900"/>
-            <a:ext cx="3500437" cy="266700"/>
-          </a:xfrm>
-          <a:prstGeom prst="rect">
-            <a:avLst/>
-          </a:prstGeom>
-          <a:noFill/>
-        </p:spPr>
-        <p:txBody>
-          <a:bodyPr wrap="none" lIns="0" rIns="0" tIns="0" bIns="0" anchor="t">
-            <a:spAutoFit/>
-          </a:bodyPr>
-          <a:lstStyle/>
-          <a:p>
-            <a:pPr algn="ctr"/>
-            <a:r>
-              <a:rPr b="1" sz="1650" i="0" u="none">
-                <a:solidFill>
-                  <a:srgbClr val="0F172A"/>
-                </a:solidFill>
-                <a:latin typeface="Outfit"/>
-              </a:rPr>
-              <a:t>Plan Journey</a:t>
-            </a:r>
-          </a:p>
-        </p:txBody>
-      </p:sp>
-      <p:sp>
-        <p:nvSpPr>
-          <p:cNvPr id="11" name="TextBox 10"/>
-          <p:cNvSpPr txBox="1"/>
-          <p:nvPr/>
-        </p:nvSpPr>
-        <p:spPr>
-          <a:xfrm>
-            <a:off x="428625" y="3733800"/>
-            <a:ext cx="3333750" cy="381000"/>
-          </a:xfrm>
-          <a:prstGeom prst="rect">
-            <a:avLst/>
-          </a:prstGeom>
-          <a:noFill/>
-        </p:spPr>
-        <p:txBody>
-          <a:bodyPr wrap="square" lIns="0" rIns="0" tIns="0" bIns="0" anchor="t">
-            <a:spAutoFit/>
-          </a:bodyPr>
-          <a:lstStyle/>
-          <a:p>
-            <a:pPr algn="ctr"/>
-            <a:r>
-              <a:rPr b="0" sz="1200" i="0" u="none">
-                <a:solidFill>
-                  <a:srgbClr val="64748B"/>
-                </a:solidFill>
-                <a:latin typeface="Inter"/>
-              </a:rPr>
-              <a:t>Origin, destination, and departure time set.</a:t>
-            </a:r>
-          </a:p>
-        </p:txBody>
-      </p:sp>
-      <p:sp>
-        <p:nvSpPr>
-          <p:cNvPr id="12" name="TextBox 11"/>
-          <p:cNvSpPr txBox="1"/>
-          <p:nvPr/>
-        </p:nvSpPr>
-        <p:spPr>
-          <a:xfrm>
-            <a:off x="4448175" y="2819400"/>
-            <a:ext cx="628650" cy="342900"/>
-          </a:xfrm>
-          <a:prstGeom prst="rect">
-            <a:avLst/>
-          </a:prstGeom>
-          <a:noFill/>
-        </p:spPr>
-        <p:txBody>
-          <a:bodyPr wrap="square" lIns="0" rIns="0" tIns="0" bIns="0" anchor="ctr">
-            <a:spAutoFit/>
-          </a:bodyPr>
-          <a:lstStyle/>
-          <a:p>
-            <a:pPr algn="ctr"/>
-            <a:r>
-              <a:rPr b="1" sz="1200" i="0" u="none">
-                <a:solidFill>
-                  <a:srgbClr val="FFFFFF"/>
-                </a:solidFill>
-                <a:latin typeface="Inter"/>
-              </a:rPr>
-              <a:t>2</a:t>
-            </a:r>
-          </a:p>
-        </p:txBody>
-      </p:sp>
-      <p:sp>
-        <p:nvSpPr>
-          <p:cNvPr id="13" name="TextBox 12"/>
-          <p:cNvSpPr txBox="1"/>
-          <p:nvPr/>
-        </p:nvSpPr>
-        <p:spPr>
-          <a:xfrm>
-            <a:off x="3012281" y="3390900"/>
-            <a:ext cx="3500437" cy="266700"/>
-          </a:xfrm>
-          <a:prstGeom prst="rect">
-            <a:avLst/>
-          </a:prstGeom>
-          <a:noFill/>
-        </p:spPr>
-        <p:txBody>
-          <a:bodyPr wrap="none" lIns="0" rIns="0" tIns="0" bIns="0" anchor="t">
-            <a:spAutoFit/>
-          </a:bodyPr>
-          <a:lstStyle/>
-          <a:p>
-            <a:pPr algn="ctr"/>
-            <a:r>
-              <a:rPr b="1" sz="1650" i="0" u="none">
-                <a:solidFill>
-                  <a:srgbClr val="0F172A"/>
-                </a:solidFill>
-                <a:latin typeface="Outfit"/>
-              </a:rPr>
-              <a:t>Sync Schedules</a:t>
-            </a:r>
-          </a:p>
-        </p:txBody>
-      </p:sp>
-      <p:sp>
-        <p:nvSpPr>
-          <p:cNvPr id="14" name="TextBox 13"/>
-          <p:cNvSpPr txBox="1"/>
-          <p:nvPr/>
-        </p:nvSpPr>
-        <p:spPr>
-          <a:xfrm>
-            <a:off x="3095625" y="3733800"/>
-            <a:ext cx="3333750" cy="190500"/>
-          </a:xfrm>
-          <a:prstGeom prst="rect">
-            <a:avLst/>
-          </a:prstGeom>
-          <a:noFill/>
-        </p:spPr>
-        <p:txBody>
-          <a:bodyPr wrap="none" lIns="0" rIns="0" tIns="0" bIns="0" anchor="t">
-            <a:spAutoFit/>
-          </a:bodyPr>
-          <a:lstStyle/>
-          <a:p>
-            <a:pPr algn="ctr"/>
-            <a:r>
-              <a:rPr b="0" sz="1200" i="0" u="none">
-                <a:solidFill>
-                  <a:srgbClr val="64748B"/>
-                </a:solidFill>
-                <a:latin typeface="Inter"/>
-              </a:rPr>
-              <a:t>Cross-reference baseline timetables.</a:t>
-            </a:r>
-          </a:p>
-        </p:txBody>
-      </p:sp>
-      <p:sp>
-        <p:nvSpPr>
-          <p:cNvPr id="15" name="TextBox 14"/>
-          <p:cNvSpPr txBox="1"/>
-          <p:nvPr/>
-        </p:nvSpPr>
-        <p:spPr>
-          <a:xfrm>
-            <a:off x="7115175" y="2819400"/>
-            <a:ext cx="628650" cy="342900"/>
-          </a:xfrm>
-          <a:prstGeom prst="rect">
-            <a:avLst/>
-          </a:prstGeom>
-          <a:noFill/>
-        </p:spPr>
-        <p:txBody>
-          <a:bodyPr wrap="square" lIns="0" rIns="0" tIns="0" bIns="0" anchor="ctr">
-            <a:spAutoFit/>
-          </a:bodyPr>
-          <a:lstStyle/>
-          <a:p>
-            <a:pPr algn="ctr"/>
-            <a:r>
-              <a:rPr b="1" sz="1200" i="0" u="none">
-                <a:solidFill>
-                  <a:srgbClr val="FFFFFF"/>
-                </a:solidFill>
-                <a:latin typeface="Inter"/>
-              </a:rPr>
-              <a:t>3</a:t>
-            </a:r>
-          </a:p>
-        </p:txBody>
-      </p:sp>
-      <p:sp>
-        <p:nvSpPr>
-          <p:cNvPr id="16" name="TextBox 15"/>
-          <p:cNvSpPr txBox="1"/>
-          <p:nvPr/>
-        </p:nvSpPr>
-        <p:spPr>
-          <a:xfrm>
-            <a:off x="5679281" y="3390900"/>
-            <a:ext cx="3500437" cy="266700"/>
-          </a:xfrm>
-          <a:prstGeom prst="rect">
-            <a:avLst/>
-          </a:prstGeom>
-          <a:noFill/>
-        </p:spPr>
-        <p:txBody>
-          <a:bodyPr wrap="none" lIns="0" rIns="0" tIns="0" bIns="0" anchor="t">
-            <a:spAutoFit/>
-          </a:bodyPr>
-          <a:lstStyle/>
-          <a:p>
-            <a:pPr algn="ctr"/>
-            <a:r>
-              <a:rPr b="1" sz="1650" i="0" u="none">
-                <a:solidFill>
-                  <a:srgbClr val="0F172A"/>
-                </a:solidFill>
-                <a:latin typeface="Outfit"/>
-              </a:rPr>
-              <a:t>Flag Risks</a:t>
-            </a:r>
-          </a:p>
-        </p:txBody>
-      </p:sp>
-      <p:sp>
-        <p:nvSpPr>
-          <p:cNvPr id="17" name="TextBox 16"/>
-          <p:cNvSpPr txBox="1"/>
-          <p:nvPr/>
-        </p:nvSpPr>
-        <p:spPr>
-          <a:xfrm>
-            <a:off x="5762625" y="3733800"/>
-            <a:ext cx="3333750" cy="381000"/>
-          </a:xfrm>
-          <a:prstGeom prst="rect">
-            <a:avLst/>
-          </a:prstGeom>
-          <a:noFill/>
-        </p:spPr>
-        <p:txBody>
-          <a:bodyPr wrap="square" lIns="0" rIns="0" tIns="0" bIns="0" anchor="t">
-            <a:spAutoFit/>
-          </a:bodyPr>
-          <a:lstStyle/>
-          <a:p>
-            <a:pPr algn="ctr"/>
-            <a:r>
-              <a:rPr b="0" sz="1200" i="0" u="none">
-                <a:solidFill>
-                  <a:srgbClr val="64748B"/>
-                </a:solidFill>
-                <a:latin typeface="Inter"/>
-              </a:rPr>
-              <a:t>Detect overlapping ETAs via community data.</a:t>
-            </a:r>
-          </a:p>
-        </p:txBody>
-      </p:sp>
-      <p:sp>
-        <p:nvSpPr>
-          <p:cNvPr id="18" name="TextBox 17"/>
-          <p:cNvSpPr txBox="1"/>
-          <p:nvPr/>
-        </p:nvSpPr>
-        <p:spPr>
-          <a:xfrm>
-            <a:off x="9782175" y="2819400"/>
-            <a:ext cx="628650" cy="342900"/>
-          </a:xfrm>
-          <a:prstGeom prst="rect">
-            <a:avLst/>
-          </a:prstGeom>
-          <a:noFill/>
-        </p:spPr>
-        <p:txBody>
-          <a:bodyPr wrap="square" lIns="0" rIns="0" tIns="0" bIns="0" anchor="ctr">
-            <a:spAutoFit/>
-          </a:bodyPr>
-          <a:lstStyle/>
-          <a:p>
-            <a:pPr algn="ctr"/>
-            <a:r>
-              <a:rPr b="1" sz="1200" i="0" u="none">
-                <a:solidFill>
-                  <a:srgbClr val="F8FAFC"/>
-                </a:solidFill>
-                <a:latin typeface="Inter"/>
-              </a:rPr>
-              <a:t>4</a:t>
-            </a:r>
-          </a:p>
-        </p:txBody>
-      </p:sp>
-      <p:sp>
-        <p:nvSpPr>
-          <p:cNvPr id="19" name="TextBox 18"/>
-          <p:cNvSpPr txBox="1"/>
-          <p:nvPr/>
-        </p:nvSpPr>
-        <p:spPr>
-          <a:xfrm>
-            <a:off x="8346281" y="3390900"/>
-            <a:ext cx="3500437" cy="266700"/>
-          </a:xfrm>
-          <a:prstGeom prst="rect">
-            <a:avLst/>
-          </a:prstGeom>
-          <a:noFill/>
-        </p:spPr>
-        <p:txBody>
-          <a:bodyPr wrap="none" lIns="0" rIns="0" tIns="0" bIns="0" anchor="t">
-            <a:spAutoFit/>
-          </a:bodyPr>
-          <a:lstStyle/>
-          <a:p>
-            <a:pPr algn="ctr"/>
-            <a:r>
-              <a:rPr b="1" sz="1650" i="0" u="none">
-                <a:solidFill>
-                  <a:srgbClr val="0F172A"/>
-                </a:solidFill>
-                <a:latin typeface="Outfit"/>
-              </a:rPr>
-              <a:t>Suggest Fallback</a:t>
-            </a:r>
-          </a:p>
-        </p:txBody>
-      </p:sp>
-      <p:sp>
-        <p:nvSpPr>
-          <p:cNvPr id="20" name="TextBox 19"/>
-          <p:cNvSpPr txBox="1"/>
-          <p:nvPr/>
-        </p:nvSpPr>
-        <p:spPr>
-          <a:xfrm>
-            <a:off x="8429625" y="3733800"/>
-            <a:ext cx="3333750" cy="381000"/>
-          </a:xfrm>
-          <a:prstGeom prst="rect">
-            <a:avLst/>
-          </a:prstGeom>
-          <a:noFill/>
-        </p:spPr>
-        <p:txBody>
-          <a:bodyPr wrap="square" lIns="0" rIns="0" tIns="0" bIns="0" anchor="t">
-            <a:spAutoFit/>
-          </a:bodyPr>
-          <a:lstStyle/>
-          <a:p>
-            <a:pPr algn="ctr"/>
-            <a:r>
-              <a:rPr b="0" sz="1200" i="0" u="none">
-                <a:solidFill>
-                  <a:srgbClr val="64748B"/>
-                </a:solidFill>
-                <a:latin typeface="Inter"/>
-              </a:rPr>
-              <a:t>Provide immediate alternative multimodal path.</a:t>
-            </a:r>
-          </a:p>
-        </p:txBody>
-      </p:sp>
-    </p:spTree>
-  </p:cSld>
-  <p:clrMapOvr>
-    <a:masterClrMapping/>
-  </p:clrMapOvr>
-</p:sld>
-</file>
-
-<file path=ppt/slides/slide7.xml><?xml version="1.0" encoding="utf-8"?>
-<p:sld xmlns:a="http://schemas.openxmlformats.org/drawingml/2006/main" xmlns:p="http://schemas.openxmlformats.org/presentationml/2006/main" xmlns:r="http://schemas.openxmlformats.org/officeDocument/2006/relationships">
+<file path=ppt/slides/slide9.xml><?xml version="1.0" encoding="utf-8"?>
+<p:sld xmlns:a="http://schemas.openxmlformats.org/drawingml/2006/main" xmlns:r="http://schemas.openxmlformats.org/officeDocument/2006/relationships" xmlns:p="http://schemas.openxmlformats.org/presentationml/2006/main">
   <p:cSld>
     <p:bg>
       <p:bgPr>
@@ -7463,10 +8634,152 @@
         <p:cNvGrpSpPr/>
         <p:nvPr/>
       </p:nvGrpSpPr>
-      <p:grpSpPr/>
+      <p:grpSpPr>
+        <a:xfrm>
+          <a:off x="0" y="0"/>
+          <a:ext cx="0" cy="0"/>
+          <a:chOff x="0" y="0"/>
+          <a:chExt cx="0" cy="0"/>
+        </a:xfrm>
+      </p:grpSpPr>
+      <p:sp>
+        <p:nvSpPr>
+          <p:cNvPr id="2" name="Rectangle 1"/>
+          <p:cNvSpPr/>
+          <p:nvPr/>
+        </p:nvSpPr>
+        <p:spPr>
+          <a:xfrm>
+            <a:off x="0" y="3429000"/>
+            <a:ext cx="5334000" cy="3429000"/>
+          </a:xfrm>
+          <a:prstGeom prst="rect">
+            <a:avLst/>
+          </a:prstGeom>
+          <a:solidFill>
+            <a:srgbClr val="0F172A"/>
+          </a:solidFill>
+          <a:ln>
+            <a:noFill/>
+          </a:ln>
+          <a:effectLst/>
+        </p:spPr>
+        <p:style>
+          <a:lnRef idx="1">
+            <a:schemeClr val="accent1"/>
+          </a:lnRef>
+          <a:fillRef idx="3">
+            <a:schemeClr val="accent1"/>
+          </a:fillRef>
+          <a:effectRef idx="2">
+            <a:schemeClr val="accent1"/>
+          </a:effectRef>
+          <a:fontRef idx="minor">
+            <a:schemeClr val="lt1"/>
+          </a:fontRef>
+        </p:style>
+        <p:txBody>
+          <a:bodyPr rtlCol="0" anchor="ctr"/>
+          <a:lstStyle/>
+          <a:p>
+            <a:pPr algn="ctr"/>
+            <a:endParaRPr/>
+          </a:p>
+        </p:txBody>
+      </p:sp>
+      <p:sp>
+        <p:nvSpPr>
+          <p:cNvPr id="3" name="Rectangle 2"/>
+          <p:cNvSpPr/>
+          <p:nvPr/>
+        </p:nvSpPr>
+        <p:spPr>
+          <a:xfrm>
+            <a:off x="6096000" y="4165252"/>
+            <a:ext cx="5334000" cy="1133475"/>
+          </a:xfrm>
+          <a:prstGeom prst="rect">
+            <a:avLst/>
+          </a:prstGeom>
+          <a:solidFill>
+            <a:srgbClr val="1E293B"/>
+          </a:solidFill>
+          <a:ln>
+            <a:noFill/>
+          </a:ln>
+          <a:effectLst/>
+        </p:spPr>
+        <p:style>
+          <a:lnRef idx="1">
+            <a:schemeClr val="accent1"/>
+          </a:lnRef>
+          <a:fillRef idx="3">
+            <a:schemeClr val="accent1"/>
+          </a:fillRef>
+          <a:effectRef idx="2">
+            <a:schemeClr val="accent1"/>
+          </a:effectRef>
+          <a:fontRef idx="minor">
+            <a:schemeClr val="lt1"/>
+          </a:fontRef>
+        </p:style>
+        <p:txBody>
+          <a:bodyPr rtlCol="0" anchor="ctr"/>
+          <a:lstStyle/>
+          <a:p>
+            <a:pPr algn="ctr"/>
+            <a:endParaRPr/>
+          </a:p>
+        </p:txBody>
+      </p:sp>
+      <p:sp>
+        <p:nvSpPr>
+          <p:cNvPr id="4" name="Rectangle 3"/>
+          <p:cNvSpPr/>
+          <p:nvPr/>
+        </p:nvSpPr>
+        <p:spPr>
+          <a:xfrm>
+            <a:off x="6096000" y="4165252"/>
+            <a:ext cx="38100" cy="1133475"/>
+          </a:xfrm>
+          <a:prstGeom prst="rect">
+            <a:avLst/>
+          </a:prstGeom>
+          <a:solidFill>
+            <a:srgbClr val="EF4444"/>
+          </a:solidFill>
+          <a:ln>
+            <a:noFill/>
+          </a:ln>
+          <a:effectLst/>
+        </p:spPr>
+        <p:style>
+          <a:lnRef idx="1">
+            <a:schemeClr val="accent1"/>
+          </a:lnRef>
+          <a:fillRef idx="3">
+            <a:schemeClr val="accent1"/>
+          </a:fillRef>
+          <a:effectRef idx="2">
+            <a:schemeClr val="accent1"/>
+          </a:effectRef>
+          <a:fontRef idx="minor">
+            <a:schemeClr val="lt1"/>
+          </a:fontRef>
+        </p:style>
+        <p:txBody>
+          <a:bodyPr rtlCol="0" anchor="ctr"/>
+          <a:lstStyle/>
+          <a:p>
+            <a:pPr algn="ctr"/>
+            <a:endParaRPr/>
+          </a:p>
+        </p:txBody>
+      </p:sp>
       <p:pic>
         <p:nvPicPr>
-          <p:cNvPr id="2" name="Picture 1" descr="image.png"/>
+          <p:cNvPr id="5" name="Picture 4" descr="image.png"/>
           <p:cNvPicPr>
             <a:picLocks noChangeAspect="1"/>
           </p:cNvPicPr>
@@ -7480,72 +8793,24 @@
         </p:blipFill>
         <p:spPr>
           <a:xfrm>
-            <a:off x="762000" y="3262312"/>
-            <a:ext cx="533400" cy="533400"/>
+            <a:off x="0" y="0"/>
+            <a:ext cx="5334000" cy="6858000"/>
           </a:xfrm>
           <a:prstGeom prst="rect">
             <a:avLst/>
           </a:prstGeom>
         </p:spPr>
       </p:pic>
-      <p:pic>
-        <p:nvPicPr>
-          <p:cNvPr id="3" name="Picture 2" descr="image.png"/>
-          <p:cNvPicPr>
-            <a:picLocks noChangeAspect="1"/>
-          </p:cNvPicPr>
-          <p:nvPr/>
-        </p:nvPicPr>
-        <p:blipFill>
-          <a:blip r:embed="rId3"/>
-          <a:stretch>
-            <a:fillRect/>
-          </a:stretch>
-        </p:blipFill>
-        <p:spPr>
-          <a:xfrm>
-            <a:off x="4445049" y="3262312"/>
-            <a:ext cx="666750" cy="533400"/>
-          </a:xfrm>
-          <a:prstGeom prst="rect">
-            <a:avLst/>
-          </a:prstGeom>
-        </p:spPr>
-      </p:pic>
-      <p:pic>
-        <p:nvPicPr>
-          <p:cNvPr id="4" name="Picture 3" descr="image.png"/>
-          <p:cNvPicPr>
-            <a:picLocks noChangeAspect="1"/>
-          </p:cNvPicPr>
-          <p:nvPr/>
-        </p:nvPicPr>
-        <p:blipFill>
-          <a:blip r:embed="rId4"/>
-          <a:stretch>
-            <a:fillRect/>
-          </a:stretch>
-        </p:blipFill>
-        <p:spPr>
-          <a:xfrm>
-            <a:off x="8128099" y="3262312"/>
-            <a:ext cx="533400" cy="533400"/>
-          </a:xfrm>
-          <a:prstGeom prst="rect">
-            <a:avLst/>
-          </a:prstGeom>
-        </p:spPr>
-      </p:pic>
-      <p:sp>
-        <p:nvSpPr>
-          <p:cNvPr id="5" name="TextBox 4"/>
+      <p:sp>
+        <p:nvSpPr>
+          <p:cNvPr id="6" name="TextBox 5"/>
           <p:cNvSpPr txBox="1"/>
           <p:nvPr/>
         </p:nvSpPr>
         <p:spPr>
           <a:xfrm>
-            <a:off x="762000" y="1738312"/>
-            <a:ext cx="11430000" cy="190500"/>
+            <a:off x="6096000" y="1559272"/>
+            <a:ext cx="6096000" cy="190500"/>
           </a:xfrm>
           <a:prstGeom prst="rect">
             <a:avLst/>
@@ -7553,1797 +8818,14 @@
           <a:noFill/>
         </p:spPr>
         <p:txBody>
-          <a:bodyPr wrap="none" lIns="0" rIns="0" tIns="0" bIns="0" anchor="t">
+          <a:bodyPr wrap="none" lIns="0" tIns="0" rIns="0" bIns="0" anchor="t">
             <a:spAutoFit/>
           </a:bodyPr>
           <a:lstStyle/>
           <a:p>
             <a:pPr algn="l"/>
             <a:r>
-              <a:rPr b="1" sz="1200" i="0" u="none">
-                <a:solidFill>
-                  <a:srgbClr val="3B82F6"/>
-                </a:solidFill>
-                <a:latin typeface="Outfit"/>
-              </a:rPr>
-              <a:t>06 / TECHNOLOGY &amp; TOOLS</a:t>
-            </a:r>
-          </a:p>
-        </p:txBody>
-      </p:sp>
-      <p:sp>
-        <p:nvSpPr>
-          <p:cNvPr id="6" name="TextBox 5"/>
-          <p:cNvSpPr txBox="1"/>
-          <p:nvPr/>
-        </p:nvSpPr>
-        <p:spPr>
-          <a:xfrm>
-            <a:off x="762000" y="2081212"/>
-            <a:ext cx="11430000" cy="571500"/>
-          </a:xfrm>
-          <a:prstGeom prst="rect">
-            <a:avLst/>
-          </a:prstGeom>
-          <a:noFill/>
-        </p:spPr>
-        <p:txBody>
-          <a:bodyPr wrap="none" lIns="0" rIns="0" tIns="0" bIns="0" anchor="t">
-            <a:spAutoFit/>
-          </a:bodyPr>
-          <a:lstStyle/>
-          <a:p>
-            <a:pPr algn="l"/>
-            <a:r>
-              <a:rPr b="1" sz="3600" i="0" u="none">
-                <a:solidFill>
-                  <a:srgbClr val="F8FAFC"/>
-                </a:solidFill>
-                <a:latin typeface="Outfit"/>
-              </a:rPr>
-              <a:t>Modern, stateless prototype architecture.</a:t>
-            </a:r>
-          </a:p>
-        </p:txBody>
-      </p:sp>
-      <p:sp>
-        <p:nvSpPr>
-          <p:cNvPr id="7" name="TextBox 6"/>
-          <p:cNvSpPr txBox="1"/>
-          <p:nvPr/>
-        </p:nvSpPr>
-        <p:spPr>
-          <a:xfrm>
-            <a:off x="762000" y="4024312"/>
-            <a:ext cx="4333940" cy="381000"/>
-          </a:xfrm>
-          <a:prstGeom prst="rect">
-            <a:avLst/>
-          </a:prstGeom>
-          <a:noFill/>
-        </p:spPr>
-        <p:txBody>
-          <a:bodyPr wrap="none" lIns="0" rIns="0" tIns="0" bIns="0" anchor="t">
-            <a:spAutoFit/>
-          </a:bodyPr>
-          <a:lstStyle/>
-          <a:p>
-            <a:pPr algn="l"/>
-            <a:r>
-              <a:rPr b="1" sz="2400" i="0" u="none">
-                <a:solidFill>
-                  <a:srgbClr val="F8FAFC"/>
-                </a:solidFill>
-                <a:latin typeface="Outfit"/>
-              </a:rPr>
-              <a:t>React Frontend</a:t>
-            </a:r>
-          </a:p>
-        </p:txBody>
-      </p:sp>
-      <p:sp>
-        <p:nvSpPr>
-          <p:cNvPr id="8" name="TextBox 7"/>
-          <p:cNvSpPr txBox="1"/>
-          <p:nvPr/>
-        </p:nvSpPr>
-        <p:spPr>
-          <a:xfrm>
-            <a:off x="762000" y="4519612"/>
-            <a:ext cx="3397299" cy="600075"/>
-          </a:xfrm>
-          <a:prstGeom prst="rect">
-            <a:avLst/>
-          </a:prstGeom>
-          <a:noFill/>
-        </p:spPr>
-        <p:txBody>
-          <a:bodyPr wrap="square" lIns="0" rIns="0" tIns="0" bIns="0" anchor="t">
-            <a:spAutoFit/>
-          </a:bodyPr>
-          <a:lstStyle/>
-          <a:p>
-            <a:pPr algn="l"/>
-            <a:r>
-              <a:rPr b="0" sz="1350" i="0" u="none">
-                <a:solidFill>
-                  <a:srgbClr val="94A3B8"/>
-                </a:solidFill>
-                <a:latin typeface="Inter"/>
-              </a:rPr>
-              <a:t>Responsive dashboard. LocalStorage state management for hackathon demo limits.</a:t>
-            </a:r>
-          </a:p>
-        </p:txBody>
-      </p:sp>
-      <p:sp>
-        <p:nvSpPr>
-          <p:cNvPr id="9" name="TextBox 8"/>
-          <p:cNvSpPr txBox="1"/>
-          <p:nvPr/>
-        </p:nvSpPr>
-        <p:spPr>
-          <a:xfrm>
-            <a:off x="4445049" y="4024312"/>
-            <a:ext cx="4333940" cy="381000"/>
-          </a:xfrm>
-          <a:prstGeom prst="rect">
-            <a:avLst/>
-          </a:prstGeom>
-          <a:noFill/>
-        </p:spPr>
-        <p:txBody>
-          <a:bodyPr wrap="none" lIns="0" rIns="0" tIns="0" bIns="0" anchor="t">
-            <a:spAutoFit/>
-          </a:bodyPr>
-          <a:lstStyle/>
-          <a:p>
-            <a:pPr algn="l"/>
-            <a:r>
-              <a:rPr b="1" sz="2400" i="0" u="none">
-                <a:solidFill>
-                  <a:srgbClr val="F8FAFC"/>
-                </a:solidFill>
-                <a:latin typeface="Outfit"/>
-              </a:rPr>
-              <a:t>TypeScript</a:t>
-            </a:r>
-          </a:p>
-        </p:txBody>
-      </p:sp>
-      <p:sp>
-        <p:nvSpPr>
-          <p:cNvPr id="10" name="TextBox 9"/>
-          <p:cNvSpPr txBox="1"/>
-          <p:nvPr/>
-        </p:nvSpPr>
-        <p:spPr>
-          <a:xfrm>
-            <a:off x="4445049" y="4519612"/>
-            <a:ext cx="3397299" cy="400050"/>
-          </a:xfrm>
-          <a:prstGeom prst="rect">
-            <a:avLst/>
-          </a:prstGeom>
-          <a:noFill/>
-        </p:spPr>
-        <p:txBody>
-          <a:bodyPr wrap="square" lIns="0" rIns="0" tIns="0" bIns="0" anchor="t">
-            <a:spAutoFit/>
-          </a:bodyPr>
-          <a:lstStyle/>
-          <a:p>
-            <a:pPr algn="l"/>
-            <a:r>
-              <a:rPr b="0" sz="1350" i="0" u="none">
-                <a:solidFill>
-                  <a:srgbClr val="94A3B8"/>
-                </a:solidFill>
-                <a:latin typeface="Inter"/>
-              </a:rPr>
-              <a:t>Strict type safety for complex multimodal route data interfaces.</a:t>
-            </a:r>
-          </a:p>
-        </p:txBody>
-      </p:sp>
-      <p:sp>
-        <p:nvSpPr>
-          <p:cNvPr id="11" name="TextBox 10"/>
-          <p:cNvSpPr txBox="1"/>
-          <p:nvPr/>
-        </p:nvSpPr>
-        <p:spPr>
-          <a:xfrm>
-            <a:off x="8128099" y="4024312"/>
-            <a:ext cx="4063900" cy="381000"/>
-          </a:xfrm>
-          <a:prstGeom prst="rect">
-            <a:avLst/>
-          </a:prstGeom>
-          <a:noFill/>
-        </p:spPr>
-        <p:txBody>
-          <a:bodyPr wrap="none" lIns="0" rIns="0" tIns="0" bIns="0" anchor="t">
-            <a:spAutoFit/>
-          </a:bodyPr>
-          <a:lstStyle/>
-          <a:p>
-            <a:pPr algn="l"/>
-            <a:r>
-              <a:rPr b="1" sz="2400" i="0" u="none">
-                <a:solidFill>
-                  <a:srgbClr val="F8FAFC"/>
-                </a:solidFill>
-                <a:latin typeface="Outfit"/>
-              </a:rPr>
-              <a:t>Express Node</a:t>
-            </a:r>
-          </a:p>
-        </p:txBody>
-      </p:sp>
-      <p:sp>
-        <p:nvSpPr>
-          <p:cNvPr id="12" name="TextBox 11"/>
-          <p:cNvSpPr txBox="1"/>
-          <p:nvPr/>
-        </p:nvSpPr>
-        <p:spPr>
-          <a:xfrm>
-            <a:off x="8128099" y="4519612"/>
-            <a:ext cx="3397299" cy="400050"/>
-          </a:xfrm>
-          <a:prstGeom prst="rect">
-            <a:avLst/>
-          </a:prstGeom>
-          <a:noFill/>
-        </p:spPr>
-        <p:txBody>
-          <a:bodyPr wrap="square" lIns="0" rIns="0" tIns="0" bIns="0" anchor="t">
-            <a:spAutoFit/>
-          </a:bodyPr>
-          <a:lstStyle/>
-          <a:p>
-            <a:pPr algn="l"/>
-            <a:r>
-              <a:rPr b="0" sz="1350" i="0" u="none">
-                <a:solidFill>
-                  <a:srgbClr val="94A3B8"/>
-                </a:solidFill>
-                <a:latin typeface="Inter"/>
-              </a:rPr>
-              <a:t>Lightweight API endpoints processing demo transit schedules and risk logic.</a:t>
-            </a:r>
-          </a:p>
-        </p:txBody>
-      </p:sp>
-    </p:spTree>
-  </p:cSld>
-  <p:clrMapOvr>
-    <a:masterClrMapping/>
-  </p:clrMapOvr>
-</p:sld>
-</file>
-
-<file path=ppt/slides/slide8.xml><?xml version="1.0" encoding="utf-8"?>
-<p:sld xmlns:a="http://schemas.openxmlformats.org/drawingml/2006/main" xmlns:p="http://schemas.openxmlformats.org/presentationml/2006/main" xmlns:r="http://schemas.openxmlformats.org/officeDocument/2006/relationships">
-  <p:cSld>
-    <p:bg>
-      <p:bgPr>
-        <a:solidFill>
-          <a:srgbClr val="F1F5F9"/>
-        </a:solidFill>
-        <a:effectLst/>
-      </p:bgPr>
-    </p:bg>
-    <p:spTree>
-      <p:nvGrpSpPr>
-        <p:cNvPr id="1" name=""/>
-        <p:cNvGrpSpPr/>
-        <p:nvPr/>
-      </p:nvGrpSpPr>
-      <p:grpSpPr/>
-      <p:sp>
-        <p:nvSpPr>
-          <p:cNvPr id="2" name="Rounded Rectangle 1"/>
-          <p:cNvSpPr/>
-          <p:nvPr/>
-        </p:nvSpPr>
-        <p:spPr>
-          <a:xfrm>
-            <a:off x="609600" y="800100"/>
-            <a:ext cx="10972800" cy="5600700"/>
-          </a:xfrm>
-          <a:prstGeom prst="roundRect">
-            <a:avLst>
-              <a:gd name="adj" fmla="val 2721"/>
-            </a:avLst>
-          </a:prstGeom>
-          <a:solidFill>
-            <a:srgbClr val="0F172A"/>
-          </a:solidFill>
-          <a:ln w="9525">
-            <a:solidFill>
-              <a:srgbClr val="334155"/>
-            </a:solidFill>
-          </a:ln>
-          <a:effectLst/>
-        </p:spPr>
-        <p:style>
-          <a:lnRef idx="1">
-            <a:schemeClr val="accent1"/>
-          </a:lnRef>
-          <a:fillRef idx="3">
-            <a:schemeClr val="accent1"/>
-          </a:fillRef>
-          <a:effectRef idx="2">
-            <a:schemeClr val="accent1"/>
-          </a:effectRef>
-          <a:fontRef idx="minor">
-            <a:schemeClr val="lt1"/>
-          </a:fontRef>
-        </p:style>
-        <p:txBody>
-          <a:bodyPr rtlCol="0" anchor="ctr"/>
-          <a:lstStyle/>
-          <a:p>
-            <a:pPr algn="ctr"/>
-          </a:p>
-        </p:txBody>
-      </p:sp>
-      <p:sp>
-        <p:nvSpPr>
-          <p:cNvPr id="3" name="Rectangle 2"/>
-          <p:cNvSpPr/>
-          <p:nvPr/>
-        </p:nvSpPr>
-        <p:spPr>
-          <a:xfrm>
-            <a:off x="619125" y="809625"/>
-            <a:ext cx="3429000" cy="5581650"/>
-          </a:xfrm>
-          <a:prstGeom prst="rect">
-            <a:avLst/>
-          </a:prstGeom>
-          <a:solidFill>
-            <a:srgbClr val="1E293B"/>
-          </a:solidFill>
-          <a:ln>
-            <a:noFill/>
-          </a:ln>
-          <a:effectLst/>
-        </p:spPr>
-        <p:style>
-          <a:lnRef idx="1">
-            <a:schemeClr val="accent1"/>
-          </a:lnRef>
-          <a:fillRef idx="3">
-            <a:schemeClr val="accent1"/>
-          </a:fillRef>
-          <a:effectRef idx="2">
-            <a:schemeClr val="accent1"/>
-          </a:effectRef>
-          <a:fontRef idx="minor">
-            <a:schemeClr val="lt1"/>
-          </a:fontRef>
-        </p:style>
-        <p:txBody>
-          <a:bodyPr rtlCol="0" anchor="ctr"/>
-          <a:lstStyle/>
-          <a:p>
-            <a:pPr algn="ctr"/>
-          </a:p>
-        </p:txBody>
-      </p:sp>
-      <p:sp>
-        <p:nvSpPr>
-          <p:cNvPr id="4" name="Rectangle 3"/>
-          <p:cNvSpPr/>
-          <p:nvPr/>
-        </p:nvSpPr>
-        <p:spPr>
-          <a:xfrm>
-            <a:off x="4048125" y="809625"/>
-            <a:ext cx="7524750" cy="5581650"/>
-          </a:xfrm>
-          <a:prstGeom prst="rect">
-            <a:avLst/>
-          </a:prstGeom>
-          <a:solidFill>
-            <a:srgbClr val="0F172A"/>
-          </a:solidFill>
-          <a:ln>
-            <a:noFill/>
-          </a:ln>
-          <a:effectLst/>
-        </p:spPr>
-        <p:style>
-          <a:lnRef idx="1">
-            <a:schemeClr val="accent1"/>
-          </a:lnRef>
-          <a:fillRef idx="3">
-            <a:schemeClr val="accent1"/>
-          </a:fillRef>
-          <a:effectRef idx="2">
-            <a:schemeClr val="accent1"/>
-          </a:effectRef>
-          <a:fontRef idx="minor">
-            <a:schemeClr val="lt1"/>
-          </a:fontRef>
-        </p:style>
-        <p:txBody>
-          <a:bodyPr rtlCol="0" anchor="ctr"/>
-          <a:lstStyle/>
-          <a:p>
-            <a:pPr algn="ctr"/>
-          </a:p>
-        </p:txBody>
-      </p:sp>
-      <p:sp>
-        <p:nvSpPr>
-          <p:cNvPr id="5" name="Rounded Rectangle 4"/>
-          <p:cNvSpPr/>
-          <p:nvPr/>
-        </p:nvSpPr>
-        <p:spPr>
-          <a:xfrm>
-            <a:off x="923925" y="5381625"/>
-            <a:ext cx="2819400" cy="704850"/>
-          </a:xfrm>
-          <a:prstGeom prst="roundRect">
-            <a:avLst>
-              <a:gd name="adj" fmla="val 16216"/>
-            </a:avLst>
-          </a:prstGeom>
-          <a:solidFill>
-            <a:srgbClr val="334155"/>
-          </a:solidFill>
-          <a:ln>
-            <a:noFill/>
-          </a:ln>
-          <a:effectLst/>
-        </p:spPr>
-        <p:style>
-          <a:lnRef idx="1">
-            <a:schemeClr val="accent1"/>
-          </a:lnRef>
-          <a:fillRef idx="3">
-            <a:schemeClr val="accent1"/>
-          </a:fillRef>
-          <a:effectRef idx="2">
-            <a:schemeClr val="accent1"/>
-          </a:effectRef>
-          <a:fontRef idx="minor">
-            <a:schemeClr val="lt1"/>
-          </a:fontRef>
-        </p:style>
-        <p:txBody>
-          <a:bodyPr rtlCol="0" anchor="ctr"/>
-          <a:lstStyle/>
-          <a:p>
-            <a:pPr algn="ctr"/>
-          </a:p>
-        </p:txBody>
-      </p:sp>
-      <p:sp>
-        <p:nvSpPr>
-          <p:cNvPr id="6" name="Rounded Rectangle 5"/>
-          <p:cNvSpPr/>
-          <p:nvPr/>
-        </p:nvSpPr>
-        <p:spPr>
-          <a:xfrm>
-            <a:off x="4505325" y="1738312"/>
-            <a:ext cx="6610350" cy="1581150"/>
-          </a:xfrm>
-          <a:prstGeom prst="roundRect">
-            <a:avLst>
-              <a:gd name="adj" fmla="val 9638"/>
-            </a:avLst>
-          </a:prstGeom>
-          <a:solidFill>
-            <a:srgbClr val="251C2D"/>
-          </a:solidFill>
-          <a:ln w="9525">
-            <a:solidFill>
-              <a:srgbClr val="EF4444"/>
-            </a:solidFill>
-          </a:ln>
-          <a:effectLst/>
-        </p:spPr>
-        <p:style>
-          <a:lnRef idx="1">
-            <a:schemeClr val="accent1"/>
-          </a:lnRef>
-          <a:fillRef idx="3">
-            <a:schemeClr val="accent1"/>
-          </a:fillRef>
-          <a:effectRef idx="2">
-            <a:schemeClr val="accent1"/>
-          </a:effectRef>
-          <a:fontRef idx="minor">
-            <a:schemeClr val="lt1"/>
-          </a:fontRef>
-        </p:style>
-        <p:txBody>
-          <a:bodyPr rtlCol="0" anchor="ctr"/>
-          <a:lstStyle/>
-          <a:p>
-            <a:pPr algn="ctr"/>
-          </a:p>
-        </p:txBody>
-      </p:sp>
-      <p:sp>
-        <p:nvSpPr>
-          <p:cNvPr id="7" name="Rounded Rectangle 6"/>
-          <p:cNvSpPr/>
-          <p:nvPr/>
-        </p:nvSpPr>
-        <p:spPr>
-          <a:xfrm>
-            <a:off x="4505325" y="3624262"/>
-            <a:ext cx="6610350" cy="1838325"/>
-          </a:xfrm>
-          <a:prstGeom prst="roundRect">
-            <a:avLst>
-              <a:gd name="adj" fmla="val 8290"/>
-            </a:avLst>
-          </a:prstGeom>
-          <a:solidFill>
-            <a:srgbClr val="1E293B"/>
-          </a:solidFill>
-          <a:ln w="9525">
-            <a:solidFill>
-              <a:srgbClr val="3B82F6"/>
-            </a:solidFill>
-          </a:ln>
-          <a:effectLst/>
-        </p:spPr>
-        <p:style>
-          <a:lnRef idx="1">
-            <a:schemeClr val="accent1"/>
-          </a:lnRef>
-          <a:fillRef idx="3">
-            <a:schemeClr val="accent1"/>
-          </a:fillRef>
-          <a:effectRef idx="2">
-            <a:schemeClr val="accent1"/>
-          </a:effectRef>
-          <a:fontRef idx="minor">
-            <a:schemeClr val="lt1"/>
-          </a:fontRef>
-        </p:style>
-        <p:txBody>
-          <a:bodyPr rtlCol="0" anchor="ctr"/>
-          <a:lstStyle/>
-          <a:p>
-            <a:pPr algn="ctr"/>
-          </a:p>
-        </p:txBody>
-      </p:sp>
-      <p:sp>
-        <p:nvSpPr>
-          <p:cNvPr id="8" name="Rounded Rectangle 7"/>
-          <p:cNvSpPr/>
-          <p:nvPr/>
-        </p:nvSpPr>
-        <p:spPr>
-          <a:xfrm>
-            <a:off x="923925" y="1638300"/>
-            <a:ext cx="114300" cy="114300"/>
-          </a:xfrm>
-          <a:prstGeom prst="roundRect">
-            <a:avLst>
-              <a:gd name="adj" fmla="val 50000"/>
-            </a:avLst>
-          </a:prstGeom>
-          <a:solidFill>
-            <a:srgbClr val="EF4444"/>
-          </a:solidFill>
-          <a:ln>
-            <a:noFill/>
-          </a:ln>
-          <a:effectLst/>
-        </p:spPr>
-        <p:style>
-          <a:lnRef idx="1">
-            <a:schemeClr val="accent1"/>
-          </a:lnRef>
-          <a:fillRef idx="3">
-            <a:schemeClr val="accent1"/>
-          </a:fillRef>
-          <a:effectRef idx="2">
-            <a:schemeClr val="accent1"/>
-          </a:effectRef>
-          <a:fontRef idx="minor">
-            <a:schemeClr val="lt1"/>
-          </a:fontRef>
-        </p:style>
-        <p:txBody>
-          <a:bodyPr rtlCol="0" anchor="ctr"/>
-          <a:lstStyle/>
-          <a:p>
-            <a:pPr algn="ctr"/>
-          </a:p>
-        </p:txBody>
-      </p:sp>
-      <p:sp>
-        <p:nvSpPr>
-          <p:cNvPr id="9" name="Rectangle 8"/>
-          <p:cNvSpPr/>
-          <p:nvPr/>
-        </p:nvSpPr>
-        <p:spPr>
-          <a:xfrm>
-            <a:off x="971550" y="1752600"/>
-            <a:ext cx="19050" cy="457200"/>
-          </a:xfrm>
-          <a:prstGeom prst="rect">
-            <a:avLst/>
-          </a:prstGeom>
-          <a:solidFill>
-            <a:srgbClr val="334155"/>
-          </a:solidFill>
-          <a:ln>
-            <a:noFill/>
-          </a:ln>
-          <a:effectLst/>
-        </p:spPr>
-        <p:style>
-          <a:lnRef idx="1">
-            <a:schemeClr val="accent1"/>
-          </a:lnRef>
-          <a:fillRef idx="3">
-            <a:schemeClr val="accent1"/>
-          </a:fillRef>
-          <a:effectRef idx="2">
-            <a:schemeClr val="accent1"/>
-          </a:effectRef>
-          <a:fontRef idx="minor">
-            <a:schemeClr val="lt1"/>
-          </a:fontRef>
-        </p:style>
-        <p:txBody>
-          <a:bodyPr rtlCol="0" anchor="ctr"/>
-          <a:lstStyle/>
-          <a:p>
-            <a:pPr algn="ctr"/>
-          </a:p>
-        </p:txBody>
-      </p:sp>
-      <p:sp>
-        <p:nvSpPr>
-          <p:cNvPr id="10" name="Rounded Rectangle 9"/>
-          <p:cNvSpPr/>
-          <p:nvPr/>
-        </p:nvSpPr>
-        <p:spPr>
-          <a:xfrm>
-            <a:off x="923925" y="2209800"/>
-            <a:ext cx="114300" cy="114300"/>
-          </a:xfrm>
-          <a:prstGeom prst="roundRect">
-            <a:avLst>
-              <a:gd name="adj" fmla="val 50000"/>
-            </a:avLst>
-          </a:prstGeom>
-          <a:solidFill>
-            <a:srgbClr val="3B82F6"/>
-          </a:solidFill>
-          <a:ln>
-            <a:noFill/>
-          </a:ln>
-          <a:effectLst/>
-        </p:spPr>
-        <p:style>
-          <a:lnRef idx="1">
-            <a:schemeClr val="accent1"/>
-          </a:lnRef>
-          <a:fillRef idx="3">
-            <a:schemeClr val="accent1"/>
-          </a:fillRef>
-          <a:effectRef idx="2">
-            <a:schemeClr val="accent1"/>
-          </a:effectRef>
-          <a:fontRef idx="minor">
-            <a:schemeClr val="lt1"/>
-          </a:fontRef>
-        </p:style>
-        <p:txBody>
-          <a:bodyPr rtlCol="0" anchor="ctr"/>
-          <a:lstStyle/>
-          <a:p>
-            <a:pPr algn="ctr"/>
-          </a:p>
-        </p:txBody>
-      </p:sp>
-      <p:sp>
-        <p:nvSpPr>
-          <p:cNvPr id="11" name="Rounded Rectangle 10"/>
-          <p:cNvSpPr/>
-          <p:nvPr/>
-        </p:nvSpPr>
-        <p:spPr>
-          <a:xfrm>
-            <a:off x="10001250" y="2085975"/>
-            <a:ext cx="800100" cy="219075"/>
-          </a:xfrm>
-          <a:prstGeom prst="roundRect">
-            <a:avLst>
-              <a:gd name="adj" fmla="val 50000"/>
-            </a:avLst>
-          </a:prstGeom>
-          <a:solidFill>
-            <a:srgbClr val="FEE2E2"/>
-          </a:solidFill>
-          <a:ln>
-            <a:noFill/>
-          </a:ln>
-          <a:effectLst/>
-        </p:spPr>
-        <p:style>
-          <a:lnRef idx="1">
-            <a:schemeClr val="accent1"/>
-          </a:lnRef>
-          <a:fillRef idx="3">
-            <a:schemeClr val="accent1"/>
-          </a:fillRef>
-          <a:effectRef idx="2">
-            <a:schemeClr val="accent1"/>
-          </a:effectRef>
-          <a:fontRef idx="minor">
-            <a:schemeClr val="lt1"/>
-          </a:fontRef>
-        </p:style>
-        <p:txBody>
-          <a:bodyPr rtlCol="0" anchor="ctr"/>
-          <a:lstStyle/>
-          <a:p>
-            <a:pPr algn="ctr"/>
-          </a:p>
-        </p:txBody>
-      </p:sp>
-      <p:sp>
-        <p:nvSpPr>
-          <p:cNvPr id="12" name="Rounded Rectangle 11"/>
-          <p:cNvSpPr/>
-          <p:nvPr/>
-        </p:nvSpPr>
-        <p:spPr>
-          <a:xfrm>
-            <a:off x="9944100" y="3971925"/>
-            <a:ext cx="857250" cy="219075"/>
-          </a:xfrm>
-          <a:prstGeom prst="roundRect">
-            <a:avLst>
-              <a:gd name="adj" fmla="val 50000"/>
-            </a:avLst>
-          </a:prstGeom>
-          <a:solidFill>
-            <a:srgbClr val="DCFCE3"/>
-          </a:solidFill>
-          <a:ln>
-            <a:noFill/>
-          </a:ln>
-          <a:effectLst/>
-        </p:spPr>
-        <p:style>
-          <a:lnRef idx="1">
-            <a:schemeClr val="accent1"/>
-          </a:lnRef>
-          <a:fillRef idx="3">
-            <a:schemeClr val="accent1"/>
-          </a:fillRef>
-          <a:effectRef idx="2">
-            <a:schemeClr val="accent1"/>
-          </a:effectRef>
-          <a:fontRef idx="minor">
-            <a:schemeClr val="lt1"/>
-          </a:fontRef>
-        </p:style>
-        <p:txBody>
-          <a:bodyPr rtlCol="0" anchor="ctr"/>
-          <a:lstStyle/>
-          <a:p>
-            <a:pPr algn="ctr"/>
-          </a:p>
-        </p:txBody>
-      </p:sp>
-      <p:sp>
-        <p:nvSpPr>
-          <p:cNvPr id="13" name="Rounded Rectangle 12"/>
-          <p:cNvSpPr/>
-          <p:nvPr/>
-        </p:nvSpPr>
-        <p:spPr>
-          <a:xfrm>
-            <a:off x="7439025" y="4805362"/>
-            <a:ext cx="1733550" cy="342900"/>
-          </a:xfrm>
-          <a:prstGeom prst="roundRect">
-            <a:avLst>
-              <a:gd name="adj" fmla="val 22222"/>
-            </a:avLst>
-          </a:prstGeom>
-          <a:solidFill>
-            <a:srgbClr val="3B82F6"/>
-          </a:solidFill>
-          <a:ln>
-            <a:noFill/>
-          </a:ln>
-          <a:effectLst/>
-        </p:spPr>
-        <p:style>
-          <a:lnRef idx="1">
-            <a:schemeClr val="accent1"/>
-          </a:lnRef>
-          <a:fillRef idx="3">
-            <a:schemeClr val="accent1"/>
-          </a:fillRef>
-          <a:effectRef idx="2">
-            <a:schemeClr val="accent1"/>
-          </a:effectRef>
-          <a:fontRef idx="minor">
-            <a:schemeClr val="lt1"/>
-          </a:fontRef>
-        </p:style>
-        <p:txBody>
-          <a:bodyPr rtlCol="0" anchor="ctr"/>
-          <a:lstStyle/>
-          <a:p>
-            <a:pPr algn="ctr"/>
-          </a:p>
-        </p:txBody>
-      </p:sp>
-      <p:pic>
-        <p:nvPicPr>
-          <p:cNvPr id="14" name="Picture 13" descr="image.png"/>
-          <p:cNvPicPr>
-            <a:picLocks noChangeAspect="1"/>
-          </p:cNvPicPr>
-          <p:nvPr/>
-        </p:nvPicPr>
-        <p:blipFill>
-          <a:blip r:embed="rId2"/>
-          <a:stretch>
-            <a:fillRect/>
-          </a:stretch>
-        </p:blipFill>
-        <p:spPr>
-          <a:xfrm>
-            <a:off x="1076325" y="5791200"/>
-            <a:ext cx="133350" cy="133350"/>
-          </a:xfrm>
-          <a:prstGeom prst="rect">
-            <a:avLst/>
-          </a:prstGeom>
-        </p:spPr>
-      </p:pic>
-      <p:pic>
-        <p:nvPicPr>
-          <p:cNvPr id="15" name="Picture 14" descr="image.png"/>
-          <p:cNvPicPr>
-            <a:picLocks noChangeAspect="1"/>
-          </p:cNvPicPr>
-          <p:nvPr/>
-        </p:nvPicPr>
-        <p:blipFill>
-          <a:blip r:embed="rId3"/>
-          <a:stretch>
-            <a:fillRect/>
-          </a:stretch>
-        </p:blipFill>
-        <p:spPr>
-          <a:xfrm>
-            <a:off x="5667375" y="4900612"/>
-            <a:ext cx="133350" cy="152400"/>
-          </a:xfrm>
-          <a:prstGeom prst="rect">
-            <a:avLst/>
-          </a:prstGeom>
-        </p:spPr>
-      </p:pic>
-      <p:pic>
-        <p:nvPicPr>
-          <p:cNvPr id="16" name="Picture 15" descr="image.png"/>
-          <p:cNvPicPr>
-            <a:picLocks noChangeAspect="1"/>
-          </p:cNvPicPr>
-          <p:nvPr/>
-        </p:nvPicPr>
-        <p:blipFill>
-          <a:blip r:embed="rId3"/>
-          <a:stretch>
-            <a:fillRect/>
-          </a:stretch>
-        </p:blipFill>
-        <p:spPr>
-          <a:xfrm>
-            <a:off x="7077075" y="4900612"/>
-            <a:ext cx="133350" cy="152400"/>
-          </a:xfrm>
-          <a:prstGeom prst="rect">
-            <a:avLst/>
-          </a:prstGeom>
-        </p:spPr>
-      </p:pic>
-      <p:pic>
-        <p:nvPicPr>
-          <p:cNvPr id="17" name="Picture 16" descr="image.png"/>
-          <p:cNvPicPr>
-            <a:picLocks noChangeAspect="1"/>
-          </p:cNvPicPr>
-          <p:nvPr/>
-        </p:nvPicPr>
-        <p:blipFill>
-          <a:blip r:embed="rId4"/>
-          <a:stretch>
-            <a:fillRect/>
-          </a:stretch>
-        </p:blipFill>
-        <p:spPr>
-          <a:xfrm>
-            <a:off x="4819650" y="4881562"/>
-            <a:ext cx="171450" cy="190500"/>
-          </a:xfrm>
-          <a:prstGeom prst="rect">
-            <a:avLst/>
-          </a:prstGeom>
-        </p:spPr>
-      </p:pic>
-      <p:pic>
-        <p:nvPicPr>
-          <p:cNvPr id="18" name="Picture 17" descr="image.png"/>
-          <p:cNvPicPr>
-            <a:picLocks noChangeAspect="1"/>
-          </p:cNvPicPr>
-          <p:nvPr/>
-        </p:nvPicPr>
-        <p:blipFill>
-          <a:blip r:embed="rId5"/>
-          <a:stretch>
-            <a:fillRect/>
-          </a:stretch>
-        </p:blipFill>
-        <p:spPr>
-          <a:xfrm>
-            <a:off x="6029325" y="4881562"/>
-            <a:ext cx="123825" cy="190500"/>
-          </a:xfrm>
-          <a:prstGeom prst="rect">
-            <a:avLst/>
-          </a:prstGeom>
-        </p:spPr>
-      </p:pic>
-      <p:pic>
-        <p:nvPicPr>
-          <p:cNvPr id="19" name="Picture 18" descr="image.png"/>
-          <p:cNvPicPr>
-            <a:picLocks noChangeAspect="1"/>
-          </p:cNvPicPr>
-          <p:nvPr/>
-        </p:nvPicPr>
-        <p:blipFill>
-          <a:blip r:embed="rId6"/>
-          <a:stretch>
-            <a:fillRect/>
-          </a:stretch>
-        </p:blipFill>
-        <p:spPr>
-          <a:xfrm>
-            <a:off x="7591425" y="4881562"/>
-            <a:ext cx="219075" cy="190500"/>
-          </a:xfrm>
-          <a:prstGeom prst="rect">
-            <a:avLst/>
-          </a:prstGeom>
-        </p:spPr>
-      </p:pic>
-      <p:sp>
-        <p:nvSpPr>
-          <p:cNvPr id="20" name="TextBox 19"/>
-          <p:cNvSpPr txBox="1"/>
-          <p:nvPr/>
-        </p:nvSpPr>
-        <p:spPr>
-          <a:xfrm>
-            <a:off x="609600" y="457200"/>
-            <a:ext cx="11582400" cy="190500"/>
-          </a:xfrm>
-          <a:prstGeom prst="rect">
-            <a:avLst/>
-          </a:prstGeom>
-          <a:noFill/>
-        </p:spPr>
-        <p:txBody>
-          <a:bodyPr wrap="none" lIns="0" rIns="0" tIns="0" bIns="0" anchor="t">
-            <a:spAutoFit/>
-          </a:bodyPr>
-          <a:lstStyle/>
-          <a:p>
-            <a:pPr algn="l"/>
-            <a:r>
-              <a:rPr b="1" sz="1200" i="0" u="none">
-                <a:solidFill>
-                  <a:srgbClr val="3B82F6"/>
-                </a:solidFill>
-                <a:latin typeface="Outfit"/>
-              </a:rPr>
-              <a:t>07 / PROTOTYPE: TRANSFER RISK UI</a:t>
-            </a:r>
-          </a:p>
-        </p:txBody>
-      </p:sp>
-      <p:sp>
-        <p:nvSpPr>
-          <p:cNvPr id="21" name="TextBox 20"/>
-          <p:cNvSpPr txBox="1"/>
-          <p:nvPr/>
-        </p:nvSpPr>
-        <p:spPr>
-          <a:xfrm>
-            <a:off x="923925" y="1114425"/>
-            <a:ext cx="3700462" cy="238125"/>
-          </a:xfrm>
-          <a:prstGeom prst="rect">
-            <a:avLst/>
-          </a:prstGeom>
-          <a:noFill/>
-        </p:spPr>
-        <p:txBody>
-          <a:bodyPr wrap="none" lIns="0" rIns="0" tIns="0" bIns="0" anchor="t">
-            <a:spAutoFit/>
-          </a:bodyPr>
-          <a:lstStyle/>
-          <a:p>
-            <a:pPr algn="l"/>
-            <a:r>
-              <a:rPr b="1" sz="1500" i="0" u="none">
-                <a:solidFill>
-                  <a:srgbClr val="FFFFFF"/>
-                </a:solidFill>
-                <a:latin typeface="Outfit"/>
-              </a:rPr>
-              <a:t>Active Journey</a:t>
-            </a:r>
-          </a:p>
-        </p:txBody>
-      </p:sp>
-      <p:sp>
-        <p:nvSpPr>
-          <p:cNvPr id="22" name="TextBox 21"/>
-          <p:cNvSpPr txBox="1"/>
-          <p:nvPr/>
-        </p:nvSpPr>
-        <p:spPr>
-          <a:xfrm>
-            <a:off x="1076325" y="5534025"/>
-            <a:ext cx="3143250" cy="161925"/>
-          </a:xfrm>
-          <a:prstGeom prst="rect">
-            <a:avLst/>
-          </a:prstGeom>
-          <a:noFill/>
-        </p:spPr>
-        <p:txBody>
-          <a:bodyPr wrap="none" lIns="0" rIns="0" tIns="0" bIns="0" anchor="t">
-            <a:spAutoFit/>
-          </a:bodyPr>
-          <a:lstStyle/>
-          <a:p>
-            <a:pPr algn="l"/>
-            <a:r>
-              <a:rPr b="0" sz="1050" i="0" u="none">
-                <a:solidFill>
-                  <a:srgbClr val="CBD5E1"/>
-                </a:solidFill>
-                <a:latin typeface="Inter"/>
-              </a:rPr>
-              <a:t>Recent Report</a:t>
-            </a:r>
-          </a:p>
-        </p:txBody>
-      </p:sp>
-      <p:sp>
-        <p:nvSpPr>
-          <p:cNvPr id="23" name="TextBox 22"/>
-          <p:cNvSpPr txBox="1"/>
-          <p:nvPr/>
-        </p:nvSpPr>
-        <p:spPr>
-          <a:xfrm>
-            <a:off x="1076325" y="5772150"/>
-            <a:ext cx="3143250" cy="161925"/>
-          </a:xfrm>
-          <a:prstGeom prst="rect">
-            <a:avLst/>
-          </a:prstGeom>
-          <a:noFill/>
-        </p:spPr>
-        <p:txBody>
-          <a:bodyPr wrap="none" lIns="209550" rIns="0" tIns="0" bIns="0" anchor="t">
-            <a:spAutoFit/>
-          </a:bodyPr>
-          <a:lstStyle/>
-          <a:p>
-            <a:pPr algn="l"/>
-            <a:r>
-              <a:rPr b="1" sz="1050" i="0" u="none">
-                <a:solidFill>
-                  <a:srgbClr val="F8FAFC"/>
-                </a:solidFill>
-                <a:latin typeface="Inter"/>
-              </a:rPr>
-              <a:t>Train delayed by 25m.</a:t>
-            </a:r>
-          </a:p>
-        </p:txBody>
-      </p:sp>
-      <p:sp>
-        <p:nvSpPr>
-          <p:cNvPr id="24" name="TextBox 23"/>
-          <p:cNvSpPr txBox="1"/>
-          <p:nvPr/>
-        </p:nvSpPr>
-        <p:spPr>
-          <a:xfrm>
-            <a:off x="4819650" y="2490787"/>
-            <a:ext cx="6076950" cy="514350"/>
-          </a:xfrm>
-          <a:prstGeom prst="rect">
-            <a:avLst/>
-          </a:prstGeom>
-          <a:noFill/>
-        </p:spPr>
-        <p:txBody>
-          <a:bodyPr wrap="square" lIns="0" rIns="0" tIns="0" bIns="0" anchor="t">
-            <a:spAutoFit/>
-          </a:bodyPr>
-          <a:lstStyle/>
-          <a:p>
-            <a:pPr algn="l">
-              <a:lnSpc>
-                <a:spcPts val="2025"/>
-              </a:lnSpc>
-            </a:pPr>
-            <a:r>
-              <a:rPr b="0" sz="1350" i="0" u="none">
-                <a:solidFill>
-                  <a:srgbClr val="F8FAFC"/>
-                </a:solidFill>
-                <a:latin typeface="Inter"/>
-              </a:rPr>
-              <a:t>Train arrival ETA (09:40 AM) exceeds KSRTC feeder bus departure (09:35 AM). Connection will be missed.</a:t>
-            </a:r>
-          </a:p>
-        </p:txBody>
-      </p:sp>
-      <p:sp>
-        <p:nvSpPr>
-          <p:cNvPr id="25" name="TextBox 24"/>
-          <p:cNvSpPr txBox="1"/>
-          <p:nvPr/>
-        </p:nvSpPr>
-        <p:spPr>
-          <a:xfrm>
-            <a:off x="4819650" y="4376737"/>
-            <a:ext cx="7372350" cy="200025"/>
-          </a:xfrm>
-          <a:prstGeom prst="rect">
-            <a:avLst/>
-          </a:prstGeom>
-          <a:noFill/>
-        </p:spPr>
-        <p:txBody>
-          <a:bodyPr wrap="none" lIns="0" rIns="0" tIns="0" bIns="0" anchor="t">
-            <a:spAutoFit/>
-          </a:bodyPr>
-          <a:lstStyle/>
-          <a:p>
-            <a:pPr algn="l"/>
-            <a:r>
-              <a:rPr b="0" sz="1350" i="0" u="none">
-                <a:solidFill>
-                  <a:srgbClr val="CBD5E1"/>
-                </a:solidFill>
-                <a:latin typeface="Inter"/>
-              </a:rPr>
-              <a:t>Switch to Water Transport.</a:t>
-            </a:r>
-          </a:p>
-        </p:txBody>
-      </p:sp>
-      <p:sp>
-        <p:nvSpPr>
-          <p:cNvPr id="26" name="TextBox 25"/>
-          <p:cNvSpPr txBox="1"/>
-          <p:nvPr/>
-        </p:nvSpPr>
-        <p:spPr>
-          <a:xfrm>
-            <a:off x="1190625" y="1581150"/>
-            <a:ext cx="2333625" cy="190500"/>
-          </a:xfrm>
-          <a:prstGeom prst="rect">
-            <a:avLst/>
-          </a:prstGeom>
-          <a:noFill/>
-        </p:spPr>
-        <p:txBody>
-          <a:bodyPr wrap="none" lIns="0" rIns="0" tIns="0" bIns="0" anchor="t">
-            <a:spAutoFit/>
-          </a:bodyPr>
-          <a:lstStyle/>
-          <a:p>
-            <a:pPr algn="l"/>
-            <a:r>
-              <a:rPr b="1" sz="1200" i="0" u="none">
-                <a:solidFill>
-                  <a:srgbClr val="F8FAFC"/>
-                </a:solidFill>
-                <a:latin typeface="Inter"/>
-              </a:rPr>
-              <a:t>Kollam Junction</a:t>
-            </a:r>
-          </a:p>
-        </p:txBody>
-      </p:sp>
-      <p:sp>
-        <p:nvSpPr>
-          <p:cNvPr id="27" name="TextBox 26"/>
-          <p:cNvSpPr txBox="1"/>
-          <p:nvPr/>
-        </p:nvSpPr>
-        <p:spPr>
-          <a:xfrm>
-            <a:off x="1190625" y="1809750"/>
-            <a:ext cx="2333625" cy="161925"/>
-          </a:xfrm>
-          <a:prstGeom prst="rect">
-            <a:avLst/>
-          </a:prstGeom>
-          <a:noFill/>
-        </p:spPr>
-        <p:txBody>
-          <a:bodyPr wrap="none" lIns="0" rIns="0" tIns="0" bIns="0" anchor="t">
-            <a:spAutoFit/>
-          </a:bodyPr>
-          <a:lstStyle/>
-          <a:p>
-            <a:pPr algn="l"/>
-            <a:r>
-              <a:rPr b="0" sz="1050" i="0" u="none">
-                <a:solidFill>
-                  <a:srgbClr val="94A3B8"/>
-                </a:solidFill>
-                <a:latin typeface="Inter"/>
-              </a:rPr>
-              <a:t>09:15 AM (Delayed)</a:t>
-            </a:r>
-          </a:p>
-        </p:txBody>
-      </p:sp>
-      <p:sp>
-        <p:nvSpPr>
-          <p:cNvPr id="28" name="TextBox 27"/>
-          <p:cNvSpPr txBox="1"/>
-          <p:nvPr/>
-        </p:nvSpPr>
-        <p:spPr>
-          <a:xfrm>
-            <a:off x="1190625" y="2200275"/>
-            <a:ext cx="2333625" cy="190500"/>
-          </a:xfrm>
-          <a:prstGeom prst="rect">
-            <a:avLst/>
-          </a:prstGeom>
-          <a:noFill/>
-        </p:spPr>
-        <p:txBody>
-          <a:bodyPr wrap="none" lIns="0" rIns="0" tIns="0" bIns="0" anchor="t">
-            <a:spAutoFit/>
-          </a:bodyPr>
-          <a:lstStyle/>
-          <a:p>
-            <a:pPr algn="l"/>
-            <a:r>
-              <a:rPr b="1" sz="1200" i="0" u="none">
-                <a:solidFill>
-                  <a:srgbClr val="F8FAFC"/>
-                </a:solidFill>
-                <a:latin typeface="Inter"/>
-              </a:rPr>
-              <a:t>Ashtamudi Ferry Terminal</a:t>
-            </a:r>
-          </a:p>
-        </p:txBody>
-      </p:sp>
-      <p:sp>
-        <p:nvSpPr>
-          <p:cNvPr id="29" name="TextBox 28"/>
-          <p:cNvSpPr txBox="1"/>
-          <p:nvPr/>
-        </p:nvSpPr>
-        <p:spPr>
-          <a:xfrm>
-            <a:off x="1190625" y="2428875"/>
-            <a:ext cx="2333625" cy="161925"/>
-          </a:xfrm>
-          <a:prstGeom prst="rect">
-            <a:avLst/>
-          </a:prstGeom>
-          <a:noFill/>
-        </p:spPr>
-        <p:txBody>
-          <a:bodyPr wrap="none" lIns="0" rIns="0" tIns="0" bIns="0" anchor="t">
-            <a:spAutoFit/>
-          </a:bodyPr>
-          <a:lstStyle/>
-          <a:p>
-            <a:pPr algn="l"/>
-            <a:r>
-              <a:rPr b="0" sz="1050" i="0" u="none">
-                <a:solidFill>
-                  <a:srgbClr val="94A3B8"/>
-                </a:solidFill>
-                <a:latin typeface="Inter"/>
-              </a:rPr>
-              <a:t>10:05 AM</a:t>
-            </a:r>
-          </a:p>
-        </p:txBody>
-      </p:sp>
-      <p:sp>
-        <p:nvSpPr>
-          <p:cNvPr id="30" name="TextBox 29"/>
-          <p:cNvSpPr txBox="1"/>
-          <p:nvPr/>
-        </p:nvSpPr>
-        <p:spPr>
-          <a:xfrm>
-            <a:off x="4819650" y="2052637"/>
-            <a:ext cx="3175396" cy="285750"/>
-          </a:xfrm>
-          <a:prstGeom prst="rect">
-            <a:avLst/>
-          </a:prstGeom>
-          <a:noFill/>
-        </p:spPr>
-        <p:txBody>
-          <a:bodyPr wrap="none" lIns="0" rIns="0" tIns="0" bIns="0" anchor="t">
-            <a:spAutoFit/>
-          </a:bodyPr>
-          <a:lstStyle/>
-          <a:p>
-            <a:pPr algn="l"/>
-            <a:r>
-              <a:rPr b="1" sz="1800" i="0" u="none">
-                <a:solidFill>
-                  <a:srgbClr val="FCA5A5"/>
-                </a:solidFill>
-                <a:latin typeface="Outfit"/>
-              </a:rPr>
-              <a:t>Transfer Risk Detected</a:t>
-            </a:r>
-          </a:p>
-        </p:txBody>
-      </p:sp>
-      <p:sp>
-        <p:nvSpPr>
-          <p:cNvPr id="31" name="TextBox 30"/>
-          <p:cNvSpPr txBox="1"/>
-          <p:nvPr/>
-        </p:nvSpPr>
-        <p:spPr>
-          <a:xfrm>
-            <a:off x="10115550" y="2124075"/>
-            <a:ext cx="666750" cy="142875"/>
-          </a:xfrm>
-          <a:prstGeom prst="rect">
-            <a:avLst/>
-          </a:prstGeom>
-          <a:noFill/>
-        </p:spPr>
-        <p:txBody>
-          <a:bodyPr wrap="square" lIns="0" rIns="0" tIns="0" bIns="0" anchor="t">
-            <a:spAutoFit/>
-          </a:bodyPr>
-          <a:lstStyle/>
-          <a:p>
-            <a:pPr algn="l"/>
-            <a:r>
-              <a:rPr b="1" sz="900" i="0" u="none">
-                <a:solidFill>
-                  <a:srgbClr val="991B1B"/>
-                </a:solidFill>
-                <a:latin typeface="Inter"/>
-              </a:rPr>
-              <a:t>HIGH RISK</a:t>
-            </a:r>
-          </a:p>
-        </p:txBody>
-      </p:sp>
-      <p:sp>
-        <p:nvSpPr>
-          <p:cNvPr id="32" name="TextBox 31"/>
-          <p:cNvSpPr txBox="1"/>
-          <p:nvPr/>
-        </p:nvSpPr>
-        <p:spPr>
-          <a:xfrm>
-            <a:off x="4819650" y="3938587"/>
-            <a:ext cx="4088010" cy="285750"/>
-          </a:xfrm>
-          <a:prstGeom prst="rect">
-            <a:avLst/>
-          </a:prstGeom>
-          <a:noFill/>
-        </p:spPr>
-        <p:txBody>
-          <a:bodyPr wrap="none" lIns="0" rIns="0" tIns="0" bIns="0" anchor="t">
-            <a:spAutoFit/>
-          </a:bodyPr>
-          <a:lstStyle/>
-          <a:p>
-            <a:pPr algn="l"/>
-            <a:r>
-              <a:rPr b="1" sz="1800" i="0" u="none">
-                <a:solidFill>
-                  <a:srgbClr val="93C5FD"/>
-                </a:solidFill>
-                <a:latin typeface="Outfit"/>
-              </a:rPr>
-              <a:t>Alternative Multimodal Route</a:t>
-            </a:r>
-          </a:p>
-        </p:txBody>
-      </p:sp>
-      <p:sp>
-        <p:nvSpPr>
-          <p:cNvPr id="33" name="TextBox 32"/>
-          <p:cNvSpPr txBox="1"/>
-          <p:nvPr/>
-        </p:nvSpPr>
-        <p:spPr>
-          <a:xfrm>
-            <a:off x="10058400" y="4010025"/>
-            <a:ext cx="723900" cy="142875"/>
-          </a:xfrm>
-          <a:prstGeom prst="rect">
-            <a:avLst/>
-          </a:prstGeom>
-          <a:noFill/>
-        </p:spPr>
-        <p:txBody>
-          <a:bodyPr wrap="square" lIns="0" rIns="0" tIns="0" bIns="0" anchor="t">
-            <a:spAutoFit/>
-          </a:bodyPr>
-          <a:lstStyle/>
-          <a:p>
-            <a:pPr algn="l"/>
-            <a:r>
-              <a:rPr b="1" sz="900" i="0" u="none">
-                <a:solidFill>
-                  <a:srgbClr val="166534"/>
-                </a:solidFill>
-                <a:latin typeface="Inter"/>
-              </a:rPr>
-              <a:t>AVAILABLE</a:t>
-            </a:r>
-          </a:p>
-        </p:txBody>
-      </p:sp>
-      <p:sp>
-        <p:nvSpPr>
-          <p:cNvPr id="34" name="TextBox 33"/>
-          <p:cNvSpPr txBox="1"/>
-          <p:nvPr/>
-        </p:nvSpPr>
-        <p:spPr>
-          <a:xfrm>
-            <a:off x="5067300" y="4881562"/>
-            <a:ext cx="657225" cy="190500"/>
-          </a:xfrm>
-          <a:prstGeom prst="rect">
-            <a:avLst/>
-          </a:prstGeom>
-          <a:noFill/>
-        </p:spPr>
-        <p:txBody>
-          <a:bodyPr wrap="none" lIns="0" rIns="0" tIns="0" bIns="0" anchor="t">
-            <a:spAutoFit/>
-          </a:bodyPr>
-          <a:lstStyle/>
-          <a:p>
-            <a:pPr algn="l"/>
-            <a:r>
-              <a:rPr b="1" sz="1200" i="0" u="none">
-                <a:solidFill>
-                  <a:srgbClr val="F8FAFC"/>
-                </a:solidFill>
-                <a:latin typeface="Inter"/>
-              </a:rPr>
-              <a:t>Train</a:t>
-            </a:r>
-          </a:p>
-        </p:txBody>
-      </p:sp>
-      <p:sp>
-        <p:nvSpPr>
-          <p:cNvPr id="35" name="TextBox 34"/>
-          <p:cNvSpPr txBox="1"/>
-          <p:nvPr/>
-        </p:nvSpPr>
-        <p:spPr>
-          <a:xfrm>
-            <a:off x="6229350" y="4881562"/>
-            <a:ext cx="904875" cy="190500"/>
-          </a:xfrm>
-          <a:prstGeom prst="rect">
-            <a:avLst/>
-          </a:prstGeom>
-          <a:noFill/>
-        </p:spPr>
-        <p:txBody>
-          <a:bodyPr wrap="none" lIns="0" rIns="0" tIns="0" bIns="0" anchor="t">
-            <a:spAutoFit/>
-          </a:bodyPr>
-          <a:lstStyle/>
-          <a:p>
-            <a:pPr algn="l"/>
-            <a:r>
-              <a:rPr b="1" sz="1200" i="0" u="none">
-                <a:solidFill>
-                  <a:srgbClr val="F8FAFC"/>
-                </a:solidFill>
-                <a:latin typeface="Inter"/>
-              </a:rPr>
-              <a:t>Walk 5m</a:t>
-            </a:r>
-          </a:p>
-        </p:txBody>
-      </p:sp>
-      <p:sp>
-        <p:nvSpPr>
-          <p:cNvPr id="36" name="TextBox 35"/>
-          <p:cNvSpPr txBox="1"/>
-          <p:nvPr/>
-        </p:nvSpPr>
-        <p:spPr>
-          <a:xfrm>
-            <a:off x="7886700" y="4881562"/>
-            <a:ext cx="1419225" cy="190500"/>
-          </a:xfrm>
-          <a:prstGeom prst="rect">
-            <a:avLst/>
-          </a:prstGeom>
-          <a:noFill/>
-        </p:spPr>
-        <p:txBody>
-          <a:bodyPr wrap="none" lIns="0" rIns="0" tIns="0" bIns="0" anchor="t">
-            <a:spAutoFit/>
-          </a:bodyPr>
-          <a:lstStyle/>
-          <a:p>
-            <a:pPr algn="l"/>
-            <a:r>
-              <a:rPr b="1" sz="1200" i="0" u="none">
-                <a:solidFill>
-                  <a:srgbClr val="FFFFFF"/>
-                </a:solidFill>
-                <a:latin typeface="Inter"/>
-              </a:rPr>
-              <a:t>09:55 AM Ferry</a:t>
-            </a:r>
-          </a:p>
-        </p:txBody>
-      </p:sp>
-    </p:spTree>
-  </p:cSld>
-  <p:clrMapOvr>
-    <a:masterClrMapping/>
-  </p:clrMapOvr>
-</p:sld>
-</file>
-
-<file path=ppt/slides/slide9.xml><?xml version="1.0" encoding="utf-8"?>
-<p:sld xmlns:a="http://schemas.openxmlformats.org/drawingml/2006/main" xmlns:p="http://schemas.openxmlformats.org/presentationml/2006/main" xmlns:r="http://schemas.openxmlformats.org/officeDocument/2006/relationships">
-  <p:cSld>
-    <p:bg>
-      <p:bgPr>
-        <a:solidFill>
-          <a:srgbClr val="0F172A"/>
-        </a:solidFill>
-        <a:effectLst/>
-      </p:bgPr>
-    </p:bg>
-    <p:spTree>
-      <p:nvGrpSpPr>
-        <p:cNvPr id="1" name=""/>
-        <p:cNvGrpSpPr/>
-        <p:nvPr/>
-      </p:nvGrpSpPr>
-      <p:grpSpPr/>
-      <p:sp>
-        <p:nvSpPr>
-          <p:cNvPr id="2" name="Rectangle 1"/>
-          <p:cNvSpPr/>
-          <p:nvPr/>
-        </p:nvSpPr>
-        <p:spPr>
-          <a:xfrm>
-            <a:off x="0" y="3429000"/>
-            <a:ext cx="5334000" cy="3429000"/>
-          </a:xfrm>
-          <a:prstGeom prst="rect">
-            <a:avLst/>
-          </a:prstGeom>
-          <a:solidFill>
-            <a:srgbClr val="0F172A"/>
-          </a:solidFill>
-          <a:ln>
-            <a:noFill/>
-          </a:ln>
-          <a:effectLst/>
-        </p:spPr>
-        <p:style>
-          <a:lnRef idx="1">
-            <a:schemeClr val="accent1"/>
-          </a:lnRef>
-          <a:fillRef idx="3">
-            <a:schemeClr val="accent1"/>
-          </a:fillRef>
-          <a:effectRef idx="2">
-            <a:schemeClr val="accent1"/>
-          </a:effectRef>
-          <a:fontRef idx="minor">
-            <a:schemeClr val="lt1"/>
-          </a:fontRef>
-        </p:style>
-        <p:txBody>
-          <a:bodyPr rtlCol="0" anchor="ctr"/>
-          <a:lstStyle/>
-          <a:p>
-            <a:pPr algn="ctr"/>
-          </a:p>
-        </p:txBody>
-      </p:sp>
-      <p:sp>
-        <p:nvSpPr>
-          <p:cNvPr id="3" name="Rectangle 2"/>
-          <p:cNvSpPr/>
-          <p:nvPr/>
-        </p:nvSpPr>
-        <p:spPr>
-          <a:xfrm>
-            <a:off x="6096000" y="4165252"/>
-            <a:ext cx="5334000" cy="1133475"/>
-          </a:xfrm>
-          <a:prstGeom prst="rect">
-            <a:avLst/>
-          </a:prstGeom>
-          <a:solidFill>
-            <a:srgbClr val="1E293B"/>
-          </a:solidFill>
-          <a:ln>
-            <a:noFill/>
-          </a:ln>
-          <a:effectLst/>
-        </p:spPr>
-        <p:style>
-          <a:lnRef idx="1">
-            <a:schemeClr val="accent1"/>
-          </a:lnRef>
-          <a:fillRef idx="3">
-            <a:schemeClr val="accent1"/>
-          </a:fillRef>
-          <a:effectRef idx="2">
-            <a:schemeClr val="accent1"/>
-          </a:effectRef>
-          <a:fontRef idx="minor">
-            <a:schemeClr val="lt1"/>
-          </a:fontRef>
-        </p:style>
-        <p:txBody>
-          <a:bodyPr rtlCol="0" anchor="ctr"/>
-          <a:lstStyle/>
-          <a:p>
-            <a:pPr algn="ctr"/>
-          </a:p>
-        </p:txBody>
-      </p:sp>
-      <p:sp>
-        <p:nvSpPr>
-          <p:cNvPr id="4" name="Rectangle 3"/>
-          <p:cNvSpPr/>
-          <p:nvPr/>
-        </p:nvSpPr>
-        <p:spPr>
-          <a:xfrm>
-            <a:off x="6096000" y="4165252"/>
-            <a:ext cx="38100" cy="1133475"/>
-          </a:xfrm>
-          <a:prstGeom prst="rect">
-            <a:avLst/>
-          </a:prstGeom>
-          <a:solidFill>
-            <a:srgbClr val="EF4444"/>
-          </a:solidFill>
-          <a:ln>
-            <a:noFill/>
-          </a:ln>
-          <a:effectLst/>
-        </p:spPr>
-        <p:style>
-          <a:lnRef idx="1">
-            <a:schemeClr val="accent1"/>
-          </a:lnRef>
-          <a:fillRef idx="3">
-            <a:schemeClr val="accent1"/>
-          </a:fillRef>
-          <a:effectRef idx="2">
-            <a:schemeClr val="accent1"/>
-          </a:effectRef>
-          <a:fontRef idx="minor">
-            <a:schemeClr val="lt1"/>
-          </a:fontRef>
-        </p:style>
-        <p:txBody>
-          <a:bodyPr rtlCol="0" anchor="ctr"/>
-          <a:lstStyle/>
-          <a:p>
-            <a:pPr algn="ctr"/>
-          </a:p>
-        </p:txBody>
-      </p:sp>
-      <p:pic>
-        <p:nvPicPr>
-          <p:cNvPr id="5" name="Picture 4" descr="image.png"/>
-          <p:cNvPicPr>
-            <a:picLocks noChangeAspect="1"/>
-          </p:cNvPicPr>
-          <p:nvPr/>
-        </p:nvPicPr>
-        <p:blipFill>
-          <a:blip r:embed="rId2"/>
-          <a:stretch>
-            <a:fillRect/>
-          </a:stretch>
-        </p:blipFill>
-        <p:spPr>
-          <a:xfrm>
-            <a:off x="0" y="0"/>
-            <a:ext cx="5334000" cy="6858000"/>
-          </a:xfrm>
-          <a:prstGeom prst="rect">
-            <a:avLst/>
-          </a:prstGeom>
-        </p:spPr>
-      </p:pic>
-      <p:sp>
-        <p:nvSpPr>
-          <p:cNvPr id="6" name="TextBox 5"/>
-          <p:cNvSpPr txBox="1"/>
-          <p:nvPr/>
-        </p:nvSpPr>
-        <p:spPr>
-          <a:xfrm>
-            <a:off x="6096000" y="1559272"/>
-            <a:ext cx="6096000" cy="190500"/>
-          </a:xfrm>
-          <a:prstGeom prst="rect">
-            <a:avLst/>
-          </a:prstGeom>
-          <a:noFill/>
-        </p:spPr>
-        <p:txBody>
-          <a:bodyPr wrap="none" lIns="0" rIns="0" tIns="0" bIns="0" anchor="t">
-            <a:spAutoFit/>
-          </a:bodyPr>
-          <a:lstStyle/>
-          <a:p>
-            <a:pPr algn="l"/>
-            <a:r>
-              <a:rPr b="1" sz="1200" i="0" u="none">
+              <a:rPr sz="1200" b="1" i="0" u="none">
                 <a:solidFill>
                   <a:srgbClr val="EF4444"/>
                 </a:solidFill>
@@ -9371,7 +8853,7 @@
           <a:noFill/>
         </p:spPr>
         <p:txBody>
-          <a:bodyPr wrap="square" lIns="0" rIns="0" tIns="0" bIns="0" anchor="t">
+          <a:bodyPr wrap="square" lIns="0" tIns="0" rIns="0" bIns="0" anchor="t">
             <a:spAutoFit/>
           </a:bodyPr>
           <a:lstStyle/>
@@ -9382,7 +8864,7 @@
               </a:lnSpc>
             </a:pPr>
             <a:r>
-              <a:rPr b="1" sz="3600" i="0" u="none">
+              <a:rPr sz="3600" b="1" i="0" u="none">
                 <a:solidFill>
                   <a:srgbClr val="F8FAFC"/>
                 </a:solidFill>
@@ -9410,7 +8892,7 @@
           <a:noFill/>
         </p:spPr>
         <p:txBody>
-          <a:bodyPr wrap="square" lIns="0" rIns="0" tIns="0" bIns="0" anchor="t">
+          <a:bodyPr wrap="square" lIns="0" tIns="0" rIns="0" bIns="0" anchor="t">
             <a:spAutoFit/>
           </a:bodyPr>
           <a:lstStyle/>
@@ -9421,7 +8903,7 @@
               </a:lnSpc>
             </a:pPr>
             <a:r>
-              <a:rPr b="0" sz="1500" i="0" u="none">
+              <a:rPr sz="1500" b="0" i="0" u="none">
                 <a:solidFill>
                   <a:srgbClr val="CBD5E1"/>
                 </a:solidFill>
@@ -9449,14 +8931,14 @@
           <a:noFill/>
         </p:spPr>
         <p:txBody>
-          <a:bodyPr wrap="none" lIns="0" rIns="0" tIns="0" bIns="0" anchor="t">
+          <a:bodyPr wrap="none" lIns="0" tIns="0" rIns="0" bIns="0" anchor="t">
             <a:spAutoFit/>
           </a:bodyPr>
           <a:lstStyle/>
           <a:p>
             <a:pPr algn="l"/>
             <a:r>
-              <a:rPr b="1" sz="1350" i="0" u="none">
+              <a:rPr sz="1350" b="1" i="0" u="none">
                 <a:solidFill>
                   <a:srgbClr val="F8FAFC"/>
                 </a:solidFill>
@@ -9484,14 +8966,14 @@
           <a:noFill/>
         </p:spPr>
         <p:txBody>
-          <a:bodyPr wrap="square" lIns="0" rIns="0" tIns="0" bIns="0" anchor="t">
+          <a:bodyPr wrap="square" lIns="0" tIns="0" rIns="0" bIns="0" anchor="t">
             <a:spAutoFit/>
           </a:bodyPr>
           <a:lstStyle/>
           <a:p>
             <a:pPr algn="l"/>
             <a:r>
-              <a:rPr b="0" sz="1200" i="0" u="none">
+              <a:rPr sz="1200" b="0" i="0" u="none">
                 <a:solidFill>
                   <a:srgbClr val="94A3B8"/>
                 </a:solidFill>
